--- a/Работа_10_Этоговая преза УПИС.pptx
+++ b/Работа_10_Этоговая преза УПИС.pptx
@@ -15,22 +15,24 @@
     <p:sldId id="270" r:id="rId9"/>
     <p:sldId id="271" r:id="rId10"/>
     <p:sldId id="272" r:id="rId11"/>
-    <p:sldId id="273" r:id="rId12"/>
-    <p:sldId id="274" r:id="rId13"/>
-    <p:sldId id="275" r:id="rId14"/>
-    <p:sldId id="276" r:id="rId15"/>
-    <p:sldId id="277" r:id="rId16"/>
-    <p:sldId id="260" r:id="rId17"/>
+    <p:sldId id="279" r:id="rId12"/>
+    <p:sldId id="273" r:id="rId13"/>
+    <p:sldId id="278" r:id="rId14"/>
+    <p:sldId id="274" r:id="rId15"/>
+    <p:sldId id="275" r:id="rId16"/>
+    <p:sldId id="276" r:id="rId17"/>
+    <p:sldId id="277" r:id="rId18"/>
+    <p:sldId id="260" r:id="rId19"/>
   </p:sldIdLst>
   <p:sldSz cx="12192000" cy="6858000"/>
   <p:notesSz cx="6858000" cy="9144000"/>
   <p:embeddedFontLst>
     <p:embeddedFont>
       <p:font typeface="Montserrat"/>
-      <p:regular r:id="rId18"/>
-      <p:bold r:id="rId19"/>
-      <p:italic r:id="rId20"/>
-      <p:boldItalic r:id="rId21"/>
+      <p:regular r:id="rId20"/>
+      <p:bold r:id="rId21"/>
+      <p:italic r:id="rId22"/>
+      <p:boldItalic r:id="rId23"/>
     </p:embeddedFont>
   </p:embeddedFontLst>
   <p:defaultTextStyle>
@@ -176,7 +178,7 @@
           <a:p>
             <a:fld id="{2DB472F0-34D4-4635-92C6-3A38628EF8C8}" type="datetimeFigureOut">
               <a:rPr lang="ru-RU" smtClean="0"/>
-              <a:t>12.05.2026</a:t>
+              <a:t>26.05.2026</a:t>
             </a:fld>
             <a:endParaRPr lang="ru-RU"/>
           </a:p>
@@ -402,7 +404,7 @@
           <a:p>
             <a:fld id="{2DB472F0-34D4-4635-92C6-3A38628EF8C8}" type="datetimeFigureOut">
               <a:rPr lang="ru-RU" smtClean="0"/>
-              <a:t>12.05.2026</a:t>
+              <a:t>26.05.2026</a:t>
             </a:fld>
             <a:endParaRPr lang="ru-RU"/>
           </a:p>
@@ -723,7 +725,7 @@
           <a:p>
             <a:fld id="{2DB472F0-34D4-4635-92C6-3A38628EF8C8}" type="datetimeFigureOut">
               <a:rPr lang="ru-RU" smtClean="0"/>
-              <a:t>12.05.2026</a:t>
+              <a:t>26.05.2026</a:t>
             </a:fld>
             <a:endParaRPr lang="ru-RU"/>
           </a:p>
@@ -998,7 +1000,7 @@
           <a:p>
             <a:fld id="{2DB472F0-34D4-4635-92C6-3A38628EF8C8}" type="datetimeFigureOut">
               <a:rPr lang="ru-RU" smtClean="0"/>
-              <a:t>12.05.2026</a:t>
+              <a:t>26.05.2026</a:t>
             </a:fld>
             <a:endParaRPr lang="ru-RU"/>
           </a:p>
@@ -1272,7 +1274,7 @@
           <a:p>
             <a:fld id="{2DB472F0-34D4-4635-92C6-3A38628EF8C8}" type="datetimeFigureOut">
               <a:rPr lang="ru-RU" smtClean="0"/>
-              <a:t>12.05.2026</a:t>
+              <a:t>26.05.2026</a:t>
             </a:fld>
             <a:endParaRPr lang="ru-RU"/>
           </a:p>
@@ -1688,7 +1690,7 @@
           <a:p>
             <a:fld id="{2DB472F0-34D4-4635-92C6-3A38628EF8C8}" type="datetimeFigureOut">
               <a:rPr lang="ru-RU" smtClean="0"/>
-              <a:t>12.05.2026</a:t>
+              <a:t>26.05.2026</a:t>
             </a:fld>
             <a:endParaRPr lang="ru-RU"/>
           </a:p>
@@ -1838,7 +1840,7 @@
           <a:p>
             <a:fld id="{2DB472F0-34D4-4635-92C6-3A38628EF8C8}" type="datetimeFigureOut">
               <a:rPr lang="ru-RU" smtClean="0"/>
-              <a:t>12.05.2026</a:t>
+              <a:t>26.05.2026</a:t>
             </a:fld>
             <a:endParaRPr lang="ru-RU"/>
           </a:p>
@@ -1951,7 +1953,7 @@
           <a:p>
             <a:fld id="{2DB472F0-34D4-4635-92C6-3A38628EF8C8}" type="datetimeFigureOut">
               <a:rPr lang="ru-RU" smtClean="0"/>
-              <a:t>12.05.2026</a:t>
+              <a:t>26.05.2026</a:t>
             </a:fld>
             <a:endParaRPr lang="ru-RU"/>
           </a:p>
@@ -2262,7 +2264,7 @@
           <a:p>
             <a:fld id="{2DB472F0-34D4-4635-92C6-3A38628EF8C8}" type="datetimeFigureOut">
               <a:rPr lang="ru-RU" smtClean="0"/>
-              <a:t>12.05.2026</a:t>
+              <a:t>26.05.2026</a:t>
             </a:fld>
             <a:endParaRPr lang="ru-RU"/>
           </a:p>
@@ -2550,7 +2552,7 @@
           <a:p>
             <a:fld id="{2DB472F0-34D4-4635-92C6-3A38628EF8C8}" type="datetimeFigureOut">
               <a:rPr lang="ru-RU" smtClean="0"/>
-              <a:t>12.05.2026</a:t>
+              <a:t>26.05.2026</a:t>
             </a:fld>
             <a:endParaRPr lang="ru-RU"/>
           </a:p>
@@ -2663,7 +2665,7 @@
           <a:p>
             <a:fld id="{2DB472F0-34D4-4635-92C6-3A38628EF8C8}" type="datetimeFigureOut">
               <a:rPr lang="ru-RU" smtClean="0"/>
-              <a:t>12.05.2026</a:t>
+              <a:t>26.05.2026</a:t>
             </a:fld>
             <a:endParaRPr lang="ru-RU"/>
           </a:p>
@@ -2984,7 +2986,7 @@
           <a:p>
             <a:fld id="{2DB472F0-34D4-4635-92C6-3A38628EF8C8}" type="datetimeFigureOut">
               <a:rPr lang="ru-RU" smtClean="0"/>
-              <a:t>12.05.2026</a:t>
+              <a:t>26.05.2026</a:t>
             </a:fld>
             <a:endParaRPr lang="ru-RU"/>
           </a:p>
@@ -3192,7 +3194,7 @@
           <a:p>
             <a:fld id="{2DB472F0-34D4-4635-92C6-3A38628EF8C8}" type="datetimeFigureOut">
               <a:rPr lang="ru-RU" smtClean="0"/>
-              <a:t>12.05.2026</a:t>
+              <a:t>26.05.2026</a:t>
             </a:fld>
             <a:endParaRPr lang="ru-RU"/>
           </a:p>
@@ -3467,7 +3469,7 @@
           <a:p>
             <a:fld id="{2DB472F0-34D4-4635-92C6-3A38628EF8C8}" type="datetimeFigureOut">
               <a:rPr lang="ru-RU" smtClean="0"/>
-              <a:t>12.05.2026</a:t>
+              <a:t>26.05.2026</a:t>
             </a:fld>
             <a:endParaRPr lang="ru-RU"/>
           </a:p>
@@ -3741,7 +3743,7 @@
           <a:p>
             <a:fld id="{2DB472F0-34D4-4635-92C6-3A38628EF8C8}" type="datetimeFigureOut">
               <a:rPr lang="ru-RU" smtClean="0"/>
-              <a:t>12.05.2026</a:t>
+              <a:t>26.05.2026</a:t>
             </a:fld>
             <a:endParaRPr lang="ru-RU"/>
           </a:p>
@@ -4157,7 +4159,7 @@
           <a:p>
             <a:fld id="{2DB472F0-34D4-4635-92C6-3A38628EF8C8}" type="datetimeFigureOut">
               <a:rPr lang="ru-RU" smtClean="0"/>
-              <a:t>12.05.2026</a:t>
+              <a:t>26.05.2026</a:t>
             </a:fld>
             <a:endParaRPr lang="ru-RU"/>
           </a:p>
@@ -4307,7 +4309,7 @@
           <a:p>
             <a:fld id="{2DB472F0-34D4-4635-92C6-3A38628EF8C8}" type="datetimeFigureOut">
               <a:rPr lang="ru-RU" smtClean="0"/>
-              <a:t>12.05.2026</a:t>
+              <a:t>26.05.2026</a:t>
             </a:fld>
             <a:endParaRPr lang="ru-RU"/>
           </a:p>
@@ -4420,7 +4422,7 @@
           <a:p>
             <a:fld id="{2DB472F0-34D4-4635-92C6-3A38628EF8C8}" type="datetimeFigureOut">
               <a:rPr lang="ru-RU" smtClean="0"/>
-              <a:t>12.05.2026</a:t>
+              <a:t>26.05.2026</a:t>
             </a:fld>
             <a:endParaRPr lang="ru-RU"/>
           </a:p>
@@ -4731,7 +4733,7 @@
           <a:p>
             <a:fld id="{2DB472F0-34D4-4635-92C6-3A38628EF8C8}" type="datetimeFigureOut">
               <a:rPr lang="ru-RU" smtClean="0"/>
-              <a:t>12.05.2026</a:t>
+              <a:t>26.05.2026</a:t>
             </a:fld>
             <a:endParaRPr lang="ru-RU"/>
           </a:p>
@@ -5019,7 +5021,7 @@
           <a:p>
             <a:fld id="{2DB472F0-34D4-4635-92C6-3A38628EF8C8}" type="datetimeFigureOut">
               <a:rPr lang="ru-RU" smtClean="0"/>
-              <a:t>12.05.2026</a:t>
+              <a:t>26.05.2026</a:t>
             </a:fld>
             <a:endParaRPr lang="ru-RU"/>
           </a:p>
@@ -5146,7 +5148,7 @@
           <a:p>
             <a:fld id="{2DB472F0-34D4-4635-92C6-3A38628EF8C8}" type="datetimeFigureOut">
               <a:rPr lang="ru-RU" smtClean="0"/>
-              <a:t>12.05.2026</a:t>
+              <a:t>26.05.2026</a:t>
             </a:fld>
             <a:endParaRPr lang="ru-RU"/>
           </a:p>
@@ -5481,7 +5483,7 @@
           <a:p>
             <a:fld id="{2DB472F0-34D4-4635-92C6-3A38628EF8C8}" type="datetimeFigureOut">
               <a:rPr lang="ru-RU" smtClean="0"/>
-              <a:t>12.05.2026</a:t>
+              <a:t>26.05.2026</a:t>
             </a:fld>
             <a:endParaRPr lang="ru-RU"/>
           </a:p>
@@ -5756,7 +5758,7 @@
           <a:p>
             <a:fld id="{2DB472F0-34D4-4635-92C6-3A38628EF8C8}" type="datetimeFigureOut">
               <a:rPr lang="ru-RU" smtClean="0"/>
-              <a:t>12.05.2026</a:t>
+              <a:t>26.05.2026</a:t>
             </a:fld>
             <a:endParaRPr lang="ru-RU"/>
           </a:p>
@@ -6045,7 +6047,7 @@
           <a:p>
             <a:fld id="{2DB472F0-34D4-4635-92C6-3A38628EF8C8}" type="datetimeFigureOut">
               <a:rPr lang="ru-RU" smtClean="0"/>
-              <a:t>12.05.2026</a:t>
+              <a:t>26.05.2026</a:t>
             </a:fld>
             <a:endParaRPr lang="ru-RU"/>
           </a:p>
@@ -6333,7 +6335,7 @@
           <a:p>
             <a:fld id="{2DB472F0-34D4-4635-92C6-3A38628EF8C8}" type="datetimeFigureOut">
               <a:rPr lang="ru-RU" smtClean="0"/>
-              <a:t>12.05.2026</a:t>
+              <a:t>26.05.2026</a:t>
             </a:fld>
             <a:endParaRPr lang="ru-RU"/>
           </a:p>
@@ -6763,7 +6765,7 @@
           <a:p>
             <a:fld id="{2DB472F0-34D4-4635-92C6-3A38628EF8C8}" type="datetimeFigureOut">
               <a:rPr lang="ru-RU" smtClean="0"/>
-              <a:t>12.05.2026</a:t>
+              <a:t>26.05.2026</a:t>
             </a:fld>
             <a:endParaRPr lang="ru-RU"/>
           </a:p>
@@ -6927,7 +6929,7 @@
           <a:p>
             <a:fld id="{2DB472F0-34D4-4635-92C6-3A38628EF8C8}" type="datetimeFigureOut">
               <a:rPr lang="ru-RU" smtClean="0"/>
-              <a:t>12.05.2026</a:t>
+              <a:t>26.05.2026</a:t>
             </a:fld>
             <a:endParaRPr lang="ru-RU"/>
           </a:p>
@@ -7054,7 +7056,7 @@
           <a:p>
             <a:fld id="{2DB472F0-34D4-4635-92C6-3A38628EF8C8}" type="datetimeFigureOut">
               <a:rPr lang="ru-RU" smtClean="0"/>
-              <a:t>12.05.2026</a:t>
+              <a:t>26.05.2026</a:t>
             </a:fld>
             <a:endParaRPr lang="ru-RU"/>
           </a:p>
@@ -7379,7 +7381,7 @@
           <a:p>
             <a:fld id="{2DB472F0-34D4-4635-92C6-3A38628EF8C8}" type="datetimeFigureOut">
               <a:rPr lang="ru-RU" smtClean="0"/>
-              <a:t>12.05.2026</a:t>
+              <a:t>26.05.2026</a:t>
             </a:fld>
             <a:endParaRPr lang="ru-RU"/>
           </a:p>
@@ -7681,7 +7683,7 @@
           <a:p>
             <a:fld id="{2DB472F0-34D4-4635-92C6-3A38628EF8C8}" type="datetimeFigureOut">
               <a:rPr lang="ru-RU" smtClean="0"/>
-              <a:t>12.05.2026</a:t>
+              <a:t>26.05.2026</a:t>
             </a:fld>
             <a:endParaRPr lang="ru-RU"/>
           </a:p>
@@ -7808,7 +7810,7 @@
           <a:p>
             <a:fld id="{2DB472F0-34D4-4635-92C6-3A38628EF8C8}" type="datetimeFigureOut">
               <a:rPr lang="ru-RU" smtClean="0"/>
-              <a:t>12.05.2026</a:t>
+              <a:t>26.05.2026</a:t>
             </a:fld>
             <a:endParaRPr lang="ru-RU"/>
           </a:p>
@@ -8143,7 +8145,7 @@
           <a:p>
             <a:fld id="{2DB472F0-34D4-4635-92C6-3A38628EF8C8}" type="datetimeFigureOut">
               <a:rPr lang="ru-RU" smtClean="0"/>
-              <a:t>12.05.2026</a:t>
+              <a:t>26.05.2026</a:t>
             </a:fld>
             <a:endParaRPr lang="ru-RU"/>
           </a:p>
@@ -8432,7 +8434,7 @@
           <a:p>
             <a:fld id="{2DB472F0-34D4-4635-92C6-3A38628EF8C8}" type="datetimeFigureOut">
               <a:rPr lang="ru-RU" smtClean="0"/>
-              <a:t>12.05.2026</a:t>
+              <a:t>26.05.2026</a:t>
             </a:fld>
             <a:endParaRPr lang="ru-RU"/>
           </a:p>
@@ -8706,7 +8708,7 @@
           <a:p>
             <a:fld id="{2DB472F0-34D4-4635-92C6-3A38628EF8C8}" type="datetimeFigureOut">
               <a:rPr lang="ru-RU" smtClean="0"/>
-              <a:t>12.05.2026</a:t>
+              <a:t>26.05.2026</a:t>
             </a:fld>
             <a:endParaRPr lang="ru-RU"/>
           </a:p>
@@ -8994,7 +8996,7 @@
           <a:p>
             <a:fld id="{2DB472F0-34D4-4635-92C6-3A38628EF8C8}" type="datetimeFigureOut">
               <a:rPr lang="ru-RU" smtClean="0"/>
-              <a:t>12.05.2026</a:t>
+              <a:t>26.05.2026</a:t>
             </a:fld>
             <a:endParaRPr lang="ru-RU"/>
           </a:p>
@@ -9424,7 +9426,7 @@
           <a:p>
             <a:fld id="{2DB472F0-34D4-4635-92C6-3A38628EF8C8}" type="datetimeFigureOut">
               <a:rPr lang="ru-RU" smtClean="0"/>
-              <a:t>12.05.2026</a:t>
+              <a:t>26.05.2026</a:t>
             </a:fld>
             <a:endParaRPr lang="ru-RU"/>
           </a:p>
@@ -9588,7 +9590,7 @@
           <a:p>
             <a:fld id="{2DB472F0-34D4-4635-92C6-3A38628EF8C8}" type="datetimeFigureOut">
               <a:rPr lang="ru-RU" smtClean="0"/>
-              <a:t>12.05.2026</a:t>
+              <a:t>26.05.2026</a:t>
             </a:fld>
             <a:endParaRPr lang="ru-RU"/>
           </a:p>
@@ -9715,7 +9717,7 @@
           <a:p>
             <a:fld id="{2DB472F0-34D4-4635-92C6-3A38628EF8C8}" type="datetimeFigureOut">
               <a:rPr lang="ru-RU" smtClean="0"/>
-              <a:t>12.05.2026</a:t>
+              <a:t>26.05.2026</a:t>
             </a:fld>
             <a:endParaRPr lang="ru-RU"/>
           </a:p>
@@ -10040,7 +10042,7 @@
           <a:p>
             <a:fld id="{2DB472F0-34D4-4635-92C6-3A38628EF8C8}" type="datetimeFigureOut">
               <a:rPr lang="ru-RU" smtClean="0"/>
-              <a:t>12.05.2026</a:t>
+              <a:t>26.05.2026</a:t>
             </a:fld>
             <a:endParaRPr lang="ru-RU"/>
           </a:p>
@@ -10342,7 +10344,7 @@
           <a:p>
             <a:fld id="{2DB472F0-34D4-4635-92C6-3A38628EF8C8}" type="datetimeFigureOut">
               <a:rPr lang="ru-RU" smtClean="0"/>
-              <a:t>12.05.2026</a:t>
+              <a:t>26.05.2026</a:t>
             </a:fld>
             <a:endParaRPr lang="ru-RU"/>
           </a:p>
@@ -10493,7 +10495,7 @@
             <a:fld id="{2DB472F0-34D4-4635-92C6-3A38628EF8C8}" type="datetimeFigureOut">
               <a:rPr lang="ru-RU" smtClean="0"/>
               <a:pPr/>
-              <a:t>12.05.2026</a:t>
+              <a:t>26.05.2026</a:t>
             </a:fld>
             <a:endParaRPr lang="ru-RU" dirty="0"/>
           </a:p>
@@ -10789,7 +10791,7 @@
           <a:p>
             <a:fld id="{2DB472F0-34D4-4635-92C6-3A38628EF8C8}" type="datetimeFigureOut">
               <a:rPr lang="ru-RU" smtClean="0"/>
-              <a:t>12.05.2026</a:t>
+              <a:t>26.05.2026</a:t>
             </a:fld>
             <a:endParaRPr lang="ru-RU"/>
           </a:p>
@@ -11001,7 +11003,7 @@
           <a:p>
             <a:fld id="{2DB472F0-34D4-4635-92C6-3A38628EF8C8}" type="datetimeFigureOut">
               <a:rPr lang="ru-RU" smtClean="0"/>
-              <a:t>12.05.2026</a:t>
+              <a:t>26.05.2026</a:t>
             </a:fld>
             <a:endParaRPr lang="ru-RU"/>
           </a:p>
@@ -11276,7 +11278,7 @@
           <a:p>
             <a:fld id="{2DB472F0-34D4-4635-92C6-3A38628EF8C8}" type="datetimeFigureOut">
               <a:rPr lang="ru-RU" smtClean="0"/>
-              <a:t>12.05.2026</a:t>
+              <a:t>26.05.2026</a:t>
             </a:fld>
             <a:endParaRPr lang="ru-RU"/>
           </a:p>
@@ -11692,7 +11694,7 @@
           <a:p>
             <a:fld id="{2DB472F0-34D4-4635-92C6-3A38628EF8C8}" type="datetimeFigureOut">
               <a:rPr lang="ru-RU" smtClean="0"/>
-              <a:t>12.05.2026</a:t>
+              <a:t>26.05.2026</a:t>
             </a:fld>
             <a:endParaRPr lang="ru-RU"/>
           </a:p>
@@ -11966,7 +11968,7 @@
           <a:p>
             <a:fld id="{2DB472F0-34D4-4635-92C6-3A38628EF8C8}" type="datetimeFigureOut">
               <a:rPr lang="ru-RU" smtClean="0"/>
-              <a:t>12.05.2026</a:t>
+              <a:t>26.05.2026</a:t>
             </a:fld>
             <a:endParaRPr lang="ru-RU"/>
           </a:p>
@@ -12382,7 +12384,7 @@
           <a:p>
             <a:fld id="{2DB472F0-34D4-4635-92C6-3A38628EF8C8}" type="datetimeFigureOut">
               <a:rPr lang="ru-RU" smtClean="0"/>
-              <a:t>12.05.2026</a:t>
+              <a:t>26.05.2026</a:t>
             </a:fld>
             <a:endParaRPr lang="ru-RU"/>
           </a:p>
@@ -12532,7 +12534,7 @@
           <a:p>
             <a:fld id="{2DB472F0-34D4-4635-92C6-3A38628EF8C8}" type="datetimeFigureOut">
               <a:rPr lang="ru-RU" smtClean="0"/>
-              <a:t>12.05.2026</a:t>
+              <a:t>26.05.2026</a:t>
             </a:fld>
             <a:endParaRPr lang="ru-RU"/>
           </a:p>
@@ -12645,7 +12647,7 @@
           <a:p>
             <a:fld id="{2DB472F0-34D4-4635-92C6-3A38628EF8C8}" type="datetimeFigureOut">
               <a:rPr lang="ru-RU" smtClean="0"/>
-              <a:t>12.05.2026</a:t>
+              <a:t>26.05.2026</a:t>
             </a:fld>
             <a:endParaRPr lang="ru-RU"/>
           </a:p>
@@ -12956,7 +12958,7 @@
           <a:p>
             <a:fld id="{2DB472F0-34D4-4635-92C6-3A38628EF8C8}" type="datetimeFigureOut">
               <a:rPr lang="ru-RU" smtClean="0"/>
-              <a:t>12.05.2026</a:t>
+              <a:t>26.05.2026</a:t>
             </a:fld>
             <a:endParaRPr lang="ru-RU"/>
           </a:p>
@@ -13244,7 +13246,7 @@
           <a:p>
             <a:fld id="{2DB472F0-34D4-4635-92C6-3A38628EF8C8}" type="datetimeFigureOut">
               <a:rPr lang="ru-RU" smtClean="0"/>
-              <a:t>12.05.2026</a:t>
+              <a:t>26.05.2026</a:t>
             </a:fld>
             <a:endParaRPr lang="ru-RU"/>
           </a:p>
@@ -13394,7 +13396,7 @@
           <a:p>
             <a:fld id="{2DB472F0-34D4-4635-92C6-3A38628EF8C8}" type="datetimeFigureOut">
               <a:rPr lang="ru-RU" smtClean="0"/>
-              <a:t>12.05.2026</a:t>
+              <a:t>26.05.2026</a:t>
             </a:fld>
             <a:endParaRPr lang="ru-RU"/>
           </a:p>
@@ -13507,7 +13509,7 @@
           <a:p>
             <a:fld id="{2DB472F0-34D4-4635-92C6-3A38628EF8C8}" type="datetimeFigureOut">
               <a:rPr lang="ru-RU" smtClean="0"/>
-              <a:t>12.05.2026</a:t>
+              <a:t>26.05.2026</a:t>
             </a:fld>
             <a:endParaRPr lang="ru-RU"/>
           </a:p>
@@ -13818,7 +13820,7 @@
           <a:p>
             <a:fld id="{2DB472F0-34D4-4635-92C6-3A38628EF8C8}" type="datetimeFigureOut">
               <a:rPr lang="ru-RU" smtClean="0"/>
-              <a:t>12.05.2026</a:t>
+              <a:t>26.05.2026</a:t>
             </a:fld>
             <a:endParaRPr lang="ru-RU"/>
           </a:p>
@@ -14106,7 +14108,7 @@
           <a:p>
             <a:fld id="{2DB472F0-34D4-4635-92C6-3A38628EF8C8}" type="datetimeFigureOut">
               <a:rPr lang="ru-RU" smtClean="0"/>
-              <a:t>12.05.2026</a:t>
+              <a:t>26.05.2026</a:t>
             </a:fld>
             <a:endParaRPr lang="ru-RU"/>
           </a:p>
@@ -14358,7 +14360,7 @@
             <a:fld id="{2DB472F0-34D4-4635-92C6-3A38628EF8C8}" type="datetimeFigureOut">
               <a:rPr lang="ru-RU" smtClean="0"/>
               <a:pPr/>
-              <a:t>12.05.2026</a:t>
+              <a:t>26.05.2026</a:t>
             </a:fld>
             <a:endParaRPr lang="ru-RU" dirty="0"/>
           </a:p>
@@ -14972,7 +14974,7 @@
             <a:fld id="{2DB472F0-34D4-4635-92C6-3A38628EF8C8}" type="datetimeFigureOut">
               <a:rPr lang="ru-RU" smtClean="0"/>
               <a:pPr/>
-              <a:t>12.05.2026</a:t>
+              <a:t>26.05.2026</a:t>
             </a:fld>
             <a:endParaRPr lang="ru-RU" dirty="0"/>
           </a:p>
@@ -15586,7 +15588,7 @@
             <a:fld id="{2DB472F0-34D4-4635-92C6-3A38628EF8C8}" type="datetimeFigureOut">
               <a:rPr lang="ru-RU" smtClean="0"/>
               <a:pPr/>
-              <a:t>12.05.2026</a:t>
+              <a:t>26.05.2026</a:t>
             </a:fld>
             <a:endParaRPr lang="ru-RU" dirty="0"/>
           </a:p>
@@ -16200,7 +16202,7 @@
             <a:fld id="{2DB472F0-34D4-4635-92C6-3A38628EF8C8}" type="datetimeFigureOut">
               <a:rPr lang="ru-RU" smtClean="0"/>
               <a:pPr/>
-              <a:t>12.05.2026</a:t>
+              <a:t>26.05.2026</a:t>
             </a:fld>
             <a:endParaRPr lang="ru-RU" dirty="0"/>
           </a:p>
@@ -16816,7 +16818,7 @@
             <a:fld id="{2DB472F0-34D4-4635-92C6-3A38628EF8C8}" type="datetimeFigureOut">
               <a:rPr lang="ru-RU" smtClean="0"/>
               <a:pPr/>
-              <a:t>12.05.2026</a:t>
+              <a:t>26.05.2026</a:t>
             </a:fld>
             <a:endParaRPr lang="ru-RU" dirty="0"/>
           </a:p>
@@ -17466,7 +17468,7 @@
             <a:fld id="{2DB472F0-34D4-4635-92C6-3A38628EF8C8}" type="datetimeFigureOut">
               <a:rPr lang="ru-RU" smtClean="0"/>
               <a:pPr/>
-              <a:t>12.05.2026</a:t>
+              <a:t>26.05.2026</a:t>
             </a:fld>
             <a:endParaRPr lang="ru-RU" dirty="0"/>
           </a:p>
@@ -17988,6 +17990,194 @@
       </p:grpSpPr>
       <p:sp>
         <p:nvSpPr>
+          <p:cNvPr id="5" name="Заголовок 4"/>
+          <p:cNvSpPr>
+            <a:spLocks noGrp="1"/>
+          </p:cNvSpPr>
+          <p:nvPr>
+            <p:ph type="title"/>
+          </p:nvPr>
+        </p:nvSpPr>
+        <p:spPr/>
+        <p:txBody>
+          <a:bodyPr/>
+          <a:lstStyle/>
+          <a:p>
+            <a:r>
+              <a:rPr lang="ru-RU" dirty="0"/>
+              <a:t>Результаты и анализ</a:t>
+            </a:r>
+          </a:p>
+        </p:txBody>
+      </p:sp>
+      <p:sp>
+        <p:nvSpPr>
+          <p:cNvPr id="6" name="Объект 5"/>
+          <p:cNvSpPr>
+            <a:spLocks noGrp="1"/>
+          </p:cNvSpPr>
+          <p:nvPr>
+            <p:ph sz="half" idx="1"/>
+          </p:nvPr>
+        </p:nvSpPr>
+        <p:spPr/>
+        <p:txBody>
+          <a:bodyPr>
+            <a:normAutofit fontScale="85000" lnSpcReduction="10000"/>
+          </a:bodyPr>
+          <a:lstStyle/>
+          <a:p>
+            <a:pPr marL="0" indent="0">
+              <a:buNone/>
+            </a:pPr>
+            <a:r>
+              <a:rPr lang="ru-RU" b="1" dirty="0"/>
+              <a:t>Достигнутые </a:t>
+            </a:r>
+            <a:r>
+              <a:rPr lang="ru-RU" b="1" dirty="0" smtClean="0"/>
+              <a:t>результаты:</a:t>
+            </a:r>
+            <a:endParaRPr lang="ru-RU" b="1" dirty="0"/>
+          </a:p>
+          <a:p>
+            <a:pPr>
+              <a:buFont typeface="Arial" panose="020B0604020202020204" pitchFamily="34" charset="0"/>
+              <a:buChar char="−"/>
+            </a:pPr>
+            <a:r>
+              <a:rPr lang="ru-RU" dirty="0"/>
+              <a:t>Сформированы требования SRS и логика пользовательских сценариев.</a:t>
+            </a:r>
+          </a:p>
+          <a:p>
+            <a:pPr>
+              <a:buFont typeface="Arial" panose="020B0604020202020204" pitchFamily="34" charset="0"/>
+              <a:buChar char="−"/>
+            </a:pPr>
+            <a:r>
+              <a:rPr lang="ru-RU" dirty="0"/>
+              <a:t>Спроектированы архитектура, API и реляционная база данных.</a:t>
+            </a:r>
+          </a:p>
+          <a:p>
+            <a:pPr>
+              <a:buFont typeface="Arial" panose="020B0604020202020204" pitchFamily="34" charset="0"/>
+              <a:buChar char="−"/>
+            </a:pPr>
+            <a:r>
+              <a:rPr lang="ru-RU" dirty="0"/>
+              <a:t>Разработан интерактивный прототип интерфейса платформы.</a:t>
+            </a:r>
+          </a:p>
+          <a:p>
+            <a:pPr>
+              <a:buFont typeface="Arial" panose="020B0604020202020204" pitchFamily="34" charset="0"/>
+              <a:buChar char="−"/>
+            </a:pPr>
+            <a:r>
+              <a:rPr lang="ru-RU" dirty="0"/>
+              <a:t>Определены метрики оценки: </a:t>
+            </a:r>
+            <a:r>
+              <a:rPr lang="ru-RU" dirty="0" err="1"/>
+              <a:t>Accuracy</a:t>
+            </a:r>
+            <a:r>
+              <a:rPr lang="ru-RU" dirty="0"/>
+              <a:t>, </a:t>
+            </a:r>
+            <a:r>
+              <a:rPr lang="ru-RU" dirty="0" err="1"/>
+              <a:t>Kappa</a:t>
+            </a:r>
+            <a:r>
+              <a:rPr lang="ru-RU" dirty="0"/>
+              <a:t>, </a:t>
+            </a:r>
+            <a:r>
+              <a:rPr lang="ru-RU" dirty="0" err="1"/>
+              <a:t>Mean</a:t>
+            </a:r>
+            <a:r>
+              <a:rPr lang="ru-RU" dirty="0"/>
+              <a:t> </a:t>
+            </a:r>
+            <a:r>
+              <a:rPr lang="ru-RU" dirty="0" err="1"/>
+              <a:t>IoU</a:t>
+            </a:r>
+            <a:r>
+              <a:rPr lang="ru-RU" dirty="0"/>
+              <a:t>.</a:t>
+            </a:r>
+          </a:p>
+          <a:p>
+            <a:endParaRPr lang="ru-RU" dirty="0"/>
+          </a:p>
+        </p:txBody>
+      </p:sp>
+      <p:pic>
+        <p:nvPicPr>
+          <p:cNvPr id="8" name="Объект 7"/>
+          <p:cNvPicPr>
+            <a:picLocks noGrp="1" noChangeAspect="1"/>
+          </p:cNvPicPr>
+          <p:nvPr>
+            <p:ph sz="half" idx="2"/>
+          </p:nvPr>
+        </p:nvPicPr>
+        <p:blipFill>
+          <a:blip r:embed="rId2">
+            <a:extLst>
+              <a:ext uri="{28A0092B-C50C-407E-A947-70E740481C1C}">
+                <a14:useLocalDpi xmlns:a14="http://schemas.microsoft.com/office/drawing/2010/main" val="0"/>
+              </a:ext>
+            </a:extLst>
+          </a:blip>
+          <a:stretch>
+            <a:fillRect/>
+          </a:stretch>
+        </p:blipFill>
+        <p:spPr>
+          <a:xfrm>
+            <a:off x="6172200" y="2305049"/>
+            <a:ext cx="5181600" cy="3826041"/>
+          </a:xfrm>
+        </p:spPr>
+      </p:pic>
+    </p:spTree>
+    <p:extLst>
+      <p:ext uri="{BB962C8B-B14F-4D97-AF65-F5344CB8AC3E}">
+        <p14:creationId xmlns:p14="http://schemas.microsoft.com/office/powerpoint/2010/main" val="2508543406"/>
+      </p:ext>
+    </p:extLst>
+  </p:cSld>
+  <p:clrMapOvr>
+    <a:masterClrMapping/>
+  </p:clrMapOvr>
+</p:sld>
+</file>
+
+<file path=ppt/slides/slide11.xml><?xml version="1.0" encoding="utf-8"?>
+<p:sld xmlns:a="http://schemas.openxmlformats.org/drawingml/2006/main" xmlns:r="http://schemas.openxmlformats.org/officeDocument/2006/relationships" xmlns:p="http://schemas.openxmlformats.org/presentationml/2006/main">
+  <p:cSld>
+    <p:spTree>
+      <p:nvGrpSpPr>
+        <p:cNvPr id="1" name=""/>
+        <p:cNvGrpSpPr/>
+        <p:nvPr/>
+      </p:nvGrpSpPr>
+      <p:grpSpPr>
+        <a:xfrm>
+          <a:off x="0" y="0"/>
+          <a:ext cx="0" cy="0"/>
+          <a:chOff x="0" y="0"/>
+          <a:chExt cx="0" cy="0"/>
+        </a:xfrm>
+      </p:grpSpPr>
+      <p:sp>
+        <p:nvSpPr>
           <p:cNvPr id="2" name="Заголовок 1"/>
           <p:cNvSpPr>
             <a:spLocks noGrp="1"/>
@@ -18003,7 +18193,7 @@
           <a:p>
             <a:r>
               <a:rPr lang="ru-RU" dirty="0"/>
-              <a:t>Заключение</a:t>
+              <a:t>Перспективы развития и улучшения</a:t>
             </a:r>
           </a:p>
         </p:txBody>
@@ -18025,10 +18215,37 @@
           </a:bodyPr>
           <a:lstStyle/>
           <a:p>
+            <a:pPr>
+              <a:buFont typeface="Arial" panose="020B0604020202020204" pitchFamily="34" charset="0"/>
+              <a:buChar char="−"/>
+            </a:pPr>
             <a:r>
               <a:rPr lang="ru-RU" dirty="0"/>
-              <a:t>В ходе работы спроектирована информационная система для мониторинга и классификации земных покровов, объединяющая выбор AOI, работу со спутниковыми сценами, аналитический модуль, хранение результатов и экспорт данных.</a:t>
-            </a:r>
+              <a:t>Интеграция дополнительных моделей и источников данных.</a:t>
+            </a:r>
+          </a:p>
+          <a:p>
+            <a:pPr>
+              <a:buFont typeface="Arial" panose="020B0604020202020204" pitchFamily="34" charset="0"/>
+              <a:buChar char="−"/>
+            </a:pPr>
+            <a:r>
+              <a:rPr lang="ru-RU" dirty="0"/>
+              <a:t>Автоматизация серии анализов и сценариев мониторинга изменений.</a:t>
+            </a:r>
+          </a:p>
+          <a:p>
+            <a:pPr>
+              <a:buFont typeface="Arial" panose="020B0604020202020204" pitchFamily="34" charset="0"/>
+              <a:buChar char="−"/>
+            </a:pPr>
+            <a:r>
+              <a:rPr lang="ru-RU" dirty="0"/>
+              <a:t>Расширение ролей пользователей и административных функций.</a:t>
+            </a:r>
+          </a:p>
+          <a:p>
+            <a:endParaRPr lang="ru-RU" dirty="0"/>
           </a:p>
         </p:txBody>
       </p:sp>
@@ -18049,6 +18266,196 @@
           </a:bodyPr>
           <a:lstStyle/>
           <a:p>
+            <a:pPr marL="0" indent="0">
+              <a:buNone/>
+            </a:pPr>
+            <a:r>
+              <a:rPr lang="ru-RU" b="1" dirty="0"/>
+              <a:t>Следующий этап</a:t>
+            </a:r>
+          </a:p>
+          <a:p>
+            <a:pPr marL="0" indent="0">
+              <a:buNone/>
+            </a:pPr>
+            <a:r>
+              <a:rPr lang="ru-RU" dirty="0" smtClean="0"/>
+              <a:t>Переход </a:t>
+            </a:r>
+            <a:r>
+              <a:rPr lang="ru-RU" dirty="0"/>
+              <a:t>от прототипа к MVP: </a:t>
+            </a:r>
+            <a:endParaRPr lang="en-US" dirty="0" smtClean="0"/>
+          </a:p>
+          <a:p>
+            <a:pPr>
+              <a:buFont typeface="Arial" panose="020B0604020202020204" pitchFamily="34" charset="0"/>
+              <a:buChar char="−"/>
+            </a:pPr>
+            <a:r>
+              <a:rPr lang="ru-RU" dirty="0" smtClean="0"/>
+              <a:t>Промышленный </a:t>
+            </a:r>
+            <a:r>
+              <a:rPr lang="ru-RU" dirty="0" err="1" smtClean="0"/>
+              <a:t>backend</a:t>
+            </a:r>
+            <a:r>
+              <a:rPr lang="ru-RU" dirty="0"/>
+              <a:t>;</a:t>
+            </a:r>
+            <a:r>
+              <a:rPr lang="ru-RU" dirty="0" smtClean="0"/>
+              <a:t> </a:t>
+            </a:r>
+            <a:endParaRPr lang="en-US" dirty="0" smtClean="0"/>
+          </a:p>
+          <a:p>
+            <a:pPr>
+              <a:buFont typeface="Arial" panose="020B0604020202020204" pitchFamily="34" charset="0"/>
+              <a:buChar char="−"/>
+            </a:pPr>
+            <a:r>
+              <a:rPr lang="ru-RU" dirty="0"/>
+              <a:t>П</a:t>
+            </a:r>
+            <a:r>
+              <a:rPr lang="ru-RU" dirty="0" smtClean="0"/>
+              <a:t>олноценная </a:t>
+            </a:r>
+            <a:r>
+              <a:rPr lang="ru-RU" dirty="0"/>
+              <a:t>загрузка </a:t>
+            </a:r>
+            <a:r>
+              <a:rPr lang="ru-RU" dirty="0" smtClean="0"/>
+              <a:t>сцен; </a:t>
+            </a:r>
+            <a:endParaRPr lang="en-US" dirty="0" smtClean="0"/>
+          </a:p>
+          <a:p>
+            <a:pPr>
+              <a:buFont typeface="Arial" panose="020B0604020202020204" pitchFamily="34" charset="0"/>
+              <a:buChar char="−"/>
+            </a:pPr>
+            <a:r>
+              <a:rPr lang="ru-RU" dirty="0"/>
+              <a:t>Р</a:t>
+            </a:r>
+            <a:r>
+              <a:rPr lang="ru-RU" dirty="0" smtClean="0"/>
+              <a:t>асширенное </a:t>
+            </a:r>
+            <a:r>
+              <a:rPr lang="ru-RU" dirty="0"/>
+              <a:t>сравнение с эталонными продуктами и модуль отчётности.</a:t>
+            </a:r>
+          </a:p>
+          <a:p>
+            <a:endParaRPr lang="ru-RU" dirty="0"/>
+          </a:p>
+        </p:txBody>
+      </p:sp>
+    </p:spTree>
+    <p:extLst>
+      <p:ext uri="{BB962C8B-B14F-4D97-AF65-F5344CB8AC3E}">
+        <p14:creationId xmlns:p14="http://schemas.microsoft.com/office/powerpoint/2010/main" val="984527577"/>
+      </p:ext>
+    </p:extLst>
+  </p:cSld>
+  <p:clrMapOvr>
+    <a:masterClrMapping/>
+  </p:clrMapOvr>
+</p:sld>
+</file>
+
+<file path=ppt/slides/slide12.xml><?xml version="1.0" encoding="utf-8"?>
+<p:sld xmlns:a="http://schemas.openxmlformats.org/drawingml/2006/main" xmlns:r="http://schemas.openxmlformats.org/officeDocument/2006/relationships" xmlns:p="http://schemas.openxmlformats.org/presentationml/2006/main">
+  <p:cSld>
+    <p:spTree>
+      <p:nvGrpSpPr>
+        <p:cNvPr id="1" name=""/>
+        <p:cNvGrpSpPr/>
+        <p:nvPr/>
+      </p:nvGrpSpPr>
+      <p:grpSpPr>
+        <a:xfrm>
+          <a:off x="0" y="0"/>
+          <a:ext cx="0" cy="0"/>
+          <a:chOff x="0" y="0"/>
+          <a:chExt cx="0" cy="0"/>
+        </a:xfrm>
+      </p:grpSpPr>
+      <p:sp>
+        <p:nvSpPr>
+          <p:cNvPr id="2" name="Заголовок 1"/>
+          <p:cNvSpPr>
+            <a:spLocks noGrp="1"/>
+          </p:cNvSpPr>
+          <p:nvPr>
+            <p:ph type="title"/>
+          </p:nvPr>
+        </p:nvSpPr>
+        <p:spPr/>
+        <p:txBody>
+          <a:bodyPr/>
+          <a:lstStyle/>
+          <a:p>
+            <a:r>
+              <a:rPr lang="ru-RU" dirty="0"/>
+              <a:t>Заключение</a:t>
+            </a:r>
+          </a:p>
+        </p:txBody>
+      </p:sp>
+      <p:sp>
+        <p:nvSpPr>
+          <p:cNvPr id="3" name="Объект 2"/>
+          <p:cNvSpPr>
+            <a:spLocks noGrp="1"/>
+          </p:cNvSpPr>
+          <p:nvPr>
+            <p:ph sz="half" idx="1"/>
+          </p:nvPr>
+        </p:nvSpPr>
+        <p:spPr/>
+        <p:txBody>
+          <a:bodyPr>
+            <a:normAutofit lnSpcReduction="10000"/>
+          </a:bodyPr>
+          <a:lstStyle/>
+          <a:p>
+            <a:pPr marL="0" indent="0">
+              <a:buNone/>
+            </a:pPr>
+            <a:r>
+              <a:rPr lang="ru-RU" dirty="0"/>
+              <a:t>В ходе работы спроектирована информационная система для мониторинга и классификации земных покровов, объединяющая выбор AOI, работу со спутниковыми сценами, аналитический модуль, хранение результатов и экспорт данных.</a:t>
+            </a:r>
+          </a:p>
+        </p:txBody>
+      </p:sp>
+      <p:sp>
+        <p:nvSpPr>
+          <p:cNvPr id="4" name="Объект 3"/>
+          <p:cNvSpPr>
+            <a:spLocks noGrp="1"/>
+          </p:cNvSpPr>
+          <p:nvPr>
+            <p:ph sz="half" idx="2"/>
+          </p:nvPr>
+        </p:nvSpPr>
+        <p:spPr/>
+        <p:txBody>
+          <a:bodyPr>
+            <a:normAutofit lnSpcReduction="10000"/>
+          </a:bodyPr>
+          <a:lstStyle/>
+          <a:p>
+            <a:pPr marL="0" indent="0">
+              <a:buNone/>
+            </a:pPr>
             <a:r>
               <a:rPr lang="ru-RU" dirty="0"/>
               <a:t>Проект демонстрирует применение принципов управления проектами ИС: от анализа предметной области и требований до архитектурного проектирования, </a:t>
@@ -18077,7 +18484,7 @@
 </p:sld>
 </file>
 
-<file path=ppt/slides/slide11.xml><?xml version="1.0" encoding="utf-8"?>
+<file path=ppt/slides/slide13.xml><?xml version="1.0" encoding="utf-8"?>
 <p:sld xmlns:a="http://schemas.openxmlformats.org/drawingml/2006/main" xmlns:r="http://schemas.openxmlformats.org/officeDocument/2006/relationships" xmlns:p="http://schemas.openxmlformats.org/presentationml/2006/main">
   <p:cSld>
     <p:spTree>
@@ -18242,18 +18649,30 @@
           </a:bodyPr>
           <a:lstStyle/>
           <a:p>
+            <a:pPr>
+              <a:buFont typeface="Arial" panose="020B0604020202020204" pitchFamily="34" charset="0"/>
+              <a:buChar char="−"/>
+            </a:pPr>
             <a:r>
               <a:rPr lang="ru-RU" dirty="0"/>
               <a:t>Мониторинг земных покровов требует объединения оптических и SAR‑данных, а также удобного интерфейса для выбора AOI и запуска анализа.</a:t>
             </a:r>
           </a:p>
           <a:p>
+            <a:pPr>
+              <a:buFont typeface="Arial" panose="020B0604020202020204" pitchFamily="34" charset="0"/>
+              <a:buChar char="−"/>
+            </a:pPr>
             <a:r>
               <a:rPr lang="ru-RU" dirty="0"/>
               <a:t>Существующие решения часто либо ориентированы на специалистов ГИС, либо не дают полного цикла: выбор сцены → классификация → статистика → экспорт.</a:t>
             </a:r>
           </a:p>
           <a:p>
+            <a:pPr>
+              <a:buFont typeface="Arial" panose="020B0604020202020204" pitchFamily="34" charset="0"/>
+              <a:buChar char="−"/>
+            </a:pPr>
             <a:r>
               <a:rPr lang="ru-RU" dirty="0"/>
               <a:t>Проект закрывает прикладную потребность в веб‑инструменте для анализа изменений покрытия территории по спутниковым данным.</a:t>
@@ -18436,6 +18855,10 @@
           </a:bodyPr>
           <a:lstStyle/>
           <a:p>
+            <a:pPr marL="514350" indent="-514350">
+              <a:buFont typeface="+mj-lt"/>
+              <a:buAutoNum type="arabicPeriod"/>
+            </a:pPr>
             <a:r>
               <a:rPr lang="ru-RU" dirty="0" smtClean="0"/>
               <a:t>Проанализировать </a:t>
@@ -18446,24 +18869,40 @@
             </a:r>
           </a:p>
           <a:p>
+            <a:pPr marL="514350" indent="-514350">
+              <a:buFont typeface="+mj-lt"/>
+              <a:buAutoNum type="arabicPeriod"/>
+            </a:pPr>
             <a:r>
               <a:rPr lang="ru-RU" dirty="0"/>
               <a:t>Определить функциональные и нефункциональные требования.</a:t>
             </a:r>
           </a:p>
           <a:p>
+            <a:pPr marL="514350" indent="-514350">
+              <a:buFont typeface="+mj-lt"/>
+              <a:buAutoNum type="arabicPeriod"/>
+            </a:pPr>
             <a:r>
               <a:rPr lang="ru-RU" dirty="0"/>
               <a:t>Спроектировать архитектуру, БД и API системы.</a:t>
             </a:r>
           </a:p>
           <a:p>
+            <a:pPr marL="514350" indent="-514350">
+              <a:buFont typeface="+mj-lt"/>
+              <a:buAutoNum type="arabicPeriod"/>
+            </a:pPr>
             <a:r>
               <a:rPr lang="ru-RU" dirty="0"/>
               <a:t>Реализовать пользовательский интерфейс и сценарий анализа.</a:t>
             </a:r>
           </a:p>
           <a:p>
+            <a:pPr marL="514350" indent="-514350">
+              <a:buFont typeface="+mj-lt"/>
+              <a:buAutoNum type="arabicPeriod"/>
+            </a:pPr>
             <a:r>
               <a:rPr lang="ru-RU" dirty="0"/>
               <a:t>Оценить результаты, метрики качества и направления развития.</a:t>
@@ -19021,79 +19460,104 @@
             <p:ph idx="1"/>
           </p:nvPr>
         </p:nvSpPr>
-        <p:spPr/>
-        <p:txBody>
-          <a:bodyPr/>
-          <a:lstStyle/>
-          <a:p>
-            <a:r>
-              <a:rPr lang="en-US" dirty="0"/>
+        <p:spPr>
+          <a:xfrm>
+            <a:off x="838200" y="2457449"/>
+            <a:ext cx="10515600" cy="1773729"/>
+          </a:xfrm>
+        </p:spPr>
+        <p:txBody>
+          <a:bodyPr/>
+          <a:lstStyle/>
+          <a:p>
+            <a:pPr>
+              <a:buFont typeface="Arial" panose="020B0604020202020204" pitchFamily="34" charset="0"/>
+              <a:buChar char="−"/>
+            </a:pPr>
+            <a:r>
+              <a:rPr lang="en-US" sz="2000" dirty="0"/>
               <a:t>Python, </a:t>
             </a:r>
             <a:r>
-              <a:rPr lang="en-US" dirty="0" err="1"/>
-              <a:t>PyTorch</a:t>
-            </a:r>
-            <a:r>
-              <a:rPr lang="en-US" dirty="0"/>
+              <a:rPr lang="en-US" sz="2000" dirty="0" err="1"/>
+              <a:t>TensorFlow</a:t>
+            </a:r>
+            <a:r>
+              <a:rPr lang="en-US" sz="2000" dirty="0"/>
               <a:t> — </a:t>
             </a:r>
             <a:r>
-              <a:rPr lang="ru-RU" dirty="0"/>
+              <a:rPr lang="ru-RU" sz="2000" dirty="0" smtClean="0"/>
               <a:t>вычислительная и </a:t>
             </a:r>
             <a:r>
-              <a:rPr lang="en-US" dirty="0"/>
+              <a:rPr lang="en-US" sz="2000" dirty="0" smtClean="0"/>
               <a:t>ML‑</a:t>
             </a:r>
             <a:r>
-              <a:rPr lang="ru-RU" dirty="0"/>
+              <a:rPr lang="ru-RU" sz="2000" dirty="0" smtClean="0"/>
               <a:t>часть.</a:t>
             </a:r>
           </a:p>
           <a:p>
-            <a:r>
-              <a:rPr lang="en-US" dirty="0"/>
-              <a:t>React / Leaflet / </a:t>
-            </a:r>
-            <a:r>
-              <a:rPr lang="en-US" dirty="0" err="1"/>
+            <a:pPr>
+              <a:buFont typeface="Arial" panose="020B0604020202020204" pitchFamily="34" charset="0"/>
+              <a:buChar char="−"/>
+            </a:pPr>
+            <a:r>
+              <a:rPr lang="en-US" sz="2000" dirty="0" smtClean="0"/>
+              <a:t>React </a:t>
+            </a:r>
+            <a:r>
+              <a:rPr lang="en-US" sz="2000" dirty="0"/>
+              <a:t>/ Leaflet / </a:t>
+            </a:r>
+            <a:r>
+              <a:rPr lang="en-US" sz="2000" dirty="0" err="1"/>
               <a:t>OpenLayers</a:t>
             </a:r>
             <a:r>
-              <a:rPr lang="en-US" dirty="0"/>
+              <a:rPr lang="en-US" sz="2000" dirty="0"/>
               <a:t> — </a:t>
             </a:r>
             <a:r>
-              <a:rPr lang="ru-RU" dirty="0"/>
+              <a:rPr lang="ru-RU" sz="2000" dirty="0"/>
               <a:t>веб‑интерфейс и работа с картой.</a:t>
             </a:r>
           </a:p>
           <a:p>
-            <a:r>
-              <a:rPr lang="en-US" dirty="0"/>
+            <a:pPr>
+              <a:buFont typeface="Arial" panose="020B0604020202020204" pitchFamily="34" charset="0"/>
+              <a:buChar char="−"/>
+            </a:pPr>
+            <a:r>
+              <a:rPr lang="en-US" sz="2000" dirty="0"/>
               <a:t>PostgreSQL + </a:t>
             </a:r>
             <a:r>
-              <a:rPr lang="en-US" dirty="0" err="1"/>
+              <a:rPr lang="en-US" sz="2000" dirty="0" err="1"/>
               <a:t>PostGIS</a:t>
             </a:r>
             <a:r>
-              <a:rPr lang="en-US" dirty="0"/>
+              <a:rPr lang="en-US" sz="2000" dirty="0"/>
               <a:t> — </a:t>
             </a:r>
             <a:r>
-              <a:rPr lang="ru-RU" dirty="0"/>
+              <a:rPr lang="ru-RU" sz="2000" dirty="0"/>
               <a:t>хранение пространственных и прикладных данных.</a:t>
             </a:r>
           </a:p>
           <a:p>
-            <a:r>
-              <a:rPr lang="en-US" dirty="0"/>
+            <a:pPr>
+              <a:buFont typeface="Arial" panose="020B0604020202020204" pitchFamily="34" charset="0"/>
+              <a:buChar char="−"/>
+            </a:pPr>
+            <a:r>
+              <a:rPr lang="en-US" sz="2000" dirty="0"/>
               <a:t>REST API — </a:t>
             </a:r>
             <a:r>
-              <a:rPr lang="ru-RU" dirty="0"/>
+              <a:rPr lang="ru-RU" sz="2000" dirty="0"/>
               <a:t>обмен между клиентом, обработкой и слоем хранения.</a:t>
             </a:r>
           </a:p>
@@ -19102,6 +19566,126 @@
           </a:p>
         </p:txBody>
       </p:sp>
+      <p:pic>
+        <p:nvPicPr>
+          <p:cNvPr id="4" name="Рисунок 3"/>
+          <p:cNvPicPr>
+            <a:picLocks noChangeAspect="1"/>
+          </p:cNvPicPr>
+          <p:nvPr/>
+        </p:nvPicPr>
+        <p:blipFill>
+          <a:blip r:embed="rId2"/>
+          <a:stretch>
+            <a:fillRect/>
+          </a:stretch>
+        </p:blipFill>
+        <p:spPr>
+          <a:xfrm>
+            <a:off x="838200" y="4513811"/>
+            <a:ext cx="1354974" cy="1354974"/>
+          </a:xfrm>
+          <a:prstGeom prst="rect">
+            <a:avLst/>
+          </a:prstGeom>
+        </p:spPr>
+      </p:pic>
+      <p:pic>
+        <p:nvPicPr>
+          <p:cNvPr id="5" name="Рисунок 4"/>
+          <p:cNvPicPr>
+            <a:picLocks noChangeAspect="1"/>
+          </p:cNvPicPr>
+          <p:nvPr/>
+        </p:nvPicPr>
+        <p:blipFill>
+          <a:blip r:embed="rId3"/>
+          <a:stretch>
+            <a:fillRect/>
+          </a:stretch>
+        </p:blipFill>
+        <p:spPr>
+          <a:xfrm>
+            <a:off x="2193174" y="4150555"/>
+            <a:ext cx="2933428" cy="1876172"/>
+          </a:xfrm>
+          <a:prstGeom prst="rect">
+            <a:avLst/>
+          </a:prstGeom>
+        </p:spPr>
+      </p:pic>
+      <p:pic>
+        <p:nvPicPr>
+          <p:cNvPr id="6" name="Рисунок 5"/>
+          <p:cNvPicPr>
+            <a:picLocks noChangeAspect="1"/>
+          </p:cNvPicPr>
+          <p:nvPr/>
+        </p:nvPicPr>
+        <p:blipFill>
+          <a:blip r:embed="rId4"/>
+          <a:stretch>
+            <a:fillRect/>
+          </a:stretch>
+        </p:blipFill>
+        <p:spPr>
+          <a:xfrm>
+            <a:off x="5254610" y="4513811"/>
+            <a:ext cx="1698712" cy="1512916"/>
+          </a:xfrm>
+          <a:prstGeom prst="rect">
+            <a:avLst/>
+          </a:prstGeom>
+        </p:spPr>
+      </p:pic>
+      <p:pic>
+        <p:nvPicPr>
+          <p:cNvPr id="7" name="Рисунок 6"/>
+          <p:cNvPicPr>
+            <a:picLocks noChangeAspect="1"/>
+          </p:cNvPicPr>
+          <p:nvPr/>
+        </p:nvPicPr>
+        <p:blipFill>
+          <a:blip r:embed="rId5"/>
+          <a:stretch>
+            <a:fillRect/>
+          </a:stretch>
+        </p:blipFill>
+        <p:spPr>
+          <a:xfrm>
+            <a:off x="9082173" y="4890849"/>
+            <a:ext cx="2856807" cy="758839"/>
+          </a:xfrm>
+          <a:prstGeom prst="rect">
+            <a:avLst/>
+          </a:prstGeom>
+        </p:spPr>
+      </p:pic>
+      <p:pic>
+        <p:nvPicPr>
+          <p:cNvPr id="8" name="Рисунок 7"/>
+          <p:cNvPicPr>
+            <a:picLocks noChangeAspect="1"/>
+          </p:cNvPicPr>
+          <p:nvPr/>
+        </p:nvPicPr>
+        <p:blipFill>
+          <a:blip r:embed="rId6"/>
+          <a:stretch>
+            <a:fillRect/>
+          </a:stretch>
+        </p:blipFill>
+        <p:spPr>
+          <a:xfrm>
+            <a:off x="7268736" y="4566978"/>
+            <a:ext cx="1406582" cy="1406582"/>
+          </a:xfrm>
+          <a:prstGeom prst="rect">
+            <a:avLst/>
+          </a:prstGeom>
+        </p:spPr>
+      </p:pic>
     </p:spTree>
     <p:extLst>
       <p:ext uri="{BB962C8B-B14F-4D97-AF65-F5344CB8AC3E}">
@@ -19134,13 +19718,7 @@
       </p:grpSpPr>
       <p:sp>
         <p:nvSpPr>
-          <p:cNvPr id="2" name="Заголовок 1">
-            <a:extLst>
-              <a:ext uri="{FF2B5EF4-FFF2-40B4-BE49-F238E27FC236}">
-                <a16:creationId xmlns:a16="http://schemas.microsoft.com/office/drawing/2014/main" id="{F27153B6-3FE8-4B08-A5FD-6A1522F17C7B}"/>
-              </a:ext>
-            </a:extLst>
-          </p:cNvPr>
+          <p:cNvPr id="4" name="Заголовок 3"/>
           <p:cNvSpPr>
             <a:spLocks noGrp="1"/>
           </p:cNvSpPr>
@@ -19154,461 +19732,223 @@
           <a:lstStyle/>
           <a:p>
             <a:r>
-              <a:rPr lang="ru-RU" dirty="0"/>
-              <a:t>Проектирование и архитектура</a:t>
-            </a:r>
-          </a:p>
-        </p:txBody>
-      </p:sp>
-      <p:sp>
-        <p:nvSpPr>
-          <p:cNvPr id="30" name="Текст 29"/>
-          <p:cNvSpPr>
-            <a:spLocks noGrp="1"/>
-          </p:cNvSpPr>
-          <p:nvPr>
-            <p:ph type="body" idx="1"/>
-          </p:nvPr>
-        </p:nvSpPr>
+              <a:rPr lang="ru-RU" dirty="0" smtClean="0"/>
+              <a:t>Компоненты системы</a:t>
+            </a:r>
+            <a:endParaRPr lang="ru-RU" dirty="0"/>
+          </a:p>
+        </p:txBody>
+      </p:sp>
+      <p:pic>
+        <p:nvPicPr>
+          <p:cNvPr id="7" name="Объект 6"/>
+          <p:cNvPicPr>
+            <a:picLocks noGrp="1" noChangeAspect="1"/>
+          </p:cNvPicPr>
+          <p:nvPr>
+            <p:ph idx="1"/>
+          </p:nvPr>
+        </p:nvPicPr>
+        <p:blipFill>
+          <a:blip r:embed="rId2"/>
+          <a:stretch>
+            <a:fillRect/>
+          </a:stretch>
+        </p:blipFill>
         <p:spPr>
           <a:xfrm>
-            <a:off x="927100" y="3962806"/>
-            <a:ext cx="5157787" cy="823912"/>
-          </a:xfrm>
-        </p:spPr>
-        <p:txBody>
-          <a:bodyPr/>
-          <a:lstStyle/>
-          <a:p>
-            <a:r>
-              <a:rPr lang="ru-RU" dirty="0"/>
-              <a:t>Логика данных</a:t>
-            </a:r>
-          </a:p>
-        </p:txBody>
-      </p:sp>
-      <p:sp>
-        <p:nvSpPr>
-          <p:cNvPr id="31" name="Объект 30"/>
-          <p:cNvSpPr>
-            <a:spLocks noGrp="1"/>
-          </p:cNvSpPr>
-          <p:nvPr>
-            <p:ph sz="half" idx="2"/>
-          </p:nvPr>
-        </p:nvSpPr>
-        <p:spPr>
-          <a:xfrm>
-            <a:off x="962526" y="5037221"/>
-            <a:ext cx="5130886" cy="1152442"/>
-          </a:xfrm>
-        </p:spPr>
-        <p:txBody>
-          <a:bodyPr>
-            <a:normAutofit fontScale="62500" lnSpcReduction="20000"/>
-          </a:bodyPr>
-          <a:lstStyle/>
-          <a:p>
-            <a:pPr marL="0" indent="0">
-              <a:buNone/>
-            </a:pPr>
-            <a:r>
-              <a:rPr lang="ru-RU" dirty="0"/>
-              <a:t>Центральная сущность — запрос анализа. С ним связаны пользователь, выбранный период, AOI, набор сцен, результат классификации и метрики качества.</a:t>
-            </a:r>
-          </a:p>
-        </p:txBody>
-      </p:sp>
-      <p:sp>
-        <p:nvSpPr>
-          <p:cNvPr id="32" name="Текст 31"/>
-          <p:cNvSpPr>
-            <a:spLocks noGrp="1"/>
-          </p:cNvSpPr>
-          <p:nvPr>
-            <p:ph type="body" sz="quarter" idx="3"/>
-          </p:nvPr>
-        </p:nvSpPr>
-        <p:spPr>
-          <a:xfrm>
-            <a:off x="6411084" y="3975727"/>
-            <a:ext cx="5183188" cy="823912"/>
-          </a:xfrm>
-        </p:spPr>
-        <p:txBody>
-          <a:bodyPr numCol="3"/>
-          <a:lstStyle/>
-          <a:p>
-            <a:r>
-              <a:rPr lang="ru-RU" dirty="0" smtClean="0"/>
-              <a:t>Архитектурный </a:t>
-            </a:r>
-            <a:r>
-              <a:rPr lang="ru-RU" dirty="0"/>
-              <a:t>принцип</a:t>
-            </a:r>
-          </a:p>
-          <a:p>
-            <a:endParaRPr lang="ru-RU" dirty="0"/>
-          </a:p>
-        </p:txBody>
-      </p:sp>
-      <p:sp>
-        <p:nvSpPr>
-          <p:cNvPr id="33" name="Объект 32"/>
-          <p:cNvSpPr>
-            <a:spLocks noGrp="1"/>
-          </p:cNvSpPr>
-          <p:nvPr>
-            <p:ph sz="quarter" idx="4"/>
-          </p:nvPr>
-        </p:nvSpPr>
-        <p:spPr>
-          <a:xfrm>
-            <a:off x="6411084" y="5037221"/>
-            <a:ext cx="5183188" cy="1152441"/>
-          </a:xfrm>
-        </p:spPr>
-        <p:txBody>
-          <a:bodyPr>
-            <a:normAutofit fontScale="62500" lnSpcReduction="20000"/>
-          </a:bodyPr>
-          <a:lstStyle/>
-          <a:p>
-            <a:pPr marL="0" indent="0">
-              <a:buNone/>
-            </a:pPr>
-            <a:r>
-              <a:rPr lang="ru-RU" dirty="0"/>
-              <a:t>Модульность: интерфейс, API, аналитический модуль и база данных разделены, что упрощает масштабирование и сопровождение системы.</a:t>
-            </a:r>
-          </a:p>
-        </p:txBody>
-      </p:sp>
-      <p:sp>
-        <p:nvSpPr>
-          <p:cNvPr id="17" name="Text 1"/>
-          <p:cNvSpPr/>
-          <p:nvPr/>
-        </p:nvSpPr>
-        <p:spPr>
-          <a:xfrm>
-            <a:off x="511783" y="1814059"/>
-            <a:ext cx="2574204" cy="1899584"/>
-          </a:xfrm>
-          <a:prstGeom prst="roundRect">
-            <a:avLst>
-              <a:gd name="adj" fmla="val 129949"/>
-            </a:avLst>
-          </a:prstGeom>
-          <a:solidFill>
-            <a:srgbClr val="FFFFFF"/>
-          </a:solidFill>
-          <a:ln w="9525">
-            <a:solidFill>
-              <a:srgbClr val="D8DCE6"/>
-            </a:solidFill>
-          </a:ln>
-        </p:spPr>
-        <p:txBody>
-          <a:bodyPr wrap="none" lIns="0" tIns="0" rIns="0" bIns="0" rtlCol="0" anchor="ctr">
-            <a:normAutofit/>
-          </a:bodyPr>
-          <a:lstStyle/>
-          <a:p>
-            <a:pPr marL="0" indent="0">
-              <a:buNone/>
-            </a:pPr>
-            <a:endParaRPr lang="en-US" dirty="0"/>
-          </a:p>
-        </p:txBody>
-      </p:sp>
-      <p:sp>
-        <p:nvSpPr>
-          <p:cNvPr id="21" name="Text 8"/>
-          <p:cNvSpPr/>
-          <p:nvPr/>
-        </p:nvSpPr>
-        <p:spPr>
-          <a:xfrm>
-            <a:off x="781070" y="2210262"/>
-            <a:ext cx="2035629" cy="1107177"/>
+            <a:off x="5183188" y="1035864"/>
+            <a:ext cx="6172200" cy="4776746"/>
           </a:xfrm>
           <a:prstGeom prst="rect">
             <a:avLst/>
           </a:prstGeom>
-          <a:noFill/>
-          <a:ln/>
         </p:spPr>
-        <p:txBody>
-          <a:bodyPr wrap="square" lIns="0" tIns="0" rIns="0" bIns="0" rtlCol="0" anchor="t"/>
-          <a:lstStyle/>
-          <a:p>
-            <a:pPr marL="0" indent="0" algn="ctr">
-              <a:lnSpc>
-                <a:spcPts val="1632"/>
-              </a:lnSpc>
-              <a:buNone/>
+      </p:pic>
+      <p:sp>
+        <p:nvSpPr>
+          <p:cNvPr id="6" name="Текст 5"/>
+          <p:cNvSpPr>
+            <a:spLocks noGrp="1"/>
+          </p:cNvSpPr>
+          <p:nvPr>
+            <p:ph type="body" sz="half" idx="2"/>
+          </p:nvPr>
+        </p:nvSpPr>
+        <p:spPr/>
+        <p:txBody>
+          <a:bodyPr>
+            <a:normAutofit fontScale="77500" lnSpcReduction="20000"/>
+          </a:bodyPr>
+          <a:lstStyle/>
+          <a:p>
+            <a:r>
+              <a:rPr lang="en-US" dirty="0"/>
+              <a:t>W</a:t>
+            </a:r>
+            <a:r>
+              <a:rPr lang="en-US" dirty="0" smtClean="0"/>
+              <a:t>eb </a:t>
+            </a:r>
+            <a:r>
+              <a:rPr lang="en-US" dirty="0"/>
+              <a:t>Client </a:t>
+            </a:r>
+            <a:r>
+              <a:rPr lang="ru-RU" dirty="0"/>
+              <a:t>обращается к </a:t>
+            </a:r>
+            <a:r>
+              <a:rPr lang="en-US" dirty="0"/>
+              <a:t>API Gateway </a:t>
+            </a:r>
+            <a:r>
+              <a:rPr lang="ru-RU" dirty="0"/>
+              <a:t>по </a:t>
+            </a:r>
+            <a:r>
+              <a:rPr lang="en-US" dirty="0"/>
+              <a:t>HTTP(S).</a:t>
+            </a:r>
+          </a:p>
+          <a:p>
+            <a:r>
+              <a:rPr lang="en-US" dirty="0"/>
+              <a:t>API Gateway </a:t>
+            </a:r>
+            <a:r>
+              <a:rPr lang="ru-RU" dirty="0"/>
+              <a:t>вызывает:</a:t>
+            </a:r>
+          </a:p>
+          <a:p>
+            <a:pPr marL="285750" indent="-285750">
+              <a:buFont typeface="Arial" panose="020B0604020202020204" pitchFamily="34" charset="0"/>
+              <a:buChar char="−"/>
             </a:pPr>
             <a:r>
-              <a:rPr lang="en-US" sz="1275" dirty="0">
-                <a:solidFill>
-                  <a:srgbClr val="1E1E1E"/>
-                </a:solidFill>
-                <a:latin typeface="Arial" pitchFamily="34" charset="0"/>
-                <a:ea typeface="Arial" pitchFamily="34" charset="-122"/>
-                <a:cs typeface="Arial" pitchFamily="34" charset="-120"/>
-              </a:rPr>
-              <a:t>Web UI, карта, формы выбора AOI, запуск анализа, просмотр результатов.</a:t>
-            </a:r>
-            <a:endParaRPr lang="en-US" sz="1275" dirty="0"/>
-          </a:p>
-        </p:txBody>
-      </p:sp>
-      <p:sp>
-        <p:nvSpPr>
-          <p:cNvPr id="25" name="Text 1"/>
-          <p:cNvSpPr/>
-          <p:nvPr/>
-        </p:nvSpPr>
-        <p:spPr>
-          <a:xfrm>
-            <a:off x="3352695" y="1810215"/>
-            <a:ext cx="2471200" cy="1899584"/>
-          </a:xfrm>
-          <a:prstGeom prst="roundRect">
-            <a:avLst>
-              <a:gd name="adj" fmla="val 129949"/>
-            </a:avLst>
-          </a:prstGeom>
-          <a:solidFill>
-            <a:srgbClr val="FFFFFF"/>
-          </a:solidFill>
-          <a:ln w="9525">
-            <a:solidFill>
-              <a:srgbClr val="D8DCE6"/>
-            </a:solidFill>
-          </a:ln>
-        </p:spPr>
-        <p:txBody>
-          <a:bodyPr wrap="none" lIns="0" tIns="0" rIns="0" bIns="0" rtlCol="0" anchor="ctr">
-            <a:normAutofit/>
-          </a:bodyPr>
-          <a:lstStyle/>
-          <a:p>
-            <a:pPr marL="0" indent="0">
-              <a:buNone/>
+              <a:rPr lang="en-US" dirty="0" err="1"/>
+              <a:t>Auth</a:t>
+            </a:r>
+            <a:r>
+              <a:rPr lang="en-US" dirty="0"/>
+              <a:t> Service </a:t>
+            </a:r>
+            <a:r>
+              <a:rPr lang="ru-RU" dirty="0"/>
+              <a:t>для проверки прав;</a:t>
+            </a:r>
+          </a:p>
+          <a:p>
+            <a:pPr marL="285750" indent="-285750">
+              <a:buFont typeface="Arial" panose="020B0604020202020204" pitchFamily="34" charset="0"/>
+              <a:buChar char="−"/>
             </a:pPr>
-            <a:endParaRPr lang="en-US" dirty="0"/>
-          </a:p>
-        </p:txBody>
-      </p:sp>
-      <p:sp>
-        <p:nvSpPr>
-          <p:cNvPr id="22" name="Text 9"/>
-          <p:cNvSpPr/>
-          <p:nvPr/>
-        </p:nvSpPr>
-        <p:spPr>
-          <a:xfrm>
-            <a:off x="3444488" y="2210262"/>
-            <a:ext cx="2189383" cy="1024996"/>
-          </a:xfrm>
-          <a:prstGeom prst="rect">
-            <a:avLst/>
-          </a:prstGeom>
-          <a:noFill/>
-          <a:ln/>
-        </p:spPr>
-        <p:txBody>
-          <a:bodyPr wrap="square" lIns="0" tIns="0" rIns="0" bIns="0" rtlCol="0" anchor="t"/>
-          <a:lstStyle/>
-          <a:p>
-            <a:pPr marL="0" indent="0" algn="ctr">
-              <a:lnSpc>
-                <a:spcPts val="1632"/>
-              </a:lnSpc>
-              <a:buNone/>
+            <a:r>
+              <a:rPr lang="en-US" dirty="0"/>
+              <a:t>Analysis Service </a:t>
+            </a:r>
+            <a:r>
+              <a:rPr lang="ru-RU" dirty="0"/>
+              <a:t>для создания и управления запросами анализа.</a:t>
+            </a:r>
+          </a:p>
+          <a:p>
+            <a:r>
+              <a:rPr lang="en-US" dirty="0"/>
+              <a:t>Analysis Service </a:t>
+            </a:r>
+            <a:r>
+              <a:rPr lang="ru-RU" dirty="0"/>
+              <a:t>взаимодействует с:</a:t>
+            </a:r>
+          </a:p>
+          <a:p>
+            <a:pPr marL="342900" indent="-342900">
+              <a:buFont typeface="Arial" panose="020B0604020202020204" pitchFamily="34" charset="0"/>
+              <a:buChar char="−"/>
             </a:pPr>
             <a:r>
-              <a:rPr lang="en-US" sz="1275" dirty="0">
-                <a:solidFill>
-                  <a:srgbClr val="1E1E1E"/>
-                </a:solidFill>
-                <a:latin typeface="Arial" pitchFamily="34" charset="0"/>
-                <a:ea typeface="Arial" pitchFamily="34" charset="-122"/>
-                <a:cs typeface="Arial" pitchFamily="34" charset="-120"/>
-              </a:rPr>
-              <a:t>REST‑эндпоинты для запросов классификации, получения сцен, статистики и файлов.</a:t>
-            </a:r>
-            <a:endParaRPr lang="en-US" sz="1275" dirty="0"/>
-          </a:p>
-        </p:txBody>
-      </p:sp>
-      <p:sp>
-        <p:nvSpPr>
-          <p:cNvPr id="28" name="Text 1"/>
-          <p:cNvSpPr/>
-          <p:nvPr/>
-        </p:nvSpPr>
-        <p:spPr>
-          <a:xfrm>
-            <a:off x="6093412" y="1761510"/>
-            <a:ext cx="2574204" cy="1899584"/>
-          </a:xfrm>
-          <a:prstGeom prst="roundRect">
-            <a:avLst>
-              <a:gd name="adj" fmla="val 129949"/>
-            </a:avLst>
-          </a:prstGeom>
-          <a:solidFill>
-            <a:srgbClr val="FFFFFF"/>
-          </a:solidFill>
-          <a:ln w="9525">
-            <a:solidFill>
-              <a:srgbClr val="D8DCE6"/>
-            </a:solidFill>
-          </a:ln>
-        </p:spPr>
-        <p:txBody>
-          <a:bodyPr wrap="none" lIns="0" tIns="0" rIns="0" bIns="0" rtlCol="0" anchor="ctr">
-            <a:normAutofit/>
-          </a:bodyPr>
-          <a:lstStyle/>
-          <a:p>
-            <a:pPr marL="0" indent="0">
-              <a:buNone/>
+              <a:rPr lang="en-US" dirty="0"/>
+              <a:t>Copernicus/USGS/GEE </a:t>
+            </a:r>
+            <a:r>
+              <a:rPr lang="ru-RU" dirty="0"/>
+              <a:t>для поиска и загрузки сцен;</a:t>
+            </a:r>
+          </a:p>
+          <a:p>
+            <a:pPr marL="342900" indent="-342900">
+              <a:buFont typeface="Arial" panose="020B0604020202020204" pitchFamily="34" charset="0"/>
+              <a:buChar char="−"/>
             </a:pPr>
-            <a:endParaRPr lang="en-US" dirty="0"/>
-          </a:p>
-        </p:txBody>
-      </p:sp>
-      <p:sp>
-        <p:nvSpPr>
-          <p:cNvPr id="23" name="Text 10"/>
-          <p:cNvSpPr/>
-          <p:nvPr/>
-        </p:nvSpPr>
-        <p:spPr>
-          <a:xfrm>
-            <a:off x="6411085" y="2191166"/>
-            <a:ext cx="1938857" cy="1107177"/>
-          </a:xfrm>
-          <a:prstGeom prst="rect">
-            <a:avLst/>
-          </a:prstGeom>
-          <a:noFill/>
-          <a:ln/>
-        </p:spPr>
-        <p:txBody>
-          <a:bodyPr wrap="square" lIns="0" tIns="0" rIns="0" bIns="0" rtlCol="0" anchor="t"/>
-          <a:lstStyle/>
-          <a:p>
-            <a:pPr marL="0" indent="0" algn="ctr">
-              <a:lnSpc>
-                <a:spcPts val="1632"/>
-              </a:lnSpc>
-              <a:buNone/>
+            <a:r>
+              <a:rPr lang="en-US" dirty="0"/>
+              <a:t>PostgreSQL/</a:t>
+            </a:r>
+            <a:r>
+              <a:rPr lang="en-US" dirty="0" err="1"/>
+              <a:t>PostGIS</a:t>
+            </a:r>
+            <a:r>
+              <a:rPr lang="en-US" dirty="0"/>
+              <a:t> </a:t>
+            </a:r>
+            <a:r>
+              <a:rPr lang="ru-RU" dirty="0"/>
+              <a:t>для записи/чтения метаданных;</a:t>
+            </a:r>
+          </a:p>
+          <a:p>
+            <a:pPr marL="342900" indent="-342900">
+              <a:buFont typeface="Arial" panose="020B0604020202020204" pitchFamily="34" charset="0"/>
+              <a:buChar char="−"/>
             </a:pPr>
             <a:r>
-              <a:rPr lang="en-US" sz="1275" dirty="0">
-                <a:solidFill>
-                  <a:srgbClr val="1E1E1E"/>
-                </a:solidFill>
-                <a:latin typeface="Arial" pitchFamily="34" charset="0"/>
-                <a:ea typeface="Arial" pitchFamily="34" charset="-122"/>
-                <a:cs typeface="Arial" pitchFamily="34" charset="-120"/>
-              </a:rPr>
-              <a:t>Подбор сцен, запуск моделей MaRS / RNN / LSTM, формирование GeoTIFF и статистики.</a:t>
-            </a:r>
-            <a:endParaRPr lang="en-US" sz="1275" dirty="0"/>
-          </a:p>
-        </p:txBody>
-      </p:sp>
-      <p:sp>
-        <p:nvSpPr>
-          <p:cNvPr id="29" name="Text 1"/>
-          <p:cNvSpPr/>
-          <p:nvPr/>
-        </p:nvSpPr>
-        <p:spPr>
-          <a:xfrm>
-            <a:off x="8931176" y="1772968"/>
-            <a:ext cx="2574204" cy="1899584"/>
-          </a:xfrm>
-          <a:prstGeom prst="roundRect">
-            <a:avLst>
-              <a:gd name="adj" fmla="val 129949"/>
-            </a:avLst>
-          </a:prstGeom>
-          <a:solidFill>
-            <a:srgbClr val="FFFFFF"/>
-          </a:solidFill>
-          <a:ln w="9525">
-            <a:solidFill>
-              <a:srgbClr val="D8DCE6"/>
-            </a:solidFill>
-          </a:ln>
-        </p:spPr>
-        <p:txBody>
-          <a:bodyPr wrap="none" lIns="0" tIns="0" rIns="0" bIns="0" rtlCol="0" anchor="ctr">
-            <a:normAutofit/>
-          </a:bodyPr>
-          <a:lstStyle/>
-          <a:p>
-            <a:pPr marL="0" indent="0">
-              <a:buNone/>
-            </a:pPr>
-            <a:endParaRPr lang="en-US" dirty="0"/>
-          </a:p>
-        </p:txBody>
-      </p:sp>
-      <p:sp>
-        <p:nvSpPr>
-          <p:cNvPr id="24" name="Text 11"/>
-          <p:cNvSpPr/>
-          <p:nvPr/>
-        </p:nvSpPr>
-        <p:spPr>
-          <a:xfrm>
-            <a:off x="9178981" y="2210262"/>
-            <a:ext cx="2078593" cy="1024996"/>
-          </a:xfrm>
-          <a:prstGeom prst="rect">
-            <a:avLst/>
-          </a:prstGeom>
-          <a:noFill/>
-          <a:ln/>
-        </p:spPr>
-        <p:txBody>
-          <a:bodyPr wrap="square" lIns="0" tIns="0" rIns="0" bIns="0" rtlCol="0" anchor="t"/>
-          <a:lstStyle/>
-          <a:p>
-            <a:pPr marL="0" indent="0" algn="ctr">
-              <a:lnSpc>
-                <a:spcPts val="1632"/>
-              </a:lnSpc>
-              <a:buNone/>
-            </a:pPr>
-            <a:r>
-              <a:rPr lang="en-US" sz="1275" dirty="0">
-                <a:solidFill>
-                  <a:srgbClr val="1E1E1E"/>
-                </a:solidFill>
-                <a:latin typeface="Arial" pitchFamily="34" charset="0"/>
-                <a:ea typeface="Arial" pitchFamily="34" charset="-122"/>
-                <a:cs typeface="Arial" pitchFamily="34" charset="-120"/>
-              </a:rPr>
-              <a:t>PostgreSQL/PostGIS: пользователи, запросы, сцены, результаты, метрики, классы покрытия.</a:t>
-            </a:r>
-            <a:endParaRPr lang="en-US" sz="1275" dirty="0"/>
+              <a:rPr lang="en-US" dirty="0"/>
+              <a:t>Raster Storage </a:t>
+            </a:r>
+            <a:r>
+              <a:rPr lang="ru-RU" dirty="0"/>
+              <a:t>для чтения/записи растровых данных.</a:t>
+            </a:r>
+          </a:p>
+          <a:p>
+            <a:r>
+              <a:rPr lang="en-US" dirty="0" err="1"/>
+              <a:t>Auth</a:t>
+            </a:r>
+            <a:r>
+              <a:rPr lang="en-US" dirty="0"/>
+              <a:t> Service </a:t>
+            </a:r>
+            <a:r>
+              <a:rPr lang="ru-RU" dirty="0"/>
+              <a:t>использует </a:t>
+            </a:r>
+            <a:r>
+              <a:rPr lang="en-US" dirty="0"/>
+              <a:t>PostgreSQL/</a:t>
+            </a:r>
+            <a:r>
+              <a:rPr lang="en-US" dirty="0" err="1"/>
+              <a:t>PostGIS</a:t>
+            </a:r>
+            <a:r>
+              <a:rPr lang="en-US" dirty="0"/>
+              <a:t> </a:t>
+            </a:r>
+            <a:r>
+              <a:rPr lang="ru-RU" dirty="0"/>
+              <a:t>как хранилище учётных записей.</a:t>
+            </a:r>
           </a:p>
         </p:txBody>
       </p:sp>
     </p:spTree>
     <p:extLst>
       <p:ext uri="{BB962C8B-B14F-4D97-AF65-F5344CB8AC3E}">
-        <p14:creationId xmlns:p14="http://schemas.microsoft.com/office/powerpoint/2010/main" val="3700633465"/>
+        <p14:creationId xmlns:p14="http://schemas.microsoft.com/office/powerpoint/2010/main" val="3275800057"/>
       </p:ext>
     </p:extLst>
   </p:cSld>
@@ -19637,6 +19977,591 @@
       </p:grpSpPr>
       <p:sp>
         <p:nvSpPr>
+          <p:cNvPr id="2" name="Заголовок 1">
+            <a:extLst>
+              <a:ext uri="{FF2B5EF4-FFF2-40B4-BE49-F238E27FC236}">
+                <a16:creationId xmlns:a16="http://schemas.microsoft.com/office/drawing/2014/main" id="{F27153B6-3FE8-4B08-A5FD-6A1522F17C7B}"/>
+              </a:ext>
+            </a:extLst>
+          </p:cNvPr>
+          <p:cNvSpPr>
+            <a:spLocks noGrp="1"/>
+          </p:cNvSpPr>
+          <p:nvPr>
+            <p:ph type="title"/>
+          </p:nvPr>
+        </p:nvSpPr>
+        <p:spPr>
+          <a:xfrm>
+            <a:off x="75017" y="502852"/>
+            <a:ext cx="10515600" cy="1325563"/>
+          </a:xfrm>
+        </p:spPr>
+        <p:txBody>
+          <a:bodyPr/>
+          <a:lstStyle/>
+          <a:p>
+            <a:r>
+              <a:rPr lang="ru-RU" dirty="0"/>
+              <a:t>Проектирование и архитектура</a:t>
+            </a:r>
+          </a:p>
+        </p:txBody>
+      </p:sp>
+      <p:sp>
+        <p:nvSpPr>
+          <p:cNvPr id="30" name="Текст 29"/>
+          <p:cNvSpPr>
+            <a:spLocks noGrp="1"/>
+          </p:cNvSpPr>
+          <p:nvPr>
+            <p:ph type="body" idx="1"/>
+          </p:nvPr>
+        </p:nvSpPr>
+        <p:spPr>
+          <a:xfrm>
+            <a:off x="927100" y="3962806"/>
+            <a:ext cx="5157787" cy="823912"/>
+          </a:xfrm>
+        </p:spPr>
+        <p:txBody>
+          <a:bodyPr/>
+          <a:lstStyle/>
+          <a:p>
+            <a:r>
+              <a:rPr lang="ru-RU" dirty="0"/>
+              <a:t>Логика данных</a:t>
+            </a:r>
+          </a:p>
+        </p:txBody>
+      </p:sp>
+      <p:sp>
+        <p:nvSpPr>
+          <p:cNvPr id="31" name="Объект 30"/>
+          <p:cNvSpPr>
+            <a:spLocks noGrp="1"/>
+          </p:cNvSpPr>
+          <p:nvPr>
+            <p:ph sz="half" idx="2"/>
+          </p:nvPr>
+        </p:nvSpPr>
+        <p:spPr>
+          <a:xfrm>
+            <a:off x="962526" y="5037221"/>
+            <a:ext cx="5130886" cy="1152442"/>
+          </a:xfrm>
+        </p:spPr>
+        <p:txBody>
+          <a:bodyPr>
+            <a:normAutofit fontScale="62500" lnSpcReduction="20000"/>
+          </a:bodyPr>
+          <a:lstStyle/>
+          <a:p>
+            <a:pPr marL="0" indent="0">
+              <a:buNone/>
+            </a:pPr>
+            <a:r>
+              <a:rPr lang="ru-RU" dirty="0"/>
+              <a:t>Центральная сущность — запрос анализа. С ним связаны пользователь, выбранный период, AOI, набор сцен, результат классификации и метрики качества.</a:t>
+            </a:r>
+          </a:p>
+        </p:txBody>
+      </p:sp>
+      <p:sp>
+        <p:nvSpPr>
+          <p:cNvPr id="32" name="Текст 31"/>
+          <p:cNvSpPr>
+            <a:spLocks noGrp="1"/>
+          </p:cNvSpPr>
+          <p:nvPr>
+            <p:ph type="body" sz="quarter" idx="3"/>
+          </p:nvPr>
+        </p:nvSpPr>
+        <p:spPr>
+          <a:xfrm>
+            <a:off x="6411084" y="3975727"/>
+            <a:ext cx="5183188" cy="823912"/>
+          </a:xfrm>
+        </p:spPr>
+        <p:txBody>
+          <a:bodyPr numCol="3"/>
+          <a:lstStyle/>
+          <a:p>
+            <a:r>
+              <a:rPr lang="ru-RU" dirty="0" smtClean="0"/>
+              <a:t>Архитектурный </a:t>
+            </a:r>
+            <a:r>
+              <a:rPr lang="ru-RU" dirty="0"/>
+              <a:t>принцип</a:t>
+            </a:r>
+          </a:p>
+          <a:p>
+            <a:endParaRPr lang="ru-RU" dirty="0"/>
+          </a:p>
+        </p:txBody>
+      </p:sp>
+      <p:sp>
+        <p:nvSpPr>
+          <p:cNvPr id="33" name="Объект 32"/>
+          <p:cNvSpPr>
+            <a:spLocks noGrp="1"/>
+          </p:cNvSpPr>
+          <p:nvPr>
+            <p:ph sz="quarter" idx="4"/>
+          </p:nvPr>
+        </p:nvSpPr>
+        <p:spPr>
+          <a:xfrm>
+            <a:off x="6411084" y="5037221"/>
+            <a:ext cx="5183188" cy="1152441"/>
+          </a:xfrm>
+        </p:spPr>
+        <p:txBody>
+          <a:bodyPr>
+            <a:normAutofit fontScale="62500" lnSpcReduction="20000"/>
+          </a:bodyPr>
+          <a:lstStyle/>
+          <a:p>
+            <a:pPr marL="0" indent="0">
+              <a:buNone/>
+            </a:pPr>
+            <a:r>
+              <a:rPr lang="ru-RU" dirty="0"/>
+              <a:t>Модульность: интерфейс, API, аналитический модуль и база данных разделены, что упрощает масштабирование и сопровождение системы.</a:t>
+            </a:r>
+          </a:p>
+        </p:txBody>
+      </p:sp>
+      <p:sp>
+        <p:nvSpPr>
+          <p:cNvPr id="17" name="Text 1"/>
+          <p:cNvSpPr/>
+          <p:nvPr/>
+        </p:nvSpPr>
+        <p:spPr>
+          <a:xfrm>
+            <a:off x="511783" y="1814059"/>
+            <a:ext cx="2574204" cy="1899584"/>
+          </a:xfrm>
+          <a:prstGeom prst="roundRect">
+            <a:avLst>
+              <a:gd name="adj" fmla="val 129949"/>
+            </a:avLst>
+          </a:prstGeom>
+          <a:solidFill>
+            <a:srgbClr val="FFFFFF"/>
+          </a:solidFill>
+          <a:ln w="9525">
+            <a:solidFill>
+              <a:srgbClr val="D8DCE6"/>
+            </a:solidFill>
+          </a:ln>
+        </p:spPr>
+        <p:txBody>
+          <a:bodyPr wrap="none" lIns="0" tIns="0" rIns="0" bIns="0" rtlCol="0" anchor="ctr">
+            <a:normAutofit/>
+          </a:bodyPr>
+          <a:lstStyle/>
+          <a:p>
+            <a:pPr marL="0" indent="0">
+              <a:buNone/>
+            </a:pPr>
+            <a:endParaRPr lang="en-US" dirty="0"/>
+          </a:p>
+        </p:txBody>
+      </p:sp>
+      <p:sp>
+        <p:nvSpPr>
+          <p:cNvPr id="21" name="Text 8"/>
+          <p:cNvSpPr/>
+          <p:nvPr/>
+        </p:nvSpPr>
+        <p:spPr>
+          <a:xfrm>
+            <a:off x="781070" y="2210262"/>
+            <a:ext cx="2035629" cy="1107177"/>
+          </a:xfrm>
+          <a:prstGeom prst="rect">
+            <a:avLst/>
+          </a:prstGeom>
+          <a:noFill/>
+          <a:ln/>
+        </p:spPr>
+        <p:txBody>
+          <a:bodyPr wrap="square" lIns="0" tIns="0" rIns="0" bIns="0" rtlCol="0" anchor="t"/>
+          <a:lstStyle/>
+          <a:p>
+            <a:pPr marL="0" indent="0" algn="ctr">
+              <a:lnSpc>
+                <a:spcPts val="1632"/>
+              </a:lnSpc>
+              <a:buNone/>
+            </a:pPr>
+            <a:r>
+              <a:rPr lang="en-US" sz="1275" dirty="0">
+                <a:solidFill>
+                  <a:srgbClr val="1E1E1E"/>
+                </a:solidFill>
+                <a:latin typeface="Arial" pitchFamily="34" charset="0"/>
+                <a:ea typeface="Arial" pitchFamily="34" charset="-122"/>
+                <a:cs typeface="Arial" pitchFamily="34" charset="-120"/>
+              </a:rPr>
+              <a:t>Web UI, карта, формы выбора AOI, запуск анализа, просмотр результатов.</a:t>
+            </a:r>
+            <a:endParaRPr lang="en-US" sz="1275" dirty="0"/>
+          </a:p>
+        </p:txBody>
+      </p:sp>
+      <p:sp>
+        <p:nvSpPr>
+          <p:cNvPr id="25" name="Text 1"/>
+          <p:cNvSpPr/>
+          <p:nvPr/>
+        </p:nvSpPr>
+        <p:spPr>
+          <a:xfrm>
+            <a:off x="3352695" y="1810215"/>
+            <a:ext cx="2471200" cy="1899584"/>
+          </a:xfrm>
+          <a:prstGeom prst="roundRect">
+            <a:avLst>
+              <a:gd name="adj" fmla="val 129949"/>
+            </a:avLst>
+          </a:prstGeom>
+          <a:solidFill>
+            <a:srgbClr val="FFFFFF"/>
+          </a:solidFill>
+          <a:ln w="9525">
+            <a:solidFill>
+              <a:srgbClr val="D8DCE6"/>
+            </a:solidFill>
+          </a:ln>
+        </p:spPr>
+        <p:txBody>
+          <a:bodyPr wrap="none" lIns="0" tIns="0" rIns="0" bIns="0" rtlCol="0" anchor="ctr">
+            <a:normAutofit/>
+          </a:bodyPr>
+          <a:lstStyle/>
+          <a:p>
+            <a:pPr marL="0" indent="0">
+              <a:buNone/>
+            </a:pPr>
+            <a:endParaRPr lang="en-US" dirty="0"/>
+          </a:p>
+        </p:txBody>
+      </p:sp>
+      <p:sp>
+        <p:nvSpPr>
+          <p:cNvPr id="22" name="Text 9"/>
+          <p:cNvSpPr/>
+          <p:nvPr/>
+        </p:nvSpPr>
+        <p:spPr>
+          <a:xfrm>
+            <a:off x="3444488" y="2210262"/>
+            <a:ext cx="2189383" cy="1024996"/>
+          </a:xfrm>
+          <a:prstGeom prst="rect">
+            <a:avLst/>
+          </a:prstGeom>
+          <a:noFill/>
+          <a:ln/>
+        </p:spPr>
+        <p:txBody>
+          <a:bodyPr wrap="square" lIns="0" tIns="0" rIns="0" bIns="0" rtlCol="0" anchor="t"/>
+          <a:lstStyle/>
+          <a:p>
+            <a:pPr marL="0" indent="0" algn="ctr">
+              <a:lnSpc>
+                <a:spcPts val="1632"/>
+              </a:lnSpc>
+              <a:buNone/>
+            </a:pPr>
+            <a:r>
+              <a:rPr lang="en-US" sz="1275" dirty="0">
+                <a:solidFill>
+                  <a:srgbClr val="1E1E1E"/>
+                </a:solidFill>
+                <a:latin typeface="Arial" pitchFamily="34" charset="0"/>
+                <a:ea typeface="Arial" pitchFamily="34" charset="-122"/>
+                <a:cs typeface="Arial" pitchFamily="34" charset="-120"/>
+              </a:rPr>
+              <a:t>REST‑эндпоинты для запросов классификации, получения сцен, статистики и файлов.</a:t>
+            </a:r>
+            <a:endParaRPr lang="en-US" sz="1275" dirty="0"/>
+          </a:p>
+        </p:txBody>
+      </p:sp>
+      <p:sp>
+        <p:nvSpPr>
+          <p:cNvPr id="28" name="Text 1"/>
+          <p:cNvSpPr/>
+          <p:nvPr/>
+        </p:nvSpPr>
+        <p:spPr>
+          <a:xfrm>
+            <a:off x="6093412" y="1761510"/>
+            <a:ext cx="2574204" cy="1899584"/>
+          </a:xfrm>
+          <a:prstGeom prst="roundRect">
+            <a:avLst>
+              <a:gd name="adj" fmla="val 129949"/>
+            </a:avLst>
+          </a:prstGeom>
+          <a:solidFill>
+            <a:srgbClr val="FFFFFF"/>
+          </a:solidFill>
+          <a:ln w="9525">
+            <a:solidFill>
+              <a:srgbClr val="D8DCE6"/>
+            </a:solidFill>
+          </a:ln>
+        </p:spPr>
+        <p:txBody>
+          <a:bodyPr wrap="none" lIns="0" tIns="0" rIns="0" bIns="0" rtlCol="0" anchor="ctr">
+            <a:normAutofit/>
+          </a:bodyPr>
+          <a:lstStyle/>
+          <a:p>
+            <a:pPr marL="0" indent="0">
+              <a:buNone/>
+            </a:pPr>
+            <a:endParaRPr lang="en-US" dirty="0"/>
+          </a:p>
+        </p:txBody>
+      </p:sp>
+      <p:sp>
+        <p:nvSpPr>
+          <p:cNvPr id="23" name="Text 10"/>
+          <p:cNvSpPr/>
+          <p:nvPr/>
+        </p:nvSpPr>
+        <p:spPr>
+          <a:xfrm>
+            <a:off x="6411085" y="2191166"/>
+            <a:ext cx="1938857" cy="1107177"/>
+          </a:xfrm>
+          <a:prstGeom prst="rect">
+            <a:avLst/>
+          </a:prstGeom>
+          <a:noFill/>
+          <a:ln/>
+        </p:spPr>
+        <p:txBody>
+          <a:bodyPr wrap="square" lIns="0" tIns="0" rIns="0" bIns="0" rtlCol="0" anchor="t"/>
+          <a:lstStyle/>
+          <a:p>
+            <a:pPr marL="0" indent="0" algn="ctr">
+              <a:lnSpc>
+                <a:spcPts val="1632"/>
+              </a:lnSpc>
+              <a:buNone/>
+            </a:pPr>
+            <a:r>
+              <a:rPr lang="en-US" sz="1275" dirty="0">
+                <a:solidFill>
+                  <a:srgbClr val="1E1E1E"/>
+                </a:solidFill>
+                <a:latin typeface="Arial" pitchFamily="34" charset="0"/>
+                <a:ea typeface="Arial" pitchFamily="34" charset="-122"/>
+                <a:cs typeface="Arial" pitchFamily="34" charset="-120"/>
+              </a:rPr>
+              <a:t>Подбор сцен, запуск моделей MaRS / RNN / LSTM, формирование GeoTIFF и статистики.</a:t>
+            </a:r>
+            <a:endParaRPr lang="en-US" sz="1275" dirty="0"/>
+          </a:p>
+        </p:txBody>
+      </p:sp>
+      <p:sp>
+        <p:nvSpPr>
+          <p:cNvPr id="29" name="Text 1"/>
+          <p:cNvSpPr/>
+          <p:nvPr/>
+        </p:nvSpPr>
+        <p:spPr>
+          <a:xfrm>
+            <a:off x="8931176" y="1772968"/>
+            <a:ext cx="2574204" cy="1899584"/>
+          </a:xfrm>
+          <a:prstGeom prst="roundRect">
+            <a:avLst>
+              <a:gd name="adj" fmla="val 129949"/>
+            </a:avLst>
+          </a:prstGeom>
+          <a:solidFill>
+            <a:srgbClr val="FFFFFF"/>
+          </a:solidFill>
+          <a:ln w="9525">
+            <a:solidFill>
+              <a:srgbClr val="D8DCE6"/>
+            </a:solidFill>
+          </a:ln>
+        </p:spPr>
+        <p:txBody>
+          <a:bodyPr wrap="none" lIns="0" tIns="0" rIns="0" bIns="0" rtlCol="0" anchor="ctr">
+            <a:normAutofit/>
+          </a:bodyPr>
+          <a:lstStyle/>
+          <a:p>
+            <a:pPr marL="0" indent="0">
+              <a:buNone/>
+            </a:pPr>
+            <a:endParaRPr lang="en-US" dirty="0"/>
+          </a:p>
+        </p:txBody>
+      </p:sp>
+      <p:sp>
+        <p:nvSpPr>
+          <p:cNvPr id="24" name="Text 11"/>
+          <p:cNvSpPr/>
+          <p:nvPr/>
+        </p:nvSpPr>
+        <p:spPr>
+          <a:xfrm>
+            <a:off x="9178981" y="2210262"/>
+            <a:ext cx="2078593" cy="1024996"/>
+          </a:xfrm>
+          <a:prstGeom prst="rect">
+            <a:avLst/>
+          </a:prstGeom>
+          <a:noFill/>
+          <a:ln/>
+        </p:spPr>
+        <p:txBody>
+          <a:bodyPr wrap="square" lIns="0" tIns="0" rIns="0" bIns="0" rtlCol="0" anchor="t"/>
+          <a:lstStyle/>
+          <a:p>
+            <a:pPr marL="0" indent="0" algn="ctr">
+              <a:lnSpc>
+                <a:spcPts val="1632"/>
+              </a:lnSpc>
+              <a:buNone/>
+            </a:pPr>
+            <a:r>
+              <a:rPr lang="en-US" sz="1275" dirty="0">
+                <a:solidFill>
+                  <a:srgbClr val="1E1E1E"/>
+                </a:solidFill>
+                <a:latin typeface="Arial" pitchFamily="34" charset="0"/>
+                <a:ea typeface="Arial" pitchFamily="34" charset="-122"/>
+                <a:cs typeface="Arial" pitchFamily="34" charset="-120"/>
+              </a:rPr>
+              <a:t>PostgreSQL/PostGIS: пользователи, запросы, сцены, результаты, метрики, классы покрытия.</a:t>
+            </a:r>
+            <a:endParaRPr lang="en-US" sz="1275" dirty="0"/>
+          </a:p>
+        </p:txBody>
+      </p:sp>
+    </p:spTree>
+    <p:extLst>
+      <p:ext uri="{BB962C8B-B14F-4D97-AF65-F5344CB8AC3E}">
+        <p14:creationId xmlns:p14="http://schemas.microsoft.com/office/powerpoint/2010/main" val="3700633465"/>
+      </p:ext>
+    </p:extLst>
+  </p:cSld>
+  <p:clrMapOvr>
+    <a:masterClrMapping/>
+  </p:clrMapOvr>
+</p:sld>
+</file>
+
+<file path=ppt/slides/slide8.xml><?xml version="1.0" encoding="utf-8"?>
+<p:sld xmlns:a="http://schemas.openxmlformats.org/drawingml/2006/main" xmlns:r="http://schemas.openxmlformats.org/officeDocument/2006/relationships" xmlns:p="http://schemas.openxmlformats.org/presentationml/2006/main">
+  <p:cSld>
+    <p:spTree>
+      <p:nvGrpSpPr>
+        <p:cNvPr id="1" name=""/>
+        <p:cNvGrpSpPr/>
+        <p:nvPr/>
+      </p:nvGrpSpPr>
+      <p:grpSpPr>
+        <a:xfrm>
+          <a:off x="0" y="0"/>
+          <a:ext cx="0" cy="0"/>
+          <a:chOff x="0" y="0"/>
+          <a:chExt cx="0" cy="0"/>
+        </a:xfrm>
+      </p:grpSpPr>
+      <p:sp>
+        <p:nvSpPr>
+          <p:cNvPr id="7" name="Заголовок 6"/>
+          <p:cNvSpPr>
+            <a:spLocks noGrp="1"/>
+          </p:cNvSpPr>
+          <p:nvPr>
+            <p:ph type="title"/>
+          </p:nvPr>
+        </p:nvSpPr>
+        <p:spPr/>
+        <p:txBody>
+          <a:bodyPr/>
+          <a:lstStyle/>
+          <a:p>
+            <a:r>
+              <a:rPr lang="ru-RU" dirty="0" smtClean="0"/>
+              <a:t>Сценарии использования</a:t>
+            </a:r>
+            <a:endParaRPr lang="ru-RU" dirty="0"/>
+          </a:p>
+        </p:txBody>
+      </p:sp>
+      <p:pic>
+        <p:nvPicPr>
+          <p:cNvPr id="8" name="Рисунок 7"/>
+          <p:cNvPicPr>
+            <a:picLocks noChangeAspect="1"/>
+          </p:cNvPicPr>
+          <p:nvPr/>
+        </p:nvPicPr>
+        <p:blipFill>
+          <a:blip r:embed="rId2"/>
+          <a:stretch>
+            <a:fillRect/>
+          </a:stretch>
+        </p:blipFill>
+        <p:spPr>
+          <a:xfrm>
+            <a:off x="1060875" y="2044105"/>
+            <a:ext cx="10070250" cy="4396993"/>
+          </a:xfrm>
+          <a:prstGeom prst="rect">
+            <a:avLst/>
+          </a:prstGeom>
+        </p:spPr>
+      </p:pic>
+    </p:spTree>
+    <p:extLst>
+      <p:ext uri="{BB962C8B-B14F-4D97-AF65-F5344CB8AC3E}">
+        <p14:creationId xmlns:p14="http://schemas.microsoft.com/office/powerpoint/2010/main" val="1986234477"/>
+      </p:ext>
+    </p:extLst>
+  </p:cSld>
+  <p:clrMapOvr>
+    <a:masterClrMapping/>
+  </p:clrMapOvr>
+</p:sld>
+</file>
+
+<file path=ppt/slides/slide9.xml><?xml version="1.0" encoding="utf-8"?>
+<p:sld xmlns:a="http://schemas.openxmlformats.org/drawingml/2006/main" xmlns:r="http://schemas.openxmlformats.org/officeDocument/2006/relationships" xmlns:p="http://schemas.openxmlformats.org/presentationml/2006/main">
+  <p:cSld>
+    <p:spTree>
+      <p:nvGrpSpPr>
+        <p:cNvPr id="1" name=""/>
+        <p:cNvGrpSpPr/>
+        <p:nvPr/>
+      </p:nvGrpSpPr>
+      <p:grpSpPr>
+        <a:xfrm>
+          <a:off x="0" y="0"/>
+          <a:ext cx="0" cy="0"/>
+          <a:chOff x="0" y="0"/>
+          <a:chExt cx="0" cy="0"/>
+        </a:xfrm>
+      </p:grpSpPr>
+      <p:sp>
+        <p:nvSpPr>
           <p:cNvPr id="4" name="Заголовок 3"/>
           <p:cNvSpPr>
             <a:spLocks noGrp="1"/>
@@ -19645,7 +20570,12 @@
             <p:ph type="title"/>
           </p:nvPr>
         </p:nvSpPr>
-        <p:spPr/>
+        <p:spPr>
+          <a:xfrm>
+            <a:off x="988177" y="972588"/>
+            <a:ext cx="10890712" cy="539635"/>
+          </a:xfrm>
+        </p:spPr>
         <p:txBody>
           <a:bodyPr/>
           <a:lstStyle/>
@@ -19683,94 +20613,11 @@
         </p:blipFill>
         <p:spPr>
           <a:xfrm>
-            <a:off x="5183188" y="1687513"/>
-            <a:ext cx="6172200" cy="3471862"/>
+            <a:off x="1991101" y="1770639"/>
+            <a:ext cx="8233554" cy="4631373"/>
           </a:xfrm>
         </p:spPr>
       </p:pic>
-      <p:sp>
-        <p:nvSpPr>
-          <p:cNvPr id="6" name="Текст 5"/>
-          <p:cNvSpPr>
-            <a:spLocks noGrp="1"/>
-          </p:cNvSpPr>
-          <p:nvPr>
-            <p:ph type="body" sz="half" idx="2"/>
-          </p:nvPr>
-        </p:nvSpPr>
-        <p:spPr/>
-        <p:txBody>
-          <a:bodyPr/>
-          <a:lstStyle/>
-          <a:p>
-            <a:pPr marL="342900" indent="-342900">
-              <a:buFont typeface="+mj-lt"/>
-              <a:buAutoNum type="arabicPeriod"/>
-            </a:pPr>
-            <a:r>
-              <a:rPr lang="ru-RU" dirty="0"/>
-              <a:t>Выбор области интереса на карте и параметров анализа.</a:t>
-            </a:r>
-          </a:p>
-          <a:p>
-            <a:pPr marL="342900" indent="-342900">
-              <a:buFont typeface="+mj-lt"/>
-              <a:buAutoNum type="arabicPeriod"/>
-            </a:pPr>
-            <a:r>
-              <a:rPr lang="ru-RU" dirty="0"/>
-              <a:t>Подбор спутниковых сцен Sentinel‑2 / Sentinel‑1 / </a:t>
-            </a:r>
-            <a:r>
-              <a:rPr lang="ru-RU" dirty="0" err="1"/>
-              <a:t>Landsat</a:t>
-            </a:r>
-            <a:r>
-              <a:rPr lang="ru-RU" dirty="0"/>
-              <a:t>.</a:t>
-            </a:r>
-          </a:p>
-          <a:p>
-            <a:pPr marL="342900" indent="-342900">
-              <a:buFont typeface="+mj-lt"/>
-              <a:buAutoNum type="arabicPeriod"/>
-            </a:pPr>
-            <a:r>
-              <a:rPr lang="ru-RU" dirty="0"/>
-              <a:t>Запуск классификации и просмотр метрик качества.</a:t>
-            </a:r>
-          </a:p>
-          <a:p>
-            <a:pPr marL="342900" indent="-342900">
-              <a:buFont typeface="+mj-lt"/>
-              <a:buAutoNum type="arabicPeriod"/>
-            </a:pPr>
-            <a:r>
-              <a:rPr lang="ru-RU" dirty="0"/>
-              <a:t>Экспорт результатов в </a:t>
-            </a:r>
-            <a:r>
-              <a:rPr lang="ru-RU" dirty="0" err="1"/>
-              <a:t>GeoTIFF</a:t>
-            </a:r>
-            <a:r>
-              <a:rPr lang="ru-RU" dirty="0"/>
-              <a:t>, </a:t>
-            </a:r>
-            <a:r>
-              <a:rPr lang="ru-RU" dirty="0" err="1"/>
-              <a:t>GeoJSON</a:t>
-            </a:r>
-            <a:r>
-              <a:rPr lang="ru-RU" dirty="0"/>
-              <a:t>, KML и CSV.</a:t>
-            </a:r>
-          </a:p>
-          <a:p>
-            <a:endParaRPr lang="ru-RU" dirty="0"/>
-          </a:p>
-        </p:txBody>
-      </p:sp>
     </p:spTree>
     <p:extLst>
       <p:ext uri="{BB962C8B-B14F-4D97-AF65-F5344CB8AC3E}">
@@ -19861,310 +20708,6 @@
       </p:par>
     </p:tnLst>
   </p:timing>
-</p:sld>
-</file>
-
-<file path=ppt/slides/slide8.xml><?xml version="1.0" encoding="utf-8"?>
-<p:sld xmlns:a="http://schemas.openxmlformats.org/drawingml/2006/main" xmlns:r="http://schemas.openxmlformats.org/officeDocument/2006/relationships" xmlns:p="http://schemas.openxmlformats.org/presentationml/2006/main">
-  <p:cSld>
-    <p:spTree>
-      <p:nvGrpSpPr>
-        <p:cNvPr id="1" name=""/>
-        <p:cNvGrpSpPr/>
-        <p:nvPr/>
-      </p:nvGrpSpPr>
-      <p:grpSpPr>
-        <a:xfrm>
-          <a:off x="0" y="0"/>
-          <a:ext cx="0" cy="0"/>
-          <a:chOff x="0" y="0"/>
-          <a:chExt cx="0" cy="0"/>
-        </a:xfrm>
-      </p:grpSpPr>
-      <p:sp>
-        <p:nvSpPr>
-          <p:cNvPr id="5" name="Заголовок 4"/>
-          <p:cNvSpPr>
-            <a:spLocks noGrp="1"/>
-          </p:cNvSpPr>
-          <p:nvPr>
-            <p:ph type="title"/>
-          </p:nvPr>
-        </p:nvSpPr>
-        <p:spPr/>
-        <p:txBody>
-          <a:bodyPr/>
-          <a:lstStyle/>
-          <a:p>
-            <a:r>
-              <a:rPr lang="ru-RU" dirty="0"/>
-              <a:t>Результаты и анализ</a:t>
-            </a:r>
-          </a:p>
-        </p:txBody>
-      </p:sp>
-      <p:sp>
-        <p:nvSpPr>
-          <p:cNvPr id="6" name="Объект 5"/>
-          <p:cNvSpPr>
-            <a:spLocks noGrp="1"/>
-          </p:cNvSpPr>
-          <p:nvPr>
-            <p:ph sz="half" idx="1"/>
-          </p:nvPr>
-        </p:nvSpPr>
-        <p:spPr/>
-        <p:txBody>
-          <a:bodyPr>
-            <a:normAutofit fontScale="85000" lnSpcReduction="10000"/>
-          </a:bodyPr>
-          <a:lstStyle/>
-          <a:p>
-            <a:pPr marL="0" indent="0">
-              <a:buNone/>
-            </a:pPr>
-            <a:r>
-              <a:rPr lang="ru-RU" b="1" dirty="0"/>
-              <a:t>Достигнутые </a:t>
-            </a:r>
-            <a:r>
-              <a:rPr lang="ru-RU" b="1" dirty="0" smtClean="0"/>
-              <a:t>результаты:</a:t>
-            </a:r>
-            <a:endParaRPr lang="ru-RU" b="1" dirty="0"/>
-          </a:p>
-          <a:p>
-            <a:r>
-              <a:rPr lang="ru-RU" dirty="0"/>
-              <a:t>Сформированы требования SRS и логика пользовательских сценариев.</a:t>
-            </a:r>
-          </a:p>
-          <a:p>
-            <a:r>
-              <a:rPr lang="ru-RU" dirty="0"/>
-              <a:t>Спроектированы архитектура, API и реляционная база данных.</a:t>
-            </a:r>
-          </a:p>
-          <a:p>
-            <a:r>
-              <a:rPr lang="ru-RU" dirty="0"/>
-              <a:t>Разработан интерактивный прототип интерфейса платформы.</a:t>
-            </a:r>
-          </a:p>
-          <a:p>
-            <a:r>
-              <a:rPr lang="ru-RU" dirty="0"/>
-              <a:t>Определены метрики оценки: </a:t>
-            </a:r>
-            <a:r>
-              <a:rPr lang="ru-RU" dirty="0" err="1"/>
-              <a:t>Accuracy</a:t>
-            </a:r>
-            <a:r>
-              <a:rPr lang="ru-RU" dirty="0"/>
-              <a:t>, </a:t>
-            </a:r>
-            <a:r>
-              <a:rPr lang="ru-RU" dirty="0" err="1"/>
-              <a:t>Kappa</a:t>
-            </a:r>
-            <a:r>
-              <a:rPr lang="ru-RU" dirty="0"/>
-              <a:t>, </a:t>
-            </a:r>
-            <a:r>
-              <a:rPr lang="ru-RU" dirty="0" err="1"/>
-              <a:t>Mean</a:t>
-            </a:r>
-            <a:r>
-              <a:rPr lang="ru-RU" dirty="0"/>
-              <a:t> </a:t>
-            </a:r>
-            <a:r>
-              <a:rPr lang="ru-RU" dirty="0" err="1"/>
-              <a:t>IoU</a:t>
-            </a:r>
-            <a:r>
-              <a:rPr lang="ru-RU" dirty="0"/>
-              <a:t>.</a:t>
-            </a:r>
-          </a:p>
-          <a:p>
-            <a:endParaRPr lang="ru-RU" dirty="0"/>
-          </a:p>
-        </p:txBody>
-      </p:sp>
-      <p:pic>
-        <p:nvPicPr>
-          <p:cNvPr id="8" name="Объект 7"/>
-          <p:cNvPicPr>
-            <a:picLocks noGrp="1" noChangeAspect="1"/>
-          </p:cNvPicPr>
-          <p:nvPr>
-            <p:ph sz="half" idx="2"/>
-          </p:nvPr>
-        </p:nvPicPr>
-        <p:blipFill>
-          <a:blip r:embed="rId2">
-            <a:extLst>
-              <a:ext uri="{28A0092B-C50C-407E-A947-70E740481C1C}">
-                <a14:useLocalDpi xmlns:a14="http://schemas.microsoft.com/office/drawing/2010/main" val="0"/>
-              </a:ext>
-            </a:extLst>
-          </a:blip>
-          <a:stretch>
-            <a:fillRect/>
-          </a:stretch>
-        </p:blipFill>
-        <p:spPr>
-          <a:xfrm>
-            <a:off x="6172200" y="2305049"/>
-            <a:ext cx="5181600" cy="3826041"/>
-          </a:xfrm>
-        </p:spPr>
-      </p:pic>
-    </p:spTree>
-    <p:extLst>
-      <p:ext uri="{BB962C8B-B14F-4D97-AF65-F5344CB8AC3E}">
-        <p14:creationId xmlns:p14="http://schemas.microsoft.com/office/powerpoint/2010/main" val="2508543406"/>
-      </p:ext>
-    </p:extLst>
-  </p:cSld>
-  <p:clrMapOvr>
-    <a:masterClrMapping/>
-  </p:clrMapOvr>
-</p:sld>
-</file>
-
-<file path=ppt/slides/slide9.xml><?xml version="1.0" encoding="utf-8"?>
-<p:sld xmlns:a="http://schemas.openxmlformats.org/drawingml/2006/main" xmlns:r="http://schemas.openxmlformats.org/officeDocument/2006/relationships" xmlns:p="http://schemas.openxmlformats.org/presentationml/2006/main">
-  <p:cSld>
-    <p:spTree>
-      <p:nvGrpSpPr>
-        <p:cNvPr id="1" name=""/>
-        <p:cNvGrpSpPr/>
-        <p:nvPr/>
-      </p:nvGrpSpPr>
-      <p:grpSpPr>
-        <a:xfrm>
-          <a:off x="0" y="0"/>
-          <a:ext cx="0" cy="0"/>
-          <a:chOff x="0" y="0"/>
-          <a:chExt cx="0" cy="0"/>
-        </a:xfrm>
-      </p:grpSpPr>
-      <p:sp>
-        <p:nvSpPr>
-          <p:cNvPr id="2" name="Заголовок 1"/>
-          <p:cNvSpPr>
-            <a:spLocks noGrp="1"/>
-          </p:cNvSpPr>
-          <p:nvPr>
-            <p:ph type="title"/>
-          </p:nvPr>
-        </p:nvSpPr>
-        <p:spPr/>
-        <p:txBody>
-          <a:bodyPr/>
-          <a:lstStyle/>
-          <a:p>
-            <a:r>
-              <a:rPr lang="ru-RU" dirty="0"/>
-              <a:t>Перспективы развития и улучшения</a:t>
-            </a:r>
-          </a:p>
-        </p:txBody>
-      </p:sp>
-      <p:sp>
-        <p:nvSpPr>
-          <p:cNvPr id="3" name="Объект 2"/>
-          <p:cNvSpPr>
-            <a:spLocks noGrp="1"/>
-          </p:cNvSpPr>
-          <p:nvPr>
-            <p:ph sz="half" idx="1"/>
-          </p:nvPr>
-        </p:nvSpPr>
-        <p:spPr/>
-        <p:txBody>
-          <a:bodyPr>
-            <a:normAutofit lnSpcReduction="10000"/>
-          </a:bodyPr>
-          <a:lstStyle/>
-          <a:p>
-            <a:r>
-              <a:rPr lang="ru-RU" dirty="0"/>
-              <a:t>Интеграция дополнительных моделей и источников данных.</a:t>
-            </a:r>
-          </a:p>
-          <a:p>
-            <a:r>
-              <a:rPr lang="ru-RU" dirty="0"/>
-              <a:t>Автоматизация серии анализов и сценариев мониторинга изменений.</a:t>
-            </a:r>
-          </a:p>
-          <a:p>
-            <a:r>
-              <a:rPr lang="ru-RU" dirty="0"/>
-              <a:t>Расширение ролей пользователей и административных функций.</a:t>
-            </a:r>
-          </a:p>
-          <a:p>
-            <a:endParaRPr lang="ru-RU" dirty="0"/>
-          </a:p>
-        </p:txBody>
-      </p:sp>
-      <p:sp>
-        <p:nvSpPr>
-          <p:cNvPr id="4" name="Объект 3"/>
-          <p:cNvSpPr>
-            <a:spLocks noGrp="1"/>
-          </p:cNvSpPr>
-          <p:nvPr>
-            <p:ph sz="half" idx="2"/>
-          </p:nvPr>
-        </p:nvSpPr>
-        <p:spPr/>
-        <p:txBody>
-          <a:bodyPr>
-            <a:normAutofit lnSpcReduction="10000"/>
-          </a:bodyPr>
-          <a:lstStyle/>
-          <a:p>
-            <a:r>
-              <a:rPr lang="ru-RU" b="1" dirty="0"/>
-              <a:t>Следующий этап</a:t>
-            </a:r>
-          </a:p>
-          <a:p>
-            <a:r>
-              <a:rPr lang="ru-RU" dirty="0"/>
-              <a:t>Переход от прототипа к MVP: промышленный </a:t>
-            </a:r>
-            <a:r>
-              <a:rPr lang="ru-RU" dirty="0" err="1"/>
-              <a:t>backend</a:t>
-            </a:r>
-            <a:r>
-              <a:rPr lang="ru-RU" dirty="0"/>
-              <a:t>, полноценная загрузка сцен, расширенное сравнение с эталонными продуктами и модуль отчётности.</a:t>
-            </a:r>
-          </a:p>
-          <a:p>
-            <a:endParaRPr lang="ru-RU" dirty="0"/>
-          </a:p>
-        </p:txBody>
-      </p:sp>
-    </p:spTree>
-    <p:extLst>
-      <p:ext uri="{BB962C8B-B14F-4D97-AF65-F5344CB8AC3E}">
-        <p14:creationId xmlns:p14="http://schemas.microsoft.com/office/powerpoint/2010/main" val="984527577"/>
-      </p:ext>
-    </p:extLst>
-  </p:cSld>
-  <p:clrMapOvr>
-    <a:masterClrMapping/>
-  </p:clrMapOvr>
 </p:sld>
 </file>
 

--- a/Работа_10_Этоговая преза УПИС.pptx
+++ b/Работа_10_Этоговая преза УПИС.pptx
@@ -16,23 +16,25 @@
     <p:sldId id="271" r:id="rId10"/>
     <p:sldId id="272" r:id="rId11"/>
     <p:sldId id="279" r:id="rId12"/>
-    <p:sldId id="273" r:id="rId13"/>
-    <p:sldId id="278" r:id="rId14"/>
-    <p:sldId id="274" r:id="rId15"/>
-    <p:sldId id="275" r:id="rId16"/>
-    <p:sldId id="276" r:id="rId17"/>
-    <p:sldId id="277" r:id="rId18"/>
-    <p:sldId id="260" r:id="rId19"/>
+    <p:sldId id="280" r:id="rId13"/>
+    <p:sldId id="273" r:id="rId14"/>
+    <p:sldId id="281" r:id="rId15"/>
+    <p:sldId id="278" r:id="rId16"/>
+    <p:sldId id="274" r:id="rId17"/>
+    <p:sldId id="275" r:id="rId18"/>
+    <p:sldId id="276" r:id="rId19"/>
+    <p:sldId id="277" r:id="rId20"/>
+    <p:sldId id="260" r:id="rId21"/>
   </p:sldIdLst>
   <p:sldSz cx="12192000" cy="6858000"/>
   <p:notesSz cx="6858000" cy="9144000"/>
   <p:embeddedFontLst>
     <p:embeddedFont>
       <p:font typeface="Montserrat"/>
-      <p:regular r:id="rId20"/>
-      <p:bold r:id="rId21"/>
-      <p:italic r:id="rId22"/>
-      <p:boldItalic r:id="rId23"/>
+      <p:regular r:id="rId22"/>
+      <p:bold r:id="rId23"/>
+      <p:italic r:id="rId24"/>
+      <p:boldItalic r:id="rId25"/>
     </p:embeddedFont>
   </p:embeddedFontLst>
   <p:defaultTextStyle>
@@ -178,7 +180,7 @@
           <a:p>
             <a:fld id="{2DB472F0-34D4-4635-92C6-3A38628EF8C8}" type="datetimeFigureOut">
               <a:rPr lang="ru-RU" smtClean="0"/>
-              <a:t>26.05.2026</a:t>
+              <a:t>01.06.2026</a:t>
             </a:fld>
             <a:endParaRPr lang="ru-RU"/>
           </a:p>
@@ -404,7 +406,7 @@
           <a:p>
             <a:fld id="{2DB472F0-34D4-4635-92C6-3A38628EF8C8}" type="datetimeFigureOut">
               <a:rPr lang="ru-RU" smtClean="0"/>
-              <a:t>26.05.2026</a:t>
+              <a:t>01.06.2026</a:t>
             </a:fld>
             <a:endParaRPr lang="ru-RU"/>
           </a:p>
@@ -725,7 +727,7 @@
           <a:p>
             <a:fld id="{2DB472F0-34D4-4635-92C6-3A38628EF8C8}" type="datetimeFigureOut">
               <a:rPr lang="ru-RU" smtClean="0"/>
-              <a:t>26.05.2026</a:t>
+              <a:t>01.06.2026</a:t>
             </a:fld>
             <a:endParaRPr lang="ru-RU"/>
           </a:p>
@@ -1000,7 +1002,7 @@
           <a:p>
             <a:fld id="{2DB472F0-34D4-4635-92C6-3A38628EF8C8}" type="datetimeFigureOut">
               <a:rPr lang="ru-RU" smtClean="0"/>
-              <a:t>26.05.2026</a:t>
+              <a:t>01.06.2026</a:t>
             </a:fld>
             <a:endParaRPr lang="ru-RU"/>
           </a:p>
@@ -1274,7 +1276,7 @@
           <a:p>
             <a:fld id="{2DB472F0-34D4-4635-92C6-3A38628EF8C8}" type="datetimeFigureOut">
               <a:rPr lang="ru-RU" smtClean="0"/>
-              <a:t>26.05.2026</a:t>
+              <a:t>01.06.2026</a:t>
             </a:fld>
             <a:endParaRPr lang="ru-RU"/>
           </a:p>
@@ -1690,7 +1692,7 @@
           <a:p>
             <a:fld id="{2DB472F0-34D4-4635-92C6-3A38628EF8C8}" type="datetimeFigureOut">
               <a:rPr lang="ru-RU" smtClean="0"/>
-              <a:t>26.05.2026</a:t>
+              <a:t>01.06.2026</a:t>
             </a:fld>
             <a:endParaRPr lang="ru-RU"/>
           </a:p>
@@ -1840,7 +1842,7 @@
           <a:p>
             <a:fld id="{2DB472F0-34D4-4635-92C6-3A38628EF8C8}" type="datetimeFigureOut">
               <a:rPr lang="ru-RU" smtClean="0"/>
-              <a:t>26.05.2026</a:t>
+              <a:t>01.06.2026</a:t>
             </a:fld>
             <a:endParaRPr lang="ru-RU"/>
           </a:p>
@@ -1953,7 +1955,7 @@
           <a:p>
             <a:fld id="{2DB472F0-34D4-4635-92C6-3A38628EF8C8}" type="datetimeFigureOut">
               <a:rPr lang="ru-RU" smtClean="0"/>
-              <a:t>26.05.2026</a:t>
+              <a:t>01.06.2026</a:t>
             </a:fld>
             <a:endParaRPr lang="ru-RU"/>
           </a:p>
@@ -2264,7 +2266,7 @@
           <a:p>
             <a:fld id="{2DB472F0-34D4-4635-92C6-3A38628EF8C8}" type="datetimeFigureOut">
               <a:rPr lang="ru-RU" smtClean="0"/>
-              <a:t>26.05.2026</a:t>
+              <a:t>01.06.2026</a:t>
             </a:fld>
             <a:endParaRPr lang="ru-RU"/>
           </a:p>
@@ -2552,7 +2554,7 @@
           <a:p>
             <a:fld id="{2DB472F0-34D4-4635-92C6-3A38628EF8C8}" type="datetimeFigureOut">
               <a:rPr lang="ru-RU" smtClean="0"/>
-              <a:t>26.05.2026</a:t>
+              <a:t>01.06.2026</a:t>
             </a:fld>
             <a:endParaRPr lang="ru-RU"/>
           </a:p>
@@ -2665,7 +2667,7 @@
           <a:p>
             <a:fld id="{2DB472F0-34D4-4635-92C6-3A38628EF8C8}" type="datetimeFigureOut">
               <a:rPr lang="ru-RU" smtClean="0"/>
-              <a:t>26.05.2026</a:t>
+              <a:t>01.06.2026</a:t>
             </a:fld>
             <a:endParaRPr lang="ru-RU"/>
           </a:p>
@@ -2986,7 +2988,7 @@
           <a:p>
             <a:fld id="{2DB472F0-34D4-4635-92C6-3A38628EF8C8}" type="datetimeFigureOut">
               <a:rPr lang="ru-RU" smtClean="0"/>
-              <a:t>26.05.2026</a:t>
+              <a:t>01.06.2026</a:t>
             </a:fld>
             <a:endParaRPr lang="ru-RU"/>
           </a:p>
@@ -3194,7 +3196,7 @@
           <a:p>
             <a:fld id="{2DB472F0-34D4-4635-92C6-3A38628EF8C8}" type="datetimeFigureOut">
               <a:rPr lang="ru-RU" smtClean="0"/>
-              <a:t>26.05.2026</a:t>
+              <a:t>01.06.2026</a:t>
             </a:fld>
             <a:endParaRPr lang="ru-RU"/>
           </a:p>
@@ -3469,7 +3471,7 @@
           <a:p>
             <a:fld id="{2DB472F0-34D4-4635-92C6-3A38628EF8C8}" type="datetimeFigureOut">
               <a:rPr lang="ru-RU" smtClean="0"/>
-              <a:t>26.05.2026</a:t>
+              <a:t>01.06.2026</a:t>
             </a:fld>
             <a:endParaRPr lang="ru-RU"/>
           </a:p>
@@ -3743,7 +3745,7 @@
           <a:p>
             <a:fld id="{2DB472F0-34D4-4635-92C6-3A38628EF8C8}" type="datetimeFigureOut">
               <a:rPr lang="ru-RU" smtClean="0"/>
-              <a:t>26.05.2026</a:t>
+              <a:t>01.06.2026</a:t>
             </a:fld>
             <a:endParaRPr lang="ru-RU"/>
           </a:p>
@@ -4159,7 +4161,7 @@
           <a:p>
             <a:fld id="{2DB472F0-34D4-4635-92C6-3A38628EF8C8}" type="datetimeFigureOut">
               <a:rPr lang="ru-RU" smtClean="0"/>
-              <a:t>26.05.2026</a:t>
+              <a:t>01.06.2026</a:t>
             </a:fld>
             <a:endParaRPr lang="ru-RU"/>
           </a:p>
@@ -4309,7 +4311,7 @@
           <a:p>
             <a:fld id="{2DB472F0-34D4-4635-92C6-3A38628EF8C8}" type="datetimeFigureOut">
               <a:rPr lang="ru-RU" smtClean="0"/>
-              <a:t>26.05.2026</a:t>
+              <a:t>01.06.2026</a:t>
             </a:fld>
             <a:endParaRPr lang="ru-RU"/>
           </a:p>
@@ -4422,7 +4424,7 @@
           <a:p>
             <a:fld id="{2DB472F0-34D4-4635-92C6-3A38628EF8C8}" type="datetimeFigureOut">
               <a:rPr lang="ru-RU" smtClean="0"/>
-              <a:t>26.05.2026</a:t>
+              <a:t>01.06.2026</a:t>
             </a:fld>
             <a:endParaRPr lang="ru-RU"/>
           </a:p>
@@ -4733,7 +4735,7 @@
           <a:p>
             <a:fld id="{2DB472F0-34D4-4635-92C6-3A38628EF8C8}" type="datetimeFigureOut">
               <a:rPr lang="ru-RU" smtClean="0"/>
-              <a:t>26.05.2026</a:t>
+              <a:t>01.06.2026</a:t>
             </a:fld>
             <a:endParaRPr lang="ru-RU"/>
           </a:p>
@@ -5021,7 +5023,7 @@
           <a:p>
             <a:fld id="{2DB472F0-34D4-4635-92C6-3A38628EF8C8}" type="datetimeFigureOut">
               <a:rPr lang="ru-RU" smtClean="0"/>
-              <a:t>26.05.2026</a:t>
+              <a:t>01.06.2026</a:t>
             </a:fld>
             <a:endParaRPr lang="ru-RU"/>
           </a:p>
@@ -5148,7 +5150,7 @@
           <a:p>
             <a:fld id="{2DB472F0-34D4-4635-92C6-3A38628EF8C8}" type="datetimeFigureOut">
               <a:rPr lang="ru-RU" smtClean="0"/>
-              <a:t>26.05.2026</a:t>
+              <a:t>01.06.2026</a:t>
             </a:fld>
             <a:endParaRPr lang="ru-RU"/>
           </a:p>
@@ -5483,7 +5485,7 @@
           <a:p>
             <a:fld id="{2DB472F0-34D4-4635-92C6-3A38628EF8C8}" type="datetimeFigureOut">
               <a:rPr lang="ru-RU" smtClean="0"/>
-              <a:t>26.05.2026</a:t>
+              <a:t>01.06.2026</a:t>
             </a:fld>
             <a:endParaRPr lang="ru-RU"/>
           </a:p>
@@ -5758,7 +5760,7 @@
           <a:p>
             <a:fld id="{2DB472F0-34D4-4635-92C6-3A38628EF8C8}" type="datetimeFigureOut">
               <a:rPr lang="ru-RU" smtClean="0"/>
-              <a:t>26.05.2026</a:t>
+              <a:t>01.06.2026</a:t>
             </a:fld>
             <a:endParaRPr lang="ru-RU"/>
           </a:p>
@@ -6047,7 +6049,7 @@
           <a:p>
             <a:fld id="{2DB472F0-34D4-4635-92C6-3A38628EF8C8}" type="datetimeFigureOut">
               <a:rPr lang="ru-RU" smtClean="0"/>
-              <a:t>26.05.2026</a:t>
+              <a:t>01.06.2026</a:t>
             </a:fld>
             <a:endParaRPr lang="ru-RU"/>
           </a:p>
@@ -6335,7 +6337,7 @@
           <a:p>
             <a:fld id="{2DB472F0-34D4-4635-92C6-3A38628EF8C8}" type="datetimeFigureOut">
               <a:rPr lang="ru-RU" smtClean="0"/>
-              <a:t>26.05.2026</a:t>
+              <a:t>01.06.2026</a:t>
             </a:fld>
             <a:endParaRPr lang="ru-RU"/>
           </a:p>
@@ -6765,7 +6767,7 @@
           <a:p>
             <a:fld id="{2DB472F0-34D4-4635-92C6-3A38628EF8C8}" type="datetimeFigureOut">
               <a:rPr lang="ru-RU" smtClean="0"/>
-              <a:t>26.05.2026</a:t>
+              <a:t>01.06.2026</a:t>
             </a:fld>
             <a:endParaRPr lang="ru-RU"/>
           </a:p>
@@ -6929,7 +6931,7 @@
           <a:p>
             <a:fld id="{2DB472F0-34D4-4635-92C6-3A38628EF8C8}" type="datetimeFigureOut">
               <a:rPr lang="ru-RU" smtClean="0"/>
-              <a:t>26.05.2026</a:t>
+              <a:t>01.06.2026</a:t>
             </a:fld>
             <a:endParaRPr lang="ru-RU"/>
           </a:p>
@@ -7056,7 +7058,7 @@
           <a:p>
             <a:fld id="{2DB472F0-34D4-4635-92C6-3A38628EF8C8}" type="datetimeFigureOut">
               <a:rPr lang="ru-RU" smtClean="0"/>
-              <a:t>26.05.2026</a:t>
+              <a:t>01.06.2026</a:t>
             </a:fld>
             <a:endParaRPr lang="ru-RU"/>
           </a:p>
@@ -7381,7 +7383,7 @@
           <a:p>
             <a:fld id="{2DB472F0-34D4-4635-92C6-3A38628EF8C8}" type="datetimeFigureOut">
               <a:rPr lang="ru-RU" smtClean="0"/>
-              <a:t>26.05.2026</a:t>
+              <a:t>01.06.2026</a:t>
             </a:fld>
             <a:endParaRPr lang="ru-RU"/>
           </a:p>
@@ -7683,7 +7685,7 @@
           <a:p>
             <a:fld id="{2DB472F0-34D4-4635-92C6-3A38628EF8C8}" type="datetimeFigureOut">
               <a:rPr lang="ru-RU" smtClean="0"/>
-              <a:t>26.05.2026</a:t>
+              <a:t>01.06.2026</a:t>
             </a:fld>
             <a:endParaRPr lang="ru-RU"/>
           </a:p>
@@ -7810,7 +7812,7 @@
           <a:p>
             <a:fld id="{2DB472F0-34D4-4635-92C6-3A38628EF8C8}" type="datetimeFigureOut">
               <a:rPr lang="ru-RU" smtClean="0"/>
-              <a:t>26.05.2026</a:t>
+              <a:t>01.06.2026</a:t>
             </a:fld>
             <a:endParaRPr lang="ru-RU"/>
           </a:p>
@@ -8145,7 +8147,7 @@
           <a:p>
             <a:fld id="{2DB472F0-34D4-4635-92C6-3A38628EF8C8}" type="datetimeFigureOut">
               <a:rPr lang="ru-RU" smtClean="0"/>
-              <a:t>26.05.2026</a:t>
+              <a:t>01.06.2026</a:t>
             </a:fld>
             <a:endParaRPr lang="ru-RU"/>
           </a:p>
@@ -8434,7 +8436,7 @@
           <a:p>
             <a:fld id="{2DB472F0-34D4-4635-92C6-3A38628EF8C8}" type="datetimeFigureOut">
               <a:rPr lang="ru-RU" smtClean="0"/>
-              <a:t>26.05.2026</a:t>
+              <a:t>01.06.2026</a:t>
             </a:fld>
             <a:endParaRPr lang="ru-RU"/>
           </a:p>
@@ -8708,7 +8710,7 @@
           <a:p>
             <a:fld id="{2DB472F0-34D4-4635-92C6-3A38628EF8C8}" type="datetimeFigureOut">
               <a:rPr lang="ru-RU" smtClean="0"/>
-              <a:t>26.05.2026</a:t>
+              <a:t>01.06.2026</a:t>
             </a:fld>
             <a:endParaRPr lang="ru-RU"/>
           </a:p>
@@ -8996,7 +8998,7 @@
           <a:p>
             <a:fld id="{2DB472F0-34D4-4635-92C6-3A38628EF8C8}" type="datetimeFigureOut">
               <a:rPr lang="ru-RU" smtClean="0"/>
-              <a:t>26.05.2026</a:t>
+              <a:t>01.06.2026</a:t>
             </a:fld>
             <a:endParaRPr lang="ru-RU"/>
           </a:p>
@@ -9426,7 +9428,7 @@
           <a:p>
             <a:fld id="{2DB472F0-34D4-4635-92C6-3A38628EF8C8}" type="datetimeFigureOut">
               <a:rPr lang="ru-RU" smtClean="0"/>
-              <a:t>26.05.2026</a:t>
+              <a:t>01.06.2026</a:t>
             </a:fld>
             <a:endParaRPr lang="ru-RU"/>
           </a:p>
@@ -9590,7 +9592,7 @@
           <a:p>
             <a:fld id="{2DB472F0-34D4-4635-92C6-3A38628EF8C8}" type="datetimeFigureOut">
               <a:rPr lang="ru-RU" smtClean="0"/>
-              <a:t>26.05.2026</a:t>
+              <a:t>01.06.2026</a:t>
             </a:fld>
             <a:endParaRPr lang="ru-RU"/>
           </a:p>
@@ -9717,7 +9719,7 @@
           <a:p>
             <a:fld id="{2DB472F0-34D4-4635-92C6-3A38628EF8C8}" type="datetimeFigureOut">
               <a:rPr lang="ru-RU" smtClean="0"/>
-              <a:t>26.05.2026</a:t>
+              <a:t>01.06.2026</a:t>
             </a:fld>
             <a:endParaRPr lang="ru-RU"/>
           </a:p>
@@ -10042,7 +10044,7 @@
           <a:p>
             <a:fld id="{2DB472F0-34D4-4635-92C6-3A38628EF8C8}" type="datetimeFigureOut">
               <a:rPr lang="ru-RU" smtClean="0"/>
-              <a:t>26.05.2026</a:t>
+              <a:t>01.06.2026</a:t>
             </a:fld>
             <a:endParaRPr lang="ru-RU"/>
           </a:p>
@@ -10344,7 +10346,7 @@
           <a:p>
             <a:fld id="{2DB472F0-34D4-4635-92C6-3A38628EF8C8}" type="datetimeFigureOut">
               <a:rPr lang="ru-RU" smtClean="0"/>
-              <a:t>26.05.2026</a:t>
+              <a:t>01.06.2026</a:t>
             </a:fld>
             <a:endParaRPr lang="ru-RU"/>
           </a:p>
@@ -10495,7 +10497,7 @@
             <a:fld id="{2DB472F0-34D4-4635-92C6-3A38628EF8C8}" type="datetimeFigureOut">
               <a:rPr lang="ru-RU" smtClean="0"/>
               <a:pPr/>
-              <a:t>26.05.2026</a:t>
+              <a:t>01.06.2026</a:t>
             </a:fld>
             <a:endParaRPr lang="ru-RU" dirty="0"/>
           </a:p>
@@ -10791,7 +10793,7 @@
           <a:p>
             <a:fld id="{2DB472F0-34D4-4635-92C6-3A38628EF8C8}" type="datetimeFigureOut">
               <a:rPr lang="ru-RU" smtClean="0"/>
-              <a:t>26.05.2026</a:t>
+              <a:t>01.06.2026</a:t>
             </a:fld>
             <a:endParaRPr lang="ru-RU"/>
           </a:p>
@@ -11003,7 +11005,7 @@
           <a:p>
             <a:fld id="{2DB472F0-34D4-4635-92C6-3A38628EF8C8}" type="datetimeFigureOut">
               <a:rPr lang="ru-RU" smtClean="0"/>
-              <a:t>26.05.2026</a:t>
+              <a:t>01.06.2026</a:t>
             </a:fld>
             <a:endParaRPr lang="ru-RU"/>
           </a:p>
@@ -11278,7 +11280,7 @@
           <a:p>
             <a:fld id="{2DB472F0-34D4-4635-92C6-3A38628EF8C8}" type="datetimeFigureOut">
               <a:rPr lang="ru-RU" smtClean="0"/>
-              <a:t>26.05.2026</a:t>
+              <a:t>01.06.2026</a:t>
             </a:fld>
             <a:endParaRPr lang="ru-RU"/>
           </a:p>
@@ -11694,7 +11696,7 @@
           <a:p>
             <a:fld id="{2DB472F0-34D4-4635-92C6-3A38628EF8C8}" type="datetimeFigureOut">
               <a:rPr lang="ru-RU" smtClean="0"/>
-              <a:t>26.05.2026</a:t>
+              <a:t>01.06.2026</a:t>
             </a:fld>
             <a:endParaRPr lang="ru-RU"/>
           </a:p>
@@ -11968,7 +11970,7 @@
           <a:p>
             <a:fld id="{2DB472F0-34D4-4635-92C6-3A38628EF8C8}" type="datetimeFigureOut">
               <a:rPr lang="ru-RU" smtClean="0"/>
-              <a:t>26.05.2026</a:t>
+              <a:t>01.06.2026</a:t>
             </a:fld>
             <a:endParaRPr lang="ru-RU"/>
           </a:p>
@@ -12384,7 +12386,7 @@
           <a:p>
             <a:fld id="{2DB472F0-34D4-4635-92C6-3A38628EF8C8}" type="datetimeFigureOut">
               <a:rPr lang="ru-RU" smtClean="0"/>
-              <a:t>26.05.2026</a:t>
+              <a:t>01.06.2026</a:t>
             </a:fld>
             <a:endParaRPr lang="ru-RU"/>
           </a:p>
@@ -12534,7 +12536,7 @@
           <a:p>
             <a:fld id="{2DB472F0-34D4-4635-92C6-3A38628EF8C8}" type="datetimeFigureOut">
               <a:rPr lang="ru-RU" smtClean="0"/>
-              <a:t>26.05.2026</a:t>
+              <a:t>01.06.2026</a:t>
             </a:fld>
             <a:endParaRPr lang="ru-RU"/>
           </a:p>
@@ -12647,7 +12649,7 @@
           <a:p>
             <a:fld id="{2DB472F0-34D4-4635-92C6-3A38628EF8C8}" type="datetimeFigureOut">
               <a:rPr lang="ru-RU" smtClean="0"/>
-              <a:t>26.05.2026</a:t>
+              <a:t>01.06.2026</a:t>
             </a:fld>
             <a:endParaRPr lang="ru-RU"/>
           </a:p>
@@ -12958,7 +12960,7 @@
           <a:p>
             <a:fld id="{2DB472F0-34D4-4635-92C6-3A38628EF8C8}" type="datetimeFigureOut">
               <a:rPr lang="ru-RU" smtClean="0"/>
-              <a:t>26.05.2026</a:t>
+              <a:t>01.06.2026</a:t>
             </a:fld>
             <a:endParaRPr lang="ru-RU"/>
           </a:p>
@@ -13246,7 +13248,7 @@
           <a:p>
             <a:fld id="{2DB472F0-34D4-4635-92C6-3A38628EF8C8}" type="datetimeFigureOut">
               <a:rPr lang="ru-RU" smtClean="0"/>
-              <a:t>26.05.2026</a:t>
+              <a:t>01.06.2026</a:t>
             </a:fld>
             <a:endParaRPr lang="ru-RU"/>
           </a:p>
@@ -13396,7 +13398,7 @@
           <a:p>
             <a:fld id="{2DB472F0-34D4-4635-92C6-3A38628EF8C8}" type="datetimeFigureOut">
               <a:rPr lang="ru-RU" smtClean="0"/>
-              <a:t>26.05.2026</a:t>
+              <a:t>01.06.2026</a:t>
             </a:fld>
             <a:endParaRPr lang="ru-RU"/>
           </a:p>
@@ -13509,7 +13511,7 @@
           <a:p>
             <a:fld id="{2DB472F0-34D4-4635-92C6-3A38628EF8C8}" type="datetimeFigureOut">
               <a:rPr lang="ru-RU" smtClean="0"/>
-              <a:t>26.05.2026</a:t>
+              <a:t>01.06.2026</a:t>
             </a:fld>
             <a:endParaRPr lang="ru-RU"/>
           </a:p>
@@ -13820,7 +13822,7 @@
           <a:p>
             <a:fld id="{2DB472F0-34D4-4635-92C6-3A38628EF8C8}" type="datetimeFigureOut">
               <a:rPr lang="ru-RU" smtClean="0"/>
-              <a:t>26.05.2026</a:t>
+              <a:t>01.06.2026</a:t>
             </a:fld>
             <a:endParaRPr lang="ru-RU"/>
           </a:p>
@@ -14108,7 +14110,7 @@
           <a:p>
             <a:fld id="{2DB472F0-34D4-4635-92C6-3A38628EF8C8}" type="datetimeFigureOut">
               <a:rPr lang="ru-RU" smtClean="0"/>
-              <a:t>26.05.2026</a:t>
+              <a:t>01.06.2026</a:t>
             </a:fld>
             <a:endParaRPr lang="ru-RU"/>
           </a:p>
@@ -14360,7 +14362,7 @@
             <a:fld id="{2DB472F0-34D4-4635-92C6-3A38628EF8C8}" type="datetimeFigureOut">
               <a:rPr lang="ru-RU" smtClean="0"/>
               <a:pPr/>
-              <a:t>26.05.2026</a:t>
+              <a:t>01.06.2026</a:t>
             </a:fld>
             <a:endParaRPr lang="ru-RU" dirty="0"/>
           </a:p>
@@ -14974,7 +14976,7 @@
             <a:fld id="{2DB472F0-34D4-4635-92C6-3A38628EF8C8}" type="datetimeFigureOut">
               <a:rPr lang="ru-RU" smtClean="0"/>
               <a:pPr/>
-              <a:t>26.05.2026</a:t>
+              <a:t>01.06.2026</a:t>
             </a:fld>
             <a:endParaRPr lang="ru-RU" dirty="0"/>
           </a:p>
@@ -15588,7 +15590,7 @@
             <a:fld id="{2DB472F0-34D4-4635-92C6-3A38628EF8C8}" type="datetimeFigureOut">
               <a:rPr lang="ru-RU" smtClean="0"/>
               <a:pPr/>
-              <a:t>26.05.2026</a:t>
+              <a:t>01.06.2026</a:t>
             </a:fld>
             <a:endParaRPr lang="ru-RU" dirty="0"/>
           </a:p>
@@ -16202,7 +16204,7 @@
             <a:fld id="{2DB472F0-34D4-4635-92C6-3A38628EF8C8}" type="datetimeFigureOut">
               <a:rPr lang="ru-RU" smtClean="0"/>
               <a:pPr/>
-              <a:t>26.05.2026</a:t>
+              <a:t>01.06.2026</a:t>
             </a:fld>
             <a:endParaRPr lang="ru-RU" dirty="0"/>
           </a:p>
@@ -16818,7 +16820,7 @@
             <a:fld id="{2DB472F0-34D4-4635-92C6-3A38628EF8C8}" type="datetimeFigureOut">
               <a:rPr lang="ru-RU" smtClean="0"/>
               <a:pPr/>
-              <a:t>26.05.2026</a:t>
+              <a:t>01.06.2026</a:t>
             </a:fld>
             <a:endParaRPr lang="ru-RU" dirty="0"/>
           </a:p>
@@ -17468,7 +17470,7 @@
             <a:fld id="{2DB472F0-34D4-4635-92C6-3A38628EF8C8}" type="datetimeFigureOut">
               <a:rPr lang="ru-RU" smtClean="0"/>
               <a:pPr/>
-              <a:t>26.05.2026</a:t>
+              <a:t>01.06.2026</a:t>
             </a:fld>
             <a:endParaRPr lang="ru-RU" dirty="0"/>
           </a:p>
@@ -17990,7 +17992,7 @@
       </p:grpSpPr>
       <p:sp>
         <p:nvSpPr>
-          <p:cNvPr id="5" name="Заголовок 4"/>
+          <p:cNvPr id="7" name="Заголовок 6"/>
           <p:cNvSpPr>
             <a:spLocks noGrp="1"/>
           </p:cNvSpPr>
@@ -18004,152 +18006,41 @@
           <a:lstStyle/>
           <a:p>
             <a:r>
-              <a:rPr lang="ru-RU" dirty="0"/>
-              <a:t>Результаты и анализ</a:t>
-            </a:r>
-          </a:p>
-        </p:txBody>
-      </p:sp>
-      <p:sp>
-        <p:nvSpPr>
-          <p:cNvPr id="6" name="Объект 5"/>
-          <p:cNvSpPr>
-            <a:spLocks noGrp="1"/>
-          </p:cNvSpPr>
-          <p:nvPr>
-            <p:ph sz="half" idx="1"/>
-          </p:nvPr>
-        </p:nvSpPr>
-        <p:spPr/>
-        <p:txBody>
-          <a:bodyPr>
-            <a:normAutofit fontScale="85000" lnSpcReduction="10000"/>
-          </a:bodyPr>
-          <a:lstStyle/>
-          <a:p>
-            <a:pPr marL="0" indent="0">
-              <a:buNone/>
-            </a:pPr>
-            <a:r>
-              <a:rPr lang="ru-RU" b="1" dirty="0"/>
-              <a:t>Достигнутые </a:t>
-            </a:r>
-            <a:r>
-              <a:rPr lang="ru-RU" b="1" dirty="0" smtClean="0"/>
-              <a:t>результаты:</a:t>
-            </a:r>
-            <a:endParaRPr lang="ru-RU" b="1" dirty="0"/>
-          </a:p>
-          <a:p>
-            <a:pPr>
-              <a:buFont typeface="Arial" panose="020B0604020202020204" pitchFamily="34" charset="0"/>
-              <a:buChar char="−"/>
-            </a:pPr>
-            <a:r>
-              <a:rPr lang="ru-RU" dirty="0"/>
-              <a:t>Сформированы требования SRS и логика пользовательских сценариев.</a:t>
-            </a:r>
-          </a:p>
-          <a:p>
-            <a:pPr>
-              <a:buFont typeface="Arial" panose="020B0604020202020204" pitchFamily="34" charset="0"/>
-              <a:buChar char="−"/>
-            </a:pPr>
-            <a:r>
-              <a:rPr lang="ru-RU" dirty="0"/>
-              <a:t>Спроектированы архитектура, API и реляционная база данных.</a:t>
-            </a:r>
-          </a:p>
-          <a:p>
-            <a:pPr>
-              <a:buFont typeface="Arial" panose="020B0604020202020204" pitchFamily="34" charset="0"/>
-              <a:buChar char="−"/>
-            </a:pPr>
-            <a:r>
-              <a:rPr lang="ru-RU" dirty="0"/>
-              <a:t>Разработан интерактивный прототип интерфейса платформы.</a:t>
-            </a:r>
-          </a:p>
-          <a:p>
-            <a:pPr>
-              <a:buFont typeface="Arial" panose="020B0604020202020204" pitchFamily="34" charset="0"/>
-              <a:buChar char="−"/>
-            </a:pPr>
-            <a:r>
-              <a:rPr lang="ru-RU" dirty="0"/>
-              <a:t>Определены метрики оценки: </a:t>
-            </a:r>
-            <a:r>
-              <a:rPr lang="ru-RU" dirty="0" err="1"/>
-              <a:t>Accuracy</a:t>
-            </a:r>
-            <a:r>
-              <a:rPr lang="ru-RU" dirty="0"/>
-              <a:t>, </a:t>
-            </a:r>
-            <a:r>
-              <a:rPr lang="ru-RU" dirty="0" err="1"/>
-              <a:t>Kappa</a:t>
-            </a:r>
-            <a:r>
-              <a:rPr lang="ru-RU" dirty="0"/>
-              <a:t>, </a:t>
-            </a:r>
-            <a:r>
-              <a:rPr lang="ru-RU" dirty="0" err="1"/>
-              <a:t>Mean</a:t>
-            </a:r>
-            <a:r>
-              <a:rPr lang="ru-RU" dirty="0"/>
-              <a:t> </a:t>
-            </a:r>
-            <a:r>
-              <a:rPr lang="ru-RU" dirty="0" err="1"/>
-              <a:t>IoU</a:t>
-            </a:r>
-            <a:r>
-              <a:rPr lang="ru-RU" dirty="0"/>
-              <a:t>.</a:t>
-            </a:r>
-          </a:p>
-          <a:p>
+              <a:rPr lang="ru-RU" dirty="0" smtClean="0"/>
+              <a:t>Сценарии использования</a:t>
+            </a:r>
             <a:endParaRPr lang="ru-RU" dirty="0"/>
           </a:p>
         </p:txBody>
       </p:sp>
       <p:pic>
         <p:nvPicPr>
-          <p:cNvPr id="8" name="Объект 7"/>
+          <p:cNvPr id="8" name="Рисунок 7"/>
           <p:cNvPicPr>
-            <a:picLocks noGrp="1" noChangeAspect="1"/>
+            <a:picLocks noChangeAspect="1"/>
           </p:cNvPicPr>
-          <p:nvPr>
-            <p:ph sz="half" idx="2"/>
-          </p:nvPr>
+          <p:nvPr/>
         </p:nvPicPr>
         <p:blipFill>
-          <a:blip r:embed="rId2">
-            <a:extLst>
-              <a:ext uri="{28A0092B-C50C-407E-A947-70E740481C1C}">
-                <a14:useLocalDpi xmlns:a14="http://schemas.microsoft.com/office/drawing/2010/main" val="0"/>
-              </a:ext>
-            </a:extLst>
-          </a:blip>
+          <a:blip r:embed="rId2"/>
           <a:stretch>
             <a:fillRect/>
           </a:stretch>
         </p:blipFill>
         <p:spPr>
           <a:xfrm>
-            <a:off x="6172200" y="2305049"/>
-            <a:ext cx="5181600" cy="3826041"/>
+            <a:off x="1060875" y="2044105"/>
+            <a:ext cx="10070250" cy="4396993"/>
           </a:xfrm>
+          <a:prstGeom prst="rect">
+            <a:avLst/>
+          </a:prstGeom>
         </p:spPr>
       </p:pic>
     </p:spTree>
     <p:extLst>
       <p:ext uri="{BB962C8B-B14F-4D97-AF65-F5344CB8AC3E}">
-        <p14:creationId xmlns:p14="http://schemas.microsoft.com/office/powerpoint/2010/main" val="2508543406"/>
+        <p14:creationId xmlns:p14="http://schemas.microsoft.com/office/powerpoint/2010/main" val="1986234477"/>
       </p:ext>
     </p:extLst>
   </p:cSld>
@@ -18178,7 +18069,7 @@
       </p:grpSpPr>
       <p:sp>
         <p:nvSpPr>
-          <p:cNvPr id="2" name="Заголовок 1"/>
+          <p:cNvPr id="4" name="Заголовок 3"/>
           <p:cNvSpPr>
             <a:spLocks noGrp="1"/>
           </p:cNvSpPr>
@@ -18186,187 +18077,144 @@
             <p:ph type="title"/>
           </p:nvPr>
         </p:nvSpPr>
-        <p:spPr/>
+        <p:spPr>
+          <a:xfrm>
+            <a:off x="988177" y="972588"/>
+            <a:ext cx="10890712" cy="539635"/>
+          </a:xfrm>
+        </p:spPr>
         <p:txBody>
           <a:bodyPr/>
           <a:lstStyle/>
           <a:p>
             <a:r>
               <a:rPr lang="ru-RU" dirty="0"/>
-              <a:t>Перспективы развития и улучшения</a:t>
-            </a:r>
-          </a:p>
-        </p:txBody>
-      </p:sp>
-      <p:sp>
-        <p:nvSpPr>
-          <p:cNvPr id="3" name="Объект 2"/>
-          <p:cNvSpPr>
-            <a:spLocks noGrp="1"/>
-          </p:cNvSpPr>
-          <p:nvPr>
-            <p:ph sz="half" idx="1"/>
-          </p:nvPr>
-        </p:nvSpPr>
-        <p:spPr/>
-        <p:txBody>
-          <a:bodyPr>
-            <a:normAutofit lnSpcReduction="10000"/>
-          </a:bodyPr>
-          <a:lstStyle/>
-          <a:p>
-            <a:pPr>
-              <a:buFont typeface="Arial" panose="020B0604020202020204" pitchFamily="34" charset="0"/>
-              <a:buChar char="−"/>
-            </a:pPr>
-            <a:r>
-              <a:rPr lang="ru-RU" dirty="0"/>
-              <a:t>Интеграция дополнительных моделей и источников данных.</a:t>
-            </a:r>
-          </a:p>
-          <a:p>
-            <a:pPr>
-              <a:buFont typeface="Arial" panose="020B0604020202020204" pitchFamily="34" charset="0"/>
-              <a:buChar char="−"/>
-            </a:pPr>
-            <a:r>
-              <a:rPr lang="ru-RU" dirty="0"/>
-              <a:t>Автоматизация серии анализов и сценариев мониторинга изменений.</a:t>
-            </a:r>
-          </a:p>
-          <a:p>
-            <a:pPr>
-              <a:buFont typeface="Arial" panose="020B0604020202020204" pitchFamily="34" charset="0"/>
-              <a:buChar char="−"/>
-            </a:pPr>
-            <a:r>
-              <a:rPr lang="ru-RU" dirty="0"/>
-              <a:t>Расширение ролей пользователей и административных функций.</a:t>
-            </a:r>
-          </a:p>
-          <a:p>
-            <a:endParaRPr lang="ru-RU" dirty="0"/>
-          </a:p>
-        </p:txBody>
-      </p:sp>
-      <p:sp>
-        <p:nvSpPr>
-          <p:cNvPr id="4" name="Объект 3"/>
-          <p:cNvSpPr>
-            <a:spLocks noGrp="1"/>
-          </p:cNvSpPr>
-          <p:nvPr>
-            <p:ph sz="half" idx="2"/>
-          </p:nvPr>
-        </p:nvSpPr>
-        <p:spPr/>
-        <p:txBody>
-          <a:bodyPr>
-            <a:normAutofit lnSpcReduction="10000"/>
-          </a:bodyPr>
-          <a:lstStyle/>
-          <a:p>
-            <a:pPr marL="0" indent="0">
-              <a:buNone/>
-            </a:pPr>
-            <a:r>
-              <a:rPr lang="ru-RU" b="1" dirty="0"/>
-              <a:t>Следующий этап</a:t>
-            </a:r>
-          </a:p>
-          <a:p>
-            <a:pPr marL="0" indent="0">
-              <a:buNone/>
-            </a:pPr>
-            <a:r>
-              <a:rPr lang="ru-RU" dirty="0" smtClean="0"/>
-              <a:t>Переход </a:t>
-            </a:r>
-            <a:r>
-              <a:rPr lang="ru-RU" dirty="0"/>
-              <a:t>от прототипа к MVP: </a:t>
-            </a:r>
-            <a:endParaRPr lang="en-US" dirty="0" smtClean="0"/>
-          </a:p>
-          <a:p>
-            <a:pPr>
-              <a:buFont typeface="Arial" panose="020B0604020202020204" pitchFamily="34" charset="0"/>
-              <a:buChar char="−"/>
-            </a:pPr>
-            <a:r>
-              <a:rPr lang="ru-RU" dirty="0" smtClean="0"/>
-              <a:t>Промышленный </a:t>
-            </a:r>
-            <a:r>
-              <a:rPr lang="ru-RU" dirty="0" err="1" smtClean="0"/>
-              <a:t>backend</a:t>
-            </a:r>
-            <a:r>
-              <a:rPr lang="ru-RU" dirty="0"/>
-              <a:t>;</a:t>
-            </a:r>
-            <a:r>
-              <a:rPr lang="ru-RU" dirty="0" smtClean="0"/>
-              <a:t> </a:t>
-            </a:r>
-            <a:endParaRPr lang="en-US" dirty="0" smtClean="0"/>
-          </a:p>
-          <a:p>
-            <a:pPr>
-              <a:buFont typeface="Arial" panose="020B0604020202020204" pitchFamily="34" charset="0"/>
-              <a:buChar char="−"/>
-            </a:pPr>
-            <a:r>
-              <a:rPr lang="ru-RU" dirty="0"/>
-              <a:t>П</a:t>
-            </a:r>
-            <a:r>
-              <a:rPr lang="ru-RU" dirty="0" smtClean="0"/>
-              <a:t>олноценная </a:t>
-            </a:r>
-            <a:r>
-              <a:rPr lang="ru-RU" dirty="0"/>
-              <a:t>загрузка </a:t>
-            </a:r>
-            <a:r>
-              <a:rPr lang="ru-RU" dirty="0" smtClean="0"/>
-              <a:t>сцен; </a:t>
-            </a:r>
-            <a:endParaRPr lang="en-US" dirty="0" smtClean="0"/>
-          </a:p>
-          <a:p>
-            <a:pPr>
-              <a:buFont typeface="Arial" panose="020B0604020202020204" pitchFamily="34" charset="0"/>
-              <a:buChar char="−"/>
-            </a:pPr>
-            <a:r>
-              <a:rPr lang="ru-RU" dirty="0"/>
-              <a:t>Р</a:t>
-            </a:r>
-            <a:r>
-              <a:rPr lang="ru-RU" dirty="0" smtClean="0"/>
-              <a:t>асширенное </a:t>
-            </a:r>
-            <a:r>
-              <a:rPr lang="ru-RU" dirty="0"/>
-              <a:t>сравнение с эталонными продуктами и модуль отчётности.</a:t>
-            </a:r>
-          </a:p>
-          <a:p>
-            <a:endParaRPr lang="ru-RU" dirty="0"/>
-          </a:p>
-        </p:txBody>
-      </p:sp>
+              <a:t>Демонстрация работы и интерфейса</a:t>
+            </a:r>
+          </a:p>
+        </p:txBody>
+      </p:sp>
+      <p:pic>
+        <p:nvPicPr>
+          <p:cNvPr id="8" name="0512">
+            <a:hlinkClick r:id="" action="ppaction://media"/>
+          </p:cNvPr>
+          <p:cNvPicPr>
+            <a:picLocks noGrp="1" noChangeAspect="1"/>
+          </p:cNvPicPr>
+          <p:nvPr>
+            <p:ph idx="1"/>
+            <a:videoFile r:link="rId2"/>
+            <p:extLst>
+              <p:ext uri="{DAA4B4D4-6D71-4841-9C94-3DE7FCFB9230}">
+                <p14:media xmlns:p14="http://schemas.microsoft.com/office/powerpoint/2010/main" r:embed="rId1"/>
+              </p:ext>
+            </p:extLst>
+          </p:nvPr>
+        </p:nvPicPr>
+        <p:blipFill>
+          <a:blip r:embed="rId4"/>
+          <a:stretch>
+            <a:fillRect/>
+          </a:stretch>
+        </p:blipFill>
+        <p:spPr>
+          <a:xfrm>
+            <a:off x="1991101" y="1770639"/>
+            <a:ext cx="8233554" cy="4631373"/>
+          </a:xfrm>
+        </p:spPr>
+      </p:pic>
     </p:spTree>
     <p:extLst>
       <p:ext uri="{BB962C8B-B14F-4D97-AF65-F5344CB8AC3E}">
-        <p14:creationId xmlns:p14="http://schemas.microsoft.com/office/powerpoint/2010/main" val="984527577"/>
+        <p14:creationId xmlns:p14="http://schemas.microsoft.com/office/powerpoint/2010/main" val="1924369485"/>
       </p:ext>
     </p:extLst>
   </p:cSld>
   <p:clrMapOvr>
     <a:masterClrMapping/>
   </p:clrMapOvr>
+  <p:timing>
+    <p:tnLst>
+      <p:par>
+        <p:cTn id="1" dur="indefinite" restart="never" nodeType="tmRoot">
+          <p:childTnLst>
+            <p:seq concurrent="1" nextAc="seek">
+              <p:cTn id="2" restart="whenNotActive" fill="hold" evtFilter="cancelBubble" nodeType="interactiveSeq">
+                <p:stCondLst>
+                  <p:cond evt="onClick" delay="0">
+                    <p:tgtEl>
+                      <p:spTgt spid="8"/>
+                    </p:tgtEl>
+                  </p:cond>
+                </p:stCondLst>
+                <p:endSync evt="end" delay="0">
+                  <p:rtn val="all"/>
+                </p:endSync>
+                <p:childTnLst>
+                  <p:par>
+                    <p:cTn id="3" fill="hold">
+                      <p:stCondLst>
+                        <p:cond delay="0"/>
+                      </p:stCondLst>
+                      <p:childTnLst>
+                        <p:par>
+                          <p:cTn id="4" fill="hold">
+                            <p:stCondLst>
+                              <p:cond delay="0"/>
+                            </p:stCondLst>
+                            <p:childTnLst>
+                              <p:par>
+                                <p:cTn id="5" presetID="2" presetClass="mediacall" presetSubtype="0" fill="hold" nodeType="clickEffect">
+                                  <p:stCondLst>
+                                    <p:cond delay="0"/>
+                                  </p:stCondLst>
+                                  <p:childTnLst>
+                                    <p:cmd type="call" cmd="togglePause">
+                                      <p:cBhvr>
+                                        <p:cTn id="6" dur="1" fill="hold"/>
+                                        <p:tgtEl>
+                                          <p:spTgt spid="8"/>
+                                        </p:tgtEl>
+                                      </p:cBhvr>
+                                    </p:cmd>
+                                  </p:childTnLst>
+                                </p:cTn>
+                              </p:par>
+                            </p:childTnLst>
+                          </p:cTn>
+                        </p:par>
+                      </p:childTnLst>
+                    </p:cTn>
+                  </p:par>
+                </p:childTnLst>
+              </p:cTn>
+              <p:nextCondLst>
+                <p:cond evt="onClick" delay="0">
+                  <p:tgtEl>
+                    <p:spTgt spid="8"/>
+                  </p:tgtEl>
+                </p:cond>
+              </p:nextCondLst>
+            </p:seq>
+            <p:video>
+              <p:cMediaNode vol="80000">
+                <p:cTn id="7" fill="hold" display="0">
+                  <p:stCondLst>
+                    <p:cond delay="indefinite"/>
+                  </p:stCondLst>
+                </p:cTn>
+                <p:tgtEl>
+                  <p:spTgt spid="8"/>
+                </p:tgtEl>
+              </p:cMediaNode>
+            </p:video>
+          </p:childTnLst>
+        </p:cTn>
+      </p:par>
+    </p:tnLst>
+  </p:timing>
 </p:sld>
 </file>
 
@@ -18389,6 +18237,405 @@
       </p:grpSpPr>
       <p:sp>
         <p:nvSpPr>
+          <p:cNvPr id="5" name="Заголовок 4"/>
+          <p:cNvSpPr>
+            <a:spLocks noGrp="1"/>
+          </p:cNvSpPr>
+          <p:nvPr>
+            <p:ph type="title"/>
+          </p:nvPr>
+        </p:nvSpPr>
+        <p:spPr/>
+        <p:txBody>
+          <a:bodyPr/>
+          <a:lstStyle/>
+          <a:p>
+            <a:r>
+              <a:rPr lang="ru-RU" dirty="0"/>
+              <a:t>Результаты и анализ</a:t>
+            </a:r>
+          </a:p>
+        </p:txBody>
+      </p:sp>
+      <p:sp>
+        <p:nvSpPr>
+          <p:cNvPr id="6" name="Объект 5"/>
+          <p:cNvSpPr>
+            <a:spLocks noGrp="1"/>
+          </p:cNvSpPr>
+          <p:nvPr>
+            <p:ph sz="half" idx="1"/>
+          </p:nvPr>
+        </p:nvSpPr>
+        <p:spPr/>
+        <p:txBody>
+          <a:bodyPr>
+            <a:normAutofit fontScale="85000" lnSpcReduction="10000"/>
+          </a:bodyPr>
+          <a:lstStyle/>
+          <a:p>
+            <a:pPr marL="0" indent="0">
+              <a:buNone/>
+            </a:pPr>
+            <a:r>
+              <a:rPr lang="ru-RU" b="1" dirty="0"/>
+              <a:t>Достигнутые </a:t>
+            </a:r>
+            <a:r>
+              <a:rPr lang="ru-RU" b="1" dirty="0" smtClean="0"/>
+              <a:t>результаты:</a:t>
+            </a:r>
+            <a:endParaRPr lang="ru-RU" b="1" dirty="0"/>
+          </a:p>
+          <a:p>
+            <a:pPr>
+              <a:buFont typeface="Arial" panose="020B0604020202020204" pitchFamily="34" charset="0"/>
+              <a:buChar char="−"/>
+            </a:pPr>
+            <a:r>
+              <a:rPr lang="ru-RU" dirty="0"/>
+              <a:t>Сформированы требования SRS и логика пользовательских сценариев.</a:t>
+            </a:r>
+          </a:p>
+          <a:p>
+            <a:pPr>
+              <a:buFont typeface="Arial" panose="020B0604020202020204" pitchFamily="34" charset="0"/>
+              <a:buChar char="−"/>
+            </a:pPr>
+            <a:r>
+              <a:rPr lang="ru-RU" dirty="0"/>
+              <a:t>Спроектированы архитектура, API и реляционная база данных.</a:t>
+            </a:r>
+          </a:p>
+          <a:p>
+            <a:pPr>
+              <a:buFont typeface="Arial" panose="020B0604020202020204" pitchFamily="34" charset="0"/>
+              <a:buChar char="−"/>
+            </a:pPr>
+            <a:r>
+              <a:rPr lang="ru-RU" dirty="0"/>
+              <a:t>Разработан интерактивный прототип интерфейса платформы.</a:t>
+            </a:r>
+          </a:p>
+          <a:p>
+            <a:pPr>
+              <a:buFont typeface="Arial" panose="020B0604020202020204" pitchFamily="34" charset="0"/>
+              <a:buChar char="−"/>
+            </a:pPr>
+            <a:r>
+              <a:rPr lang="ru-RU" dirty="0"/>
+              <a:t>Определены метрики оценки: </a:t>
+            </a:r>
+            <a:r>
+              <a:rPr lang="ru-RU" dirty="0" err="1"/>
+              <a:t>Accuracy</a:t>
+            </a:r>
+            <a:r>
+              <a:rPr lang="ru-RU" dirty="0"/>
+              <a:t>, </a:t>
+            </a:r>
+            <a:r>
+              <a:rPr lang="ru-RU" dirty="0" err="1"/>
+              <a:t>Kappa</a:t>
+            </a:r>
+            <a:r>
+              <a:rPr lang="ru-RU" dirty="0"/>
+              <a:t>, </a:t>
+            </a:r>
+            <a:r>
+              <a:rPr lang="ru-RU" dirty="0" err="1"/>
+              <a:t>Mean</a:t>
+            </a:r>
+            <a:r>
+              <a:rPr lang="ru-RU" dirty="0"/>
+              <a:t> </a:t>
+            </a:r>
+            <a:r>
+              <a:rPr lang="ru-RU" dirty="0" err="1"/>
+              <a:t>IoU</a:t>
+            </a:r>
+            <a:r>
+              <a:rPr lang="ru-RU" dirty="0"/>
+              <a:t>.</a:t>
+            </a:r>
+          </a:p>
+          <a:p>
+            <a:endParaRPr lang="ru-RU" dirty="0"/>
+          </a:p>
+        </p:txBody>
+      </p:sp>
+      <p:pic>
+        <p:nvPicPr>
+          <p:cNvPr id="8" name="Объект 7"/>
+          <p:cNvPicPr>
+            <a:picLocks noGrp="1" noChangeAspect="1"/>
+          </p:cNvPicPr>
+          <p:nvPr>
+            <p:ph sz="half" idx="2"/>
+          </p:nvPr>
+        </p:nvPicPr>
+        <p:blipFill>
+          <a:blip r:embed="rId2">
+            <a:extLst>
+              <a:ext uri="{28A0092B-C50C-407E-A947-70E740481C1C}">
+                <a14:useLocalDpi xmlns:a14="http://schemas.microsoft.com/office/drawing/2010/main" val="0"/>
+              </a:ext>
+            </a:extLst>
+          </a:blip>
+          <a:stretch>
+            <a:fillRect/>
+          </a:stretch>
+        </p:blipFill>
+        <p:spPr>
+          <a:xfrm>
+            <a:off x="6172200" y="2305049"/>
+            <a:ext cx="5181600" cy="3826041"/>
+          </a:xfrm>
+        </p:spPr>
+      </p:pic>
+    </p:spTree>
+    <p:extLst>
+      <p:ext uri="{BB962C8B-B14F-4D97-AF65-F5344CB8AC3E}">
+        <p14:creationId xmlns:p14="http://schemas.microsoft.com/office/powerpoint/2010/main" val="2508543406"/>
+      </p:ext>
+    </p:extLst>
+  </p:cSld>
+  <p:clrMapOvr>
+    <a:masterClrMapping/>
+  </p:clrMapOvr>
+</p:sld>
+</file>
+
+<file path=ppt/slides/slide13.xml><?xml version="1.0" encoding="utf-8"?>
+<p:sld xmlns:a="http://schemas.openxmlformats.org/drawingml/2006/main" xmlns:r="http://schemas.openxmlformats.org/officeDocument/2006/relationships" xmlns:p="http://schemas.openxmlformats.org/presentationml/2006/main">
+  <p:cSld>
+    <p:spTree>
+      <p:nvGrpSpPr>
+        <p:cNvPr id="1" name=""/>
+        <p:cNvGrpSpPr/>
+        <p:nvPr/>
+      </p:nvGrpSpPr>
+      <p:grpSpPr>
+        <a:xfrm>
+          <a:off x="0" y="0"/>
+          <a:ext cx="0" cy="0"/>
+          <a:chOff x="0" y="0"/>
+          <a:chExt cx="0" cy="0"/>
+        </a:xfrm>
+      </p:grpSpPr>
+      <p:sp>
+        <p:nvSpPr>
+          <p:cNvPr id="2" name="Заголовок 1"/>
+          <p:cNvSpPr>
+            <a:spLocks noGrp="1"/>
+          </p:cNvSpPr>
+          <p:nvPr>
+            <p:ph type="title"/>
+          </p:nvPr>
+        </p:nvSpPr>
+        <p:spPr/>
+        <p:txBody>
+          <a:bodyPr/>
+          <a:lstStyle/>
+          <a:p>
+            <a:r>
+              <a:rPr lang="ru-RU" dirty="0"/>
+              <a:t>Перспективы развития и улучшения</a:t>
+            </a:r>
+          </a:p>
+        </p:txBody>
+      </p:sp>
+      <p:sp>
+        <p:nvSpPr>
+          <p:cNvPr id="3" name="Объект 2"/>
+          <p:cNvSpPr>
+            <a:spLocks noGrp="1"/>
+          </p:cNvSpPr>
+          <p:nvPr>
+            <p:ph sz="half" idx="1"/>
+          </p:nvPr>
+        </p:nvSpPr>
+        <p:spPr/>
+        <p:txBody>
+          <a:bodyPr>
+            <a:normAutofit lnSpcReduction="10000"/>
+          </a:bodyPr>
+          <a:lstStyle/>
+          <a:p>
+            <a:pPr>
+              <a:buFont typeface="Arial" panose="020B0604020202020204" pitchFamily="34" charset="0"/>
+              <a:buChar char="−"/>
+            </a:pPr>
+            <a:r>
+              <a:rPr lang="ru-RU" dirty="0"/>
+              <a:t>Интеграция дополнительных моделей и источников данных.</a:t>
+            </a:r>
+          </a:p>
+          <a:p>
+            <a:pPr>
+              <a:buFont typeface="Arial" panose="020B0604020202020204" pitchFamily="34" charset="0"/>
+              <a:buChar char="−"/>
+            </a:pPr>
+            <a:r>
+              <a:rPr lang="ru-RU" dirty="0"/>
+              <a:t>Автоматизация серии анализов и сценариев мониторинга изменений.</a:t>
+            </a:r>
+          </a:p>
+          <a:p>
+            <a:pPr>
+              <a:buFont typeface="Arial" panose="020B0604020202020204" pitchFamily="34" charset="0"/>
+              <a:buChar char="−"/>
+            </a:pPr>
+            <a:r>
+              <a:rPr lang="ru-RU" dirty="0"/>
+              <a:t>Расширение ролей пользователей и административных функций.</a:t>
+            </a:r>
+          </a:p>
+          <a:p>
+            <a:endParaRPr lang="ru-RU" dirty="0"/>
+          </a:p>
+        </p:txBody>
+      </p:sp>
+      <p:sp>
+        <p:nvSpPr>
+          <p:cNvPr id="4" name="Объект 3"/>
+          <p:cNvSpPr>
+            <a:spLocks noGrp="1"/>
+          </p:cNvSpPr>
+          <p:nvPr>
+            <p:ph sz="half" idx="2"/>
+          </p:nvPr>
+        </p:nvSpPr>
+        <p:spPr/>
+        <p:txBody>
+          <a:bodyPr>
+            <a:normAutofit lnSpcReduction="10000"/>
+          </a:bodyPr>
+          <a:lstStyle/>
+          <a:p>
+            <a:pPr marL="0" indent="0">
+              <a:buNone/>
+            </a:pPr>
+            <a:r>
+              <a:rPr lang="ru-RU" b="1" dirty="0"/>
+              <a:t>Следующий этап</a:t>
+            </a:r>
+          </a:p>
+          <a:p>
+            <a:pPr marL="0" indent="0">
+              <a:buNone/>
+            </a:pPr>
+            <a:r>
+              <a:rPr lang="ru-RU" dirty="0" smtClean="0"/>
+              <a:t>Переход </a:t>
+            </a:r>
+            <a:r>
+              <a:rPr lang="ru-RU" dirty="0"/>
+              <a:t>от прототипа к MVP: </a:t>
+            </a:r>
+            <a:endParaRPr lang="en-US" dirty="0" smtClean="0"/>
+          </a:p>
+          <a:p>
+            <a:pPr>
+              <a:buFont typeface="Arial" panose="020B0604020202020204" pitchFamily="34" charset="0"/>
+              <a:buChar char="−"/>
+            </a:pPr>
+            <a:r>
+              <a:rPr lang="ru-RU" dirty="0" smtClean="0"/>
+              <a:t>Промышленный </a:t>
+            </a:r>
+            <a:r>
+              <a:rPr lang="ru-RU" dirty="0" err="1" smtClean="0"/>
+              <a:t>backend</a:t>
+            </a:r>
+            <a:r>
+              <a:rPr lang="ru-RU" dirty="0"/>
+              <a:t>;</a:t>
+            </a:r>
+            <a:r>
+              <a:rPr lang="ru-RU" dirty="0" smtClean="0"/>
+              <a:t> </a:t>
+            </a:r>
+            <a:endParaRPr lang="en-US" dirty="0" smtClean="0"/>
+          </a:p>
+          <a:p>
+            <a:pPr>
+              <a:buFont typeface="Arial" panose="020B0604020202020204" pitchFamily="34" charset="0"/>
+              <a:buChar char="−"/>
+            </a:pPr>
+            <a:r>
+              <a:rPr lang="ru-RU" dirty="0"/>
+              <a:t>П</a:t>
+            </a:r>
+            <a:r>
+              <a:rPr lang="ru-RU" dirty="0" smtClean="0"/>
+              <a:t>олноценная </a:t>
+            </a:r>
+            <a:r>
+              <a:rPr lang="ru-RU" dirty="0"/>
+              <a:t>загрузка </a:t>
+            </a:r>
+            <a:r>
+              <a:rPr lang="ru-RU" dirty="0" smtClean="0"/>
+              <a:t>сцен; </a:t>
+            </a:r>
+            <a:endParaRPr lang="en-US" dirty="0" smtClean="0"/>
+          </a:p>
+          <a:p>
+            <a:pPr>
+              <a:buFont typeface="Arial" panose="020B0604020202020204" pitchFamily="34" charset="0"/>
+              <a:buChar char="−"/>
+            </a:pPr>
+            <a:r>
+              <a:rPr lang="ru-RU" dirty="0"/>
+              <a:t>Р</a:t>
+            </a:r>
+            <a:r>
+              <a:rPr lang="ru-RU" dirty="0" smtClean="0"/>
+              <a:t>асширенное </a:t>
+            </a:r>
+            <a:r>
+              <a:rPr lang="ru-RU" dirty="0"/>
+              <a:t>сравнение с эталонными продуктами и модуль отчётности.</a:t>
+            </a:r>
+          </a:p>
+          <a:p>
+            <a:endParaRPr lang="ru-RU" dirty="0"/>
+          </a:p>
+        </p:txBody>
+      </p:sp>
+    </p:spTree>
+    <p:extLst>
+      <p:ext uri="{BB962C8B-B14F-4D97-AF65-F5344CB8AC3E}">
+        <p14:creationId xmlns:p14="http://schemas.microsoft.com/office/powerpoint/2010/main" val="984527577"/>
+      </p:ext>
+    </p:extLst>
+  </p:cSld>
+  <p:clrMapOvr>
+    <a:masterClrMapping/>
+  </p:clrMapOvr>
+</p:sld>
+</file>
+
+<file path=ppt/slides/slide14.xml><?xml version="1.0" encoding="utf-8"?>
+<p:sld xmlns:a="http://schemas.openxmlformats.org/drawingml/2006/main" xmlns:r="http://schemas.openxmlformats.org/officeDocument/2006/relationships" xmlns:p="http://schemas.openxmlformats.org/presentationml/2006/main">
+  <p:cSld>
+    <p:spTree>
+      <p:nvGrpSpPr>
+        <p:cNvPr id="1" name=""/>
+        <p:cNvGrpSpPr/>
+        <p:nvPr/>
+      </p:nvGrpSpPr>
+      <p:grpSpPr>
+        <a:xfrm>
+          <a:off x="0" y="0"/>
+          <a:ext cx="0" cy="0"/>
+          <a:chOff x="0" y="0"/>
+          <a:chExt cx="0" cy="0"/>
+        </a:xfrm>
+      </p:grpSpPr>
+      <p:sp>
+        <p:nvSpPr>
           <p:cNvPr id="2" name="Заголовок 1"/>
           <p:cNvSpPr>
             <a:spLocks noGrp="1"/>
@@ -18484,7 +18731,7 @@
 </p:sld>
 </file>
 
-<file path=ppt/slides/slide13.xml><?xml version="1.0" encoding="utf-8"?>
+<file path=ppt/slides/slide15.xml><?xml version="1.0" encoding="utf-8"?>
 <p:sld xmlns:a="http://schemas.openxmlformats.org/drawingml/2006/main" xmlns:r="http://schemas.openxmlformats.org/officeDocument/2006/relationships" xmlns:p="http://schemas.openxmlformats.org/presentationml/2006/main">
   <p:cSld>
     <p:spTree>
@@ -18974,14 +19221,14 @@
           <p:nvPr>
             <p:extLst>
               <p:ext uri="{D42A27DB-BD31-4B8C-83A1-F6EECF244321}">
-                <p14:modId xmlns:p14="http://schemas.microsoft.com/office/powerpoint/2010/main" val="1436385608"/>
+                <p14:modId xmlns:p14="http://schemas.microsoft.com/office/powerpoint/2010/main" val="3056869055"/>
               </p:ext>
             </p:extLst>
           </p:nvPr>
         </p:nvGraphicFramePr>
         <p:xfrm>
-          <a:off x="834188" y="2204704"/>
-          <a:ext cx="10519612" cy="4171008"/>
+          <a:off x="369988" y="1697627"/>
+          <a:ext cx="11452024" cy="4927616"/>
         </p:xfrm>
         <a:graphic>
           <a:graphicData uri="http://schemas.openxmlformats.org/drawingml/2006/table">
@@ -18990,28 +19237,28 @@
                 <a:tableStyleId>{5C22544A-7EE6-4342-B048-85BDC9FD1C3A}</a:tableStyleId>
               </a:tblPr>
               <a:tblGrid>
-                <a:gridCol w="2629903">
+                <a:gridCol w="2863006">
                   <a:extLst>
                     <a:ext uri="{9D8B030D-6E8A-4147-A177-3AD203B41FA5}">
                       <a16:colId xmlns:a16="http://schemas.microsoft.com/office/drawing/2014/main" val="2860347986"/>
                     </a:ext>
                   </a:extLst>
                 </a:gridCol>
-                <a:gridCol w="2629903">
+                <a:gridCol w="2863006">
                   <a:extLst>
                     <a:ext uri="{9D8B030D-6E8A-4147-A177-3AD203B41FA5}">
                       <a16:colId xmlns:a16="http://schemas.microsoft.com/office/drawing/2014/main" val="2869656744"/>
                     </a:ext>
                   </a:extLst>
                 </a:gridCol>
-                <a:gridCol w="2629903">
+                <a:gridCol w="2863006">
                   <a:extLst>
                     <a:ext uri="{9D8B030D-6E8A-4147-A177-3AD203B41FA5}">
                       <a16:colId xmlns:a16="http://schemas.microsoft.com/office/drawing/2014/main" val="3905758762"/>
                     </a:ext>
                   </a:extLst>
                 </a:gridCol>
-                <a:gridCol w="2629903">
+                <a:gridCol w="2863006">
                   <a:extLst>
                     <a:ext uri="{9D8B030D-6E8A-4147-A177-3AD203B41FA5}">
                       <a16:colId xmlns:a16="http://schemas.microsoft.com/office/drawing/2014/main" val="1587737023"/>
@@ -19019,15 +19266,15 @@
                   </a:extLst>
                 </a:gridCol>
               </a:tblGrid>
-              <a:tr h="310436">
+              <a:tr h="526631">
                 <a:tc>
                   <a:txBody>
                     <a:bodyPr/>
                     <a:lstStyle/>
                     <a:p>
-                      <a:pPr fontAlgn="t"/>
+                      <a:pPr algn="ctr" fontAlgn="t"/>
                       <a:r>
-                        <a:rPr lang="ru-RU" dirty="0">
+                        <a:rPr lang="ru-RU" sz="1400" dirty="0">
                           <a:solidFill>
                             <a:srgbClr val="0B2F97"/>
                           </a:solidFill>
@@ -19044,9 +19291,9 @@
                     <a:bodyPr/>
                     <a:lstStyle/>
                     <a:p>
-                      <a:pPr fontAlgn="t"/>
+                      <a:pPr algn="ctr" fontAlgn="t"/>
                       <a:r>
-                        <a:rPr lang="ru-RU">
+                        <a:rPr lang="ru-RU" sz="1400" dirty="0">
                           <a:solidFill>
                             <a:srgbClr val="0B2F97"/>
                           </a:solidFill>
@@ -19063,9 +19310,9 @@
                     <a:bodyPr/>
                     <a:lstStyle/>
                     <a:p>
-                      <a:pPr fontAlgn="t"/>
+                      <a:pPr algn="ctr" fontAlgn="t"/>
                       <a:r>
-                        <a:rPr lang="ru-RU">
+                        <a:rPr lang="ru-RU" sz="1400">
                           <a:solidFill>
                             <a:srgbClr val="0B2F97"/>
                           </a:solidFill>
@@ -19082,9 +19329,9 @@
                     <a:bodyPr/>
                     <a:lstStyle/>
                     <a:p>
-                      <a:pPr fontAlgn="t"/>
+                      <a:pPr algn="ctr" fontAlgn="t"/>
                       <a:r>
-                        <a:rPr lang="ru-RU">
+                        <a:rPr lang="ru-RU" sz="1400" dirty="0">
                           <a:solidFill>
                             <a:srgbClr val="0B2F97"/>
                           </a:solidFill>
@@ -19102,15 +19349,15 @@
                   </a:ext>
                 </a:extLst>
               </a:tr>
-              <a:tr h="1074588">
+              <a:tr h="1269515">
                 <a:tc>
                   <a:txBody>
                     <a:bodyPr/>
                     <a:lstStyle/>
                     <a:p>
-                      <a:pPr fontAlgn="t"/>
+                      <a:pPr algn="ctr" fontAlgn="t"/>
                       <a:r>
-                        <a:rPr lang="en-US" sz="1200" dirty="0">
+                        <a:rPr lang="en-US" sz="1400" dirty="0">
                           <a:effectLst/>
                         </a:rPr>
                         <a:t>Google Earth Engine</a:t>
@@ -19124,9 +19371,9 @@
                     <a:bodyPr/>
                     <a:lstStyle/>
                     <a:p>
-                      <a:pPr fontAlgn="t"/>
+                      <a:pPr algn="ctr" fontAlgn="t"/>
                       <a:r>
-                        <a:rPr lang="ru-RU" sz="1200">
+                        <a:rPr lang="ru-RU" sz="1400" dirty="0">
                           <a:effectLst/>
                         </a:rPr>
                         <a:t>Мощная обработка, большой каталог данных</a:t>
@@ -19140,13 +19387,34 @@
                     <a:bodyPr/>
                     <a:lstStyle/>
                     <a:p>
-                      <a:pPr fontAlgn="t"/>
+                      <a:pPr algn="ctr" fontAlgn="t"/>
                       <a:r>
-                        <a:rPr lang="ru-RU" sz="1200">
+                        <a:rPr lang="ru-RU" sz="1400" dirty="0">
                           <a:effectLst/>
                         </a:rPr>
-                        <a:t>Требует навыков скриптинга, не ориентирован на готовый прикладной workflow</a:t>
+                        <a:t>Требует навыков </a:t>
                       </a:r>
+                      <a:r>
+                        <a:rPr lang="ru-RU" sz="1400" dirty="0" err="1">
+                          <a:effectLst/>
+                        </a:rPr>
+                        <a:t>скриптинга</a:t>
+                      </a:r>
+                      <a:r>
+                        <a:rPr lang="ru-RU" sz="1400" dirty="0">
+                          <a:effectLst/>
+                        </a:rPr>
+                        <a:t>, не ориентирован на готовый прикладной </a:t>
+                      </a:r>
+                      <a:r>
+                        <a:rPr lang="ru-RU" sz="1400" dirty="0" err="1">
+                          <a:effectLst/>
+                        </a:rPr>
+                        <a:t>workflow</a:t>
+                      </a:r>
+                      <a:endParaRPr lang="ru-RU" sz="1400" dirty="0">
+                        <a:effectLst/>
+                      </a:endParaRPr>
                     </a:p>
                   </a:txBody>
                   <a:tcPr marL="104775" marR="104775" marT="85725" marB="85725"/>
@@ -19156,9 +19424,9 @@
                     <a:bodyPr/>
                     <a:lstStyle/>
                     <a:p>
-                      <a:pPr fontAlgn="t"/>
+                      <a:pPr algn="ctr" fontAlgn="t"/>
                       <a:r>
-                        <a:rPr lang="ru-RU" sz="1200">
+                        <a:rPr lang="ru-RU" sz="1400" dirty="0">
                           <a:effectLst/>
                         </a:rPr>
                         <a:t>Подтверждает ценность автоматизации и визуального сценария</a:t>
@@ -19173,15 +19441,15 @@
                   </a:ext>
                 </a:extLst>
               </a:tr>
-              <a:tr h="1074588">
+              <a:tr h="1269515">
                 <a:tc>
                   <a:txBody>
                     <a:bodyPr/>
                     <a:lstStyle/>
                     <a:p>
-                      <a:pPr fontAlgn="t"/>
+                      <a:pPr algn="ctr" fontAlgn="t"/>
                       <a:r>
-                        <a:rPr lang="en-US" sz="1200">
+                        <a:rPr lang="en-US" sz="1400" dirty="0">
                           <a:effectLst/>
                         </a:rPr>
                         <a:t>Sentinel Hub</a:t>
@@ -19195,9 +19463,9 @@
                     <a:bodyPr/>
                     <a:lstStyle/>
                     <a:p>
-                      <a:pPr fontAlgn="t"/>
+                      <a:pPr algn="ctr" fontAlgn="t"/>
                       <a:r>
-                        <a:rPr lang="ru-RU" sz="1200">
+                        <a:rPr lang="ru-RU" sz="1400">
                           <a:effectLst/>
                         </a:rPr>
                         <a:t>Доступ к данным и API</a:t>
@@ -19211,9 +19479,9 @@
                     <a:bodyPr/>
                     <a:lstStyle/>
                     <a:p>
-                      <a:pPr fontAlgn="t"/>
+                      <a:pPr algn="ctr" fontAlgn="t"/>
                       <a:r>
-                        <a:rPr lang="ru-RU" sz="1200">
+                        <a:rPr lang="ru-RU" sz="1400" dirty="0">
                           <a:effectLst/>
                         </a:rPr>
                         <a:t>Фокус на доступе к сценам, а не на полном цикле пользовательского анализа</a:t>
@@ -19227,9 +19495,9 @@
                     <a:bodyPr/>
                     <a:lstStyle/>
                     <a:p>
-                      <a:pPr fontAlgn="t"/>
+                      <a:pPr algn="ctr" fontAlgn="t"/>
                       <a:r>
-                        <a:rPr lang="ru-RU" sz="1200">
+                        <a:rPr lang="ru-RU" sz="1400" dirty="0">
                           <a:effectLst/>
                         </a:rPr>
                         <a:t>Нужен собственный слой аналитики и отображения</a:t>
@@ -19244,15 +19512,15 @@
                   </a:ext>
                 </a:extLst>
               </a:tr>
-              <a:tr h="692512">
+              <a:tr h="818132">
                 <a:tc>
                   <a:txBody>
                     <a:bodyPr/>
                     <a:lstStyle/>
                     <a:p>
-                      <a:pPr fontAlgn="t"/>
+                      <a:pPr algn="ctr" fontAlgn="t"/>
                       <a:r>
-                        <a:rPr lang="en-US" sz="1200">
+                        <a:rPr lang="en-US" sz="1400">
                           <a:effectLst/>
                         </a:rPr>
                         <a:t>ESA WorldCover / Dynamic World</a:t>
@@ -19266,9 +19534,9 @@
                     <a:bodyPr/>
                     <a:lstStyle/>
                     <a:p>
-                      <a:pPr fontAlgn="t"/>
+                      <a:pPr algn="ctr" fontAlgn="t"/>
                       <a:r>
-                        <a:rPr lang="ru-RU" sz="1200">
+                        <a:rPr lang="ru-RU" sz="1400">
                           <a:effectLst/>
                         </a:rPr>
                         <a:t>Готовые глобальные продукты</a:t>
@@ -19282,9 +19550,9 @@
                     <a:bodyPr/>
                     <a:lstStyle/>
                     <a:p>
-                      <a:pPr fontAlgn="t"/>
+                      <a:pPr algn="ctr" fontAlgn="t"/>
                       <a:r>
-                        <a:rPr lang="ru-RU" sz="1200">
+                        <a:rPr lang="ru-RU" sz="1400">
                           <a:effectLst/>
                         </a:rPr>
                         <a:t>Нет пользовательской настройки под AOI и период анализа</a:t>
@@ -19298,12 +19566,24 @@
                     <a:bodyPr/>
                     <a:lstStyle/>
                     <a:p>
-                      <a:pPr fontAlgn="t"/>
+                      <a:pPr algn="ctr" fontAlgn="t"/>
                       <a:r>
-                        <a:rPr lang="ru-RU" sz="1200">
+                        <a:rPr lang="ru-RU" sz="1400" dirty="0">
                           <a:effectLst/>
                         </a:rPr>
-                        <a:t>Полезны как референс и источник сравнения качества</a:t>
+                        <a:t>Полезны как </a:t>
+                      </a:r>
+                      <a:r>
+                        <a:rPr lang="ru-RU" sz="1400" dirty="0" err="1">
+                          <a:effectLst/>
+                        </a:rPr>
+                        <a:t>референс</a:t>
+                      </a:r>
+                      <a:r>
+                        <a:rPr lang="ru-RU" sz="1400" dirty="0">
+                          <a:effectLst/>
+                        </a:rPr>
+                        <a:t> и источник сравнения качества</a:t>
                       </a:r>
                     </a:p>
                   </a:txBody>
@@ -19315,18 +19595,24 @@
                   </a:ext>
                 </a:extLst>
               </a:tr>
-              <a:tr h="883550">
+              <a:tr h="1043823">
                 <a:tc>
                   <a:txBody>
                     <a:bodyPr/>
                     <a:lstStyle/>
                     <a:p>
-                      <a:pPr fontAlgn="t"/>
+                      <a:pPr algn="ctr" fontAlgn="t"/>
                       <a:r>
-                        <a:rPr lang="en-US" sz="1200">
+                        <a:rPr lang="en-US" sz="1400" dirty="0" err="1">
                           <a:effectLst/>
                         </a:rPr>
-                        <a:t>MaRS Platform</a:t>
+                        <a:t>MaRS</a:t>
+                      </a:r>
+                      <a:r>
+                        <a:rPr lang="en-US" sz="1400" dirty="0">
+                          <a:effectLst/>
+                        </a:rPr>
+                        <a:t> Platform</a:t>
                       </a:r>
                     </a:p>
                   </a:txBody>
@@ -19337,9 +19623,9 @@
                     <a:bodyPr/>
                     <a:lstStyle/>
                     <a:p>
-                      <a:pPr fontAlgn="t"/>
+                      <a:pPr algn="ctr" fontAlgn="t"/>
                       <a:r>
-                        <a:rPr lang="ru-RU" sz="1200">
+                        <a:rPr lang="ru-RU" sz="1400">
                           <a:effectLst/>
                         </a:rPr>
                         <a:t>Интеграция данных, AOI, классификация, статистика и экспорт</a:t>
@@ -19353,9 +19639,9 @@
                     <a:bodyPr/>
                     <a:lstStyle/>
                     <a:p>
-                      <a:pPr fontAlgn="t"/>
+                      <a:pPr algn="ctr" fontAlgn="t"/>
                       <a:r>
-                        <a:rPr lang="ru-RU" sz="1200">
+                        <a:rPr lang="ru-RU" sz="1400">
                           <a:effectLst/>
                         </a:rPr>
                         <a:t>Требует дальнейшего развития моделей и промышленной интеграции</a:t>
@@ -19369,9 +19655,9 @@
                     <a:bodyPr/>
                     <a:lstStyle/>
                     <a:p>
-                      <a:pPr fontAlgn="t"/>
+                      <a:pPr algn="ctr" fontAlgn="t"/>
                       <a:r>
-                        <a:rPr lang="ru-RU" sz="1200" dirty="0">
+                        <a:rPr lang="ru-RU" sz="1400" dirty="0">
                           <a:effectLst/>
                         </a:rPr>
                         <a:t>Оптимальна как прикладная ИС под задачи проекта</a:t>
@@ -19977,13 +20263,7 @@
       </p:grpSpPr>
       <p:sp>
         <p:nvSpPr>
-          <p:cNvPr id="2" name="Заголовок 1">
-            <a:extLst>
-              <a:ext uri="{FF2B5EF4-FFF2-40B4-BE49-F238E27FC236}">
-                <a16:creationId xmlns:a16="http://schemas.microsoft.com/office/drawing/2014/main" id="{F27153B6-3FE8-4B08-A5FD-6A1522F17C7B}"/>
-              </a:ext>
-            </a:extLst>
-          </p:cNvPr>
+          <p:cNvPr id="5" name="Заголовок 4"/>
           <p:cNvSpPr>
             <a:spLocks noGrp="1"/>
           </p:cNvSpPr>
@@ -19991,472 +20271,47 @@
             <p:ph type="title"/>
           </p:nvPr>
         </p:nvSpPr>
+        <p:spPr/>
+        <p:txBody>
+          <a:bodyPr/>
+          <a:lstStyle/>
+          <a:p>
+            <a:r>
+              <a:rPr lang="ru-RU" dirty="0" smtClean="0"/>
+              <a:t>Последовательность потока данных</a:t>
+            </a:r>
+            <a:endParaRPr lang="ru-RU" dirty="0"/>
+          </a:p>
+        </p:txBody>
+      </p:sp>
+      <p:pic>
+        <p:nvPicPr>
+          <p:cNvPr id="7" name="Рисунок 6"/>
+          <p:cNvPicPr>
+            <a:picLocks noChangeAspect="1"/>
+          </p:cNvPicPr>
+          <p:nvPr/>
+        </p:nvPicPr>
+        <p:blipFill>
+          <a:blip r:embed="rId2"/>
+          <a:stretch>
+            <a:fillRect/>
+          </a:stretch>
+        </p:blipFill>
         <p:spPr>
           <a:xfrm>
-            <a:off x="75017" y="502852"/>
-            <a:ext cx="10515600" cy="1325563"/>
-          </a:xfrm>
-        </p:spPr>
-        <p:txBody>
-          <a:bodyPr/>
-          <a:lstStyle/>
-          <a:p>
-            <a:r>
-              <a:rPr lang="ru-RU" dirty="0"/>
-              <a:t>Проектирование и архитектура</a:t>
-            </a:r>
-          </a:p>
-        </p:txBody>
-      </p:sp>
-      <p:sp>
-        <p:nvSpPr>
-          <p:cNvPr id="30" name="Текст 29"/>
-          <p:cNvSpPr>
-            <a:spLocks noGrp="1"/>
-          </p:cNvSpPr>
-          <p:nvPr>
-            <p:ph type="body" idx="1"/>
-          </p:nvPr>
-        </p:nvSpPr>
-        <p:spPr>
-          <a:xfrm>
-            <a:off x="927100" y="3962806"/>
-            <a:ext cx="5157787" cy="823912"/>
-          </a:xfrm>
-        </p:spPr>
-        <p:txBody>
-          <a:bodyPr/>
-          <a:lstStyle/>
-          <a:p>
-            <a:r>
-              <a:rPr lang="ru-RU" dirty="0"/>
-              <a:t>Логика данных</a:t>
-            </a:r>
-          </a:p>
-        </p:txBody>
-      </p:sp>
-      <p:sp>
-        <p:nvSpPr>
-          <p:cNvPr id="31" name="Объект 30"/>
-          <p:cNvSpPr>
-            <a:spLocks noGrp="1"/>
-          </p:cNvSpPr>
-          <p:nvPr>
-            <p:ph sz="half" idx="2"/>
-          </p:nvPr>
-        </p:nvSpPr>
-        <p:spPr>
-          <a:xfrm>
-            <a:off x="962526" y="5037221"/>
-            <a:ext cx="5130886" cy="1152442"/>
-          </a:xfrm>
-        </p:spPr>
-        <p:txBody>
-          <a:bodyPr>
-            <a:normAutofit fontScale="62500" lnSpcReduction="20000"/>
-          </a:bodyPr>
-          <a:lstStyle/>
-          <a:p>
-            <a:pPr marL="0" indent="0">
-              <a:buNone/>
-            </a:pPr>
-            <a:r>
-              <a:rPr lang="ru-RU" dirty="0"/>
-              <a:t>Центральная сущность — запрос анализа. С ним связаны пользователь, выбранный период, AOI, набор сцен, результат классификации и метрики качества.</a:t>
-            </a:r>
-          </a:p>
-        </p:txBody>
-      </p:sp>
-      <p:sp>
-        <p:nvSpPr>
-          <p:cNvPr id="32" name="Текст 31"/>
-          <p:cNvSpPr>
-            <a:spLocks noGrp="1"/>
-          </p:cNvSpPr>
-          <p:nvPr>
-            <p:ph type="body" sz="quarter" idx="3"/>
-          </p:nvPr>
-        </p:nvSpPr>
-        <p:spPr>
-          <a:xfrm>
-            <a:off x="6411084" y="3975727"/>
-            <a:ext cx="5183188" cy="823912"/>
-          </a:xfrm>
-        </p:spPr>
-        <p:txBody>
-          <a:bodyPr numCol="3"/>
-          <a:lstStyle/>
-          <a:p>
-            <a:r>
-              <a:rPr lang="ru-RU" dirty="0" smtClean="0"/>
-              <a:t>Архитектурный </a:t>
-            </a:r>
-            <a:r>
-              <a:rPr lang="ru-RU" dirty="0"/>
-              <a:t>принцип</a:t>
-            </a:r>
-          </a:p>
-          <a:p>
-            <a:endParaRPr lang="ru-RU" dirty="0"/>
-          </a:p>
-        </p:txBody>
-      </p:sp>
-      <p:sp>
-        <p:nvSpPr>
-          <p:cNvPr id="33" name="Объект 32"/>
-          <p:cNvSpPr>
-            <a:spLocks noGrp="1"/>
-          </p:cNvSpPr>
-          <p:nvPr>
-            <p:ph sz="quarter" idx="4"/>
-          </p:nvPr>
-        </p:nvSpPr>
-        <p:spPr>
-          <a:xfrm>
-            <a:off x="6411084" y="5037221"/>
-            <a:ext cx="5183188" cy="1152441"/>
-          </a:xfrm>
-        </p:spPr>
-        <p:txBody>
-          <a:bodyPr>
-            <a:normAutofit fontScale="62500" lnSpcReduction="20000"/>
-          </a:bodyPr>
-          <a:lstStyle/>
-          <a:p>
-            <a:pPr marL="0" indent="0">
-              <a:buNone/>
-            </a:pPr>
-            <a:r>
-              <a:rPr lang="ru-RU" dirty="0"/>
-              <a:t>Модульность: интерфейс, API, аналитический модуль и база данных разделены, что упрощает масштабирование и сопровождение системы.</a:t>
-            </a:r>
-          </a:p>
-        </p:txBody>
-      </p:sp>
-      <p:sp>
-        <p:nvSpPr>
-          <p:cNvPr id="17" name="Text 1"/>
-          <p:cNvSpPr/>
-          <p:nvPr/>
-        </p:nvSpPr>
-        <p:spPr>
-          <a:xfrm>
-            <a:off x="511783" y="1814059"/>
-            <a:ext cx="2574204" cy="1899584"/>
-          </a:xfrm>
-          <a:prstGeom prst="roundRect">
-            <a:avLst>
-              <a:gd name="adj" fmla="val 129949"/>
-            </a:avLst>
-          </a:prstGeom>
-          <a:solidFill>
-            <a:srgbClr val="FFFFFF"/>
-          </a:solidFill>
-          <a:ln w="9525">
-            <a:solidFill>
-              <a:srgbClr val="D8DCE6"/>
-            </a:solidFill>
-          </a:ln>
-        </p:spPr>
-        <p:txBody>
-          <a:bodyPr wrap="none" lIns="0" tIns="0" rIns="0" bIns="0" rtlCol="0" anchor="ctr">
-            <a:normAutofit/>
-          </a:bodyPr>
-          <a:lstStyle/>
-          <a:p>
-            <a:pPr marL="0" indent="0">
-              <a:buNone/>
-            </a:pPr>
-            <a:endParaRPr lang="en-US" dirty="0"/>
-          </a:p>
-        </p:txBody>
-      </p:sp>
-      <p:sp>
-        <p:nvSpPr>
-          <p:cNvPr id="21" name="Text 8"/>
-          <p:cNvSpPr/>
-          <p:nvPr/>
-        </p:nvSpPr>
-        <p:spPr>
-          <a:xfrm>
-            <a:off x="781070" y="2210262"/>
-            <a:ext cx="2035629" cy="1107177"/>
+            <a:off x="1435130" y="2008426"/>
+            <a:ext cx="9321740" cy="4580189"/>
           </a:xfrm>
           <a:prstGeom prst="rect">
             <a:avLst/>
           </a:prstGeom>
-          <a:noFill/>
-          <a:ln/>
         </p:spPr>
-        <p:txBody>
-          <a:bodyPr wrap="square" lIns="0" tIns="0" rIns="0" bIns="0" rtlCol="0" anchor="t"/>
-          <a:lstStyle/>
-          <a:p>
-            <a:pPr marL="0" indent="0" algn="ctr">
-              <a:lnSpc>
-                <a:spcPts val="1632"/>
-              </a:lnSpc>
-              <a:buNone/>
-            </a:pPr>
-            <a:r>
-              <a:rPr lang="en-US" sz="1275" dirty="0">
-                <a:solidFill>
-                  <a:srgbClr val="1E1E1E"/>
-                </a:solidFill>
-                <a:latin typeface="Arial" pitchFamily="34" charset="0"/>
-                <a:ea typeface="Arial" pitchFamily="34" charset="-122"/>
-                <a:cs typeface="Arial" pitchFamily="34" charset="-120"/>
-              </a:rPr>
-              <a:t>Web UI, карта, формы выбора AOI, запуск анализа, просмотр результатов.</a:t>
-            </a:r>
-            <a:endParaRPr lang="en-US" sz="1275" dirty="0"/>
-          </a:p>
-        </p:txBody>
-      </p:sp>
-      <p:sp>
-        <p:nvSpPr>
-          <p:cNvPr id="25" name="Text 1"/>
-          <p:cNvSpPr/>
-          <p:nvPr/>
-        </p:nvSpPr>
-        <p:spPr>
-          <a:xfrm>
-            <a:off x="3352695" y="1810215"/>
-            <a:ext cx="2471200" cy="1899584"/>
-          </a:xfrm>
-          <a:prstGeom prst="roundRect">
-            <a:avLst>
-              <a:gd name="adj" fmla="val 129949"/>
-            </a:avLst>
-          </a:prstGeom>
-          <a:solidFill>
-            <a:srgbClr val="FFFFFF"/>
-          </a:solidFill>
-          <a:ln w="9525">
-            <a:solidFill>
-              <a:srgbClr val="D8DCE6"/>
-            </a:solidFill>
-          </a:ln>
-        </p:spPr>
-        <p:txBody>
-          <a:bodyPr wrap="none" lIns="0" tIns="0" rIns="0" bIns="0" rtlCol="0" anchor="ctr">
-            <a:normAutofit/>
-          </a:bodyPr>
-          <a:lstStyle/>
-          <a:p>
-            <a:pPr marL="0" indent="0">
-              <a:buNone/>
-            </a:pPr>
-            <a:endParaRPr lang="en-US" dirty="0"/>
-          </a:p>
-        </p:txBody>
-      </p:sp>
-      <p:sp>
-        <p:nvSpPr>
-          <p:cNvPr id="22" name="Text 9"/>
-          <p:cNvSpPr/>
-          <p:nvPr/>
-        </p:nvSpPr>
-        <p:spPr>
-          <a:xfrm>
-            <a:off x="3444488" y="2210262"/>
-            <a:ext cx="2189383" cy="1024996"/>
-          </a:xfrm>
-          <a:prstGeom prst="rect">
-            <a:avLst/>
-          </a:prstGeom>
-          <a:noFill/>
-          <a:ln/>
-        </p:spPr>
-        <p:txBody>
-          <a:bodyPr wrap="square" lIns="0" tIns="0" rIns="0" bIns="0" rtlCol="0" anchor="t"/>
-          <a:lstStyle/>
-          <a:p>
-            <a:pPr marL="0" indent="0" algn="ctr">
-              <a:lnSpc>
-                <a:spcPts val="1632"/>
-              </a:lnSpc>
-              <a:buNone/>
-            </a:pPr>
-            <a:r>
-              <a:rPr lang="en-US" sz="1275" dirty="0">
-                <a:solidFill>
-                  <a:srgbClr val="1E1E1E"/>
-                </a:solidFill>
-                <a:latin typeface="Arial" pitchFamily="34" charset="0"/>
-                <a:ea typeface="Arial" pitchFamily="34" charset="-122"/>
-                <a:cs typeface="Arial" pitchFamily="34" charset="-120"/>
-              </a:rPr>
-              <a:t>REST‑эндпоинты для запросов классификации, получения сцен, статистики и файлов.</a:t>
-            </a:r>
-            <a:endParaRPr lang="en-US" sz="1275" dirty="0"/>
-          </a:p>
-        </p:txBody>
-      </p:sp>
-      <p:sp>
-        <p:nvSpPr>
-          <p:cNvPr id="28" name="Text 1"/>
-          <p:cNvSpPr/>
-          <p:nvPr/>
-        </p:nvSpPr>
-        <p:spPr>
-          <a:xfrm>
-            <a:off x="6093412" y="1761510"/>
-            <a:ext cx="2574204" cy="1899584"/>
-          </a:xfrm>
-          <a:prstGeom prst="roundRect">
-            <a:avLst>
-              <a:gd name="adj" fmla="val 129949"/>
-            </a:avLst>
-          </a:prstGeom>
-          <a:solidFill>
-            <a:srgbClr val="FFFFFF"/>
-          </a:solidFill>
-          <a:ln w="9525">
-            <a:solidFill>
-              <a:srgbClr val="D8DCE6"/>
-            </a:solidFill>
-          </a:ln>
-        </p:spPr>
-        <p:txBody>
-          <a:bodyPr wrap="none" lIns="0" tIns="0" rIns="0" bIns="0" rtlCol="0" anchor="ctr">
-            <a:normAutofit/>
-          </a:bodyPr>
-          <a:lstStyle/>
-          <a:p>
-            <a:pPr marL="0" indent="0">
-              <a:buNone/>
-            </a:pPr>
-            <a:endParaRPr lang="en-US" dirty="0"/>
-          </a:p>
-        </p:txBody>
-      </p:sp>
-      <p:sp>
-        <p:nvSpPr>
-          <p:cNvPr id="23" name="Text 10"/>
-          <p:cNvSpPr/>
-          <p:nvPr/>
-        </p:nvSpPr>
-        <p:spPr>
-          <a:xfrm>
-            <a:off x="6411085" y="2191166"/>
-            <a:ext cx="1938857" cy="1107177"/>
-          </a:xfrm>
-          <a:prstGeom prst="rect">
-            <a:avLst/>
-          </a:prstGeom>
-          <a:noFill/>
-          <a:ln/>
-        </p:spPr>
-        <p:txBody>
-          <a:bodyPr wrap="square" lIns="0" tIns="0" rIns="0" bIns="0" rtlCol="0" anchor="t"/>
-          <a:lstStyle/>
-          <a:p>
-            <a:pPr marL="0" indent="0" algn="ctr">
-              <a:lnSpc>
-                <a:spcPts val="1632"/>
-              </a:lnSpc>
-              <a:buNone/>
-            </a:pPr>
-            <a:r>
-              <a:rPr lang="en-US" sz="1275" dirty="0">
-                <a:solidFill>
-                  <a:srgbClr val="1E1E1E"/>
-                </a:solidFill>
-                <a:latin typeface="Arial" pitchFamily="34" charset="0"/>
-                <a:ea typeface="Arial" pitchFamily="34" charset="-122"/>
-                <a:cs typeface="Arial" pitchFamily="34" charset="-120"/>
-              </a:rPr>
-              <a:t>Подбор сцен, запуск моделей MaRS / RNN / LSTM, формирование GeoTIFF и статистики.</a:t>
-            </a:r>
-            <a:endParaRPr lang="en-US" sz="1275" dirty="0"/>
-          </a:p>
-        </p:txBody>
-      </p:sp>
-      <p:sp>
-        <p:nvSpPr>
-          <p:cNvPr id="29" name="Text 1"/>
-          <p:cNvSpPr/>
-          <p:nvPr/>
-        </p:nvSpPr>
-        <p:spPr>
-          <a:xfrm>
-            <a:off x="8931176" y="1772968"/>
-            <a:ext cx="2574204" cy="1899584"/>
-          </a:xfrm>
-          <a:prstGeom prst="roundRect">
-            <a:avLst>
-              <a:gd name="adj" fmla="val 129949"/>
-            </a:avLst>
-          </a:prstGeom>
-          <a:solidFill>
-            <a:srgbClr val="FFFFFF"/>
-          </a:solidFill>
-          <a:ln w="9525">
-            <a:solidFill>
-              <a:srgbClr val="D8DCE6"/>
-            </a:solidFill>
-          </a:ln>
-        </p:spPr>
-        <p:txBody>
-          <a:bodyPr wrap="none" lIns="0" tIns="0" rIns="0" bIns="0" rtlCol="0" anchor="ctr">
-            <a:normAutofit/>
-          </a:bodyPr>
-          <a:lstStyle/>
-          <a:p>
-            <a:pPr marL="0" indent="0">
-              <a:buNone/>
-            </a:pPr>
-            <a:endParaRPr lang="en-US" dirty="0"/>
-          </a:p>
-        </p:txBody>
-      </p:sp>
-      <p:sp>
-        <p:nvSpPr>
-          <p:cNvPr id="24" name="Text 11"/>
-          <p:cNvSpPr/>
-          <p:nvPr/>
-        </p:nvSpPr>
-        <p:spPr>
-          <a:xfrm>
-            <a:off x="9178981" y="2210262"/>
-            <a:ext cx="2078593" cy="1024996"/>
-          </a:xfrm>
-          <a:prstGeom prst="rect">
-            <a:avLst/>
-          </a:prstGeom>
-          <a:noFill/>
-          <a:ln/>
-        </p:spPr>
-        <p:txBody>
-          <a:bodyPr wrap="square" lIns="0" tIns="0" rIns="0" bIns="0" rtlCol="0" anchor="t"/>
-          <a:lstStyle/>
-          <a:p>
-            <a:pPr marL="0" indent="0" algn="ctr">
-              <a:lnSpc>
-                <a:spcPts val="1632"/>
-              </a:lnSpc>
-              <a:buNone/>
-            </a:pPr>
-            <a:r>
-              <a:rPr lang="en-US" sz="1275" dirty="0">
-                <a:solidFill>
-                  <a:srgbClr val="1E1E1E"/>
-                </a:solidFill>
-                <a:latin typeface="Arial" pitchFamily="34" charset="0"/>
-                <a:ea typeface="Arial" pitchFamily="34" charset="-122"/>
-                <a:cs typeface="Arial" pitchFamily="34" charset="-120"/>
-              </a:rPr>
-              <a:t>PostgreSQL/PostGIS: пользователи, запросы, сцены, результаты, метрики, классы покрытия.</a:t>
-            </a:r>
-            <a:endParaRPr lang="en-US" sz="1275" dirty="0"/>
-          </a:p>
-        </p:txBody>
-      </p:sp>
+      </p:pic>
     </p:spTree>
     <p:extLst>
       <p:ext uri="{BB962C8B-B14F-4D97-AF65-F5344CB8AC3E}">
-        <p14:creationId xmlns:p14="http://schemas.microsoft.com/office/powerpoint/2010/main" val="3700633465"/>
+        <p14:creationId xmlns:p14="http://schemas.microsoft.com/office/powerpoint/2010/main" val="859465541"/>
       </p:ext>
     </p:extLst>
   </p:cSld>
@@ -20485,7 +20340,13 @@
       </p:grpSpPr>
       <p:sp>
         <p:nvSpPr>
-          <p:cNvPr id="7" name="Заголовок 6"/>
+          <p:cNvPr id="2" name="Заголовок 1">
+            <a:extLst>
+              <a:ext uri="{FF2B5EF4-FFF2-40B4-BE49-F238E27FC236}">
+                <a16:creationId xmlns:a16="http://schemas.microsoft.com/office/drawing/2014/main" id="{F27153B6-3FE8-4B08-A5FD-6A1522F17C7B}"/>
+              </a:ext>
+            </a:extLst>
+          </p:cNvPr>
           <p:cNvSpPr>
             <a:spLocks noGrp="1"/>
           </p:cNvSpPr>
@@ -20493,47 +20354,472 @@
             <p:ph type="title"/>
           </p:nvPr>
         </p:nvSpPr>
-        <p:spPr/>
-        <p:txBody>
-          <a:bodyPr/>
-          <a:lstStyle/>
-          <a:p>
-            <a:r>
-              <a:rPr lang="ru-RU" dirty="0" smtClean="0"/>
-              <a:t>Сценарии использования</a:t>
-            </a:r>
-            <a:endParaRPr lang="ru-RU" dirty="0"/>
-          </a:p>
-        </p:txBody>
-      </p:sp>
-      <p:pic>
-        <p:nvPicPr>
-          <p:cNvPr id="8" name="Рисунок 7"/>
-          <p:cNvPicPr>
-            <a:picLocks noChangeAspect="1"/>
-          </p:cNvPicPr>
-          <p:nvPr/>
-        </p:nvPicPr>
-        <p:blipFill>
-          <a:blip r:embed="rId2"/>
-          <a:stretch>
-            <a:fillRect/>
-          </a:stretch>
-        </p:blipFill>
         <p:spPr>
           <a:xfrm>
-            <a:off x="1060875" y="2044105"/>
-            <a:ext cx="10070250" cy="4396993"/>
+            <a:off x="75017" y="502852"/>
+            <a:ext cx="10515600" cy="1325563"/>
+          </a:xfrm>
+        </p:spPr>
+        <p:txBody>
+          <a:bodyPr/>
+          <a:lstStyle/>
+          <a:p>
+            <a:r>
+              <a:rPr lang="ru-RU" dirty="0"/>
+              <a:t>Проектирование и архитектура</a:t>
+            </a:r>
+          </a:p>
+        </p:txBody>
+      </p:sp>
+      <p:sp>
+        <p:nvSpPr>
+          <p:cNvPr id="30" name="Текст 29"/>
+          <p:cNvSpPr>
+            <a:spLocks noGrp="1"/>
+          </p:cNvSpPr>
+          <p:nvPr>
+            <p:ph type="body" idx="1"/>
+          </p:nvPr>
+        </p:nvSpPr>
+        <p:spPr>
+          <a:xfrm>
+            <a:off x="927100" y="3962806"/>
+            <a:ext cx="5157787" cy="823912"/>
+          </a:xfrm>
+        </p:spPr>
+        <p:txBody>
+          <a:bodyPr/>
+          <a:lstStyle/>
+          <a:p>
+            <a:r>
+              <a:rPr lang="ru-RU" dirty="0"/>
+              <a:t>Логика данных</a:t>
+            </a:r>
+          </a:p>
+        </p:txBody>
+      </p:sp>
+      <p:sp>
+        <p:nvSpPr>
+          <p:cNvPr id="31" name="Объект 30"/>
+          <p:cNvSpPr>
+            <a:spLocks noGrp="1"/>
+          </p:cNvSpPr>
+          <p:nvPr>
+            <p:ph sz="half" idx="2"/>
+          </p:nvPr>
+        </p:nvSpPr>
+        <p:spPr>
+          <a:xfrm>
+            <a:off x="962526" y="5037221"/>
+            <a:ext cx="5130886" cy="1152442"/>
+          </a:xfrm>
+        </p:spPr>
+        <p:txBody>
+          <a:bodyPr>
+            <a:normAutofit fontScale="62500" lnSpcReduction="20000"/>
+          </a:bodyPr>
+          <a:lstStyle/>
+          <a:p>
+            <a:pPr marL="0" indent="0">
+              <a:buNone/>
+            </a:pPr>
+            <a:r>
+              <a:rPr lang="ru-RU" dirty="0"/>
+              <a:t>Центральная сущность — запрос анализа. С ним связаны пользователь, выбранный период, AOI, набор сцен, результат классификации и метрики качества.</a:t>
+            </a:r>
+          </a:p>
+        </p:txBody>
+      </p:sp>
+      <p:sp>
+        <p:nvSpPr>
+          <p:cNvPr id="32" name="Текст 31"/>
+          <p:cNvSpPr>
+            <a:spLocks noGrp="1"/>
+          </p:cNvSpPr>
+          <p:nvPr>
+            <p:ph type="body" sz="quarter" idx="3"/>
+          </p:nvPr>
+        </p:nvSpPr>
+        <p:spPr>
+          <a:xfrm>
+            <a:off x="6411084" y="3975727"/>
+            <a:ext cx="5183188" cy="823912"/>
+          </a:xfrm>
+        </p:spPr>
+        <p:txBody>
+          <a:bodyPr numCol="3"/>
+          <a:lstStyle/>
+          <a:p>
+            <a:r>
+              <a:rPr lang="ru-RU" dirty="0" smtClean="0"/>
+              <a:t>Архитектурный </a:t>
+            </a:r>
+            <a:r>
+              <a:rPr lang="ru-RU" dirty="0"/>
+              <a:t>принцип</a:t>
+            </a:r>
+          </a:p>
+          <a:p>
+            <a:endParaRPr lang="ru-RU" dirty="0"/>
+          </a:p>
+        </p:txBody>
+      </p:sp>
+      <p:sp>
+        <p:nvSpPr>
+          <p:cNvPr id="33" name="Объект 32"/>
+          <p:cNvSpPr>
+            <a:spLocks noGrp="1"/>
+          </p:cNvSpPr>
+          <p:nvPr>
+            <p:ph sz="quarter" idx="4"/>
+          </p:nvPr>
+        </p:nvSpPr>
+        <p:spPr>
+          <a:xfrm>
+            <a:off x="6411084" y="5037221"/>
+            <a:ext cx="5183188" cy="1152441"/>
+          </a:xfrm>
+        </p:spPr>
+        <p:txBody>
+          <a:bodyPr>
+            <a:normAutofit fontScale="62500" lnSpcReduction="20000"/>
+          </a:bodyPr>
+          <a:lstStyle/>
+          <a:p>
+            <a:pPr marL="0" indent="0">
+              <a:buNone/>
+            </a:pPr>
+            <a:r>
+              <a:rPr lang="ru-RU" dirty="0"/>
+              <a:t>Модульность: интерфейс, API, аналитический модуль и база данных разделены, что упрощает масштабирование и сопровождение системы.</a:t>
+            </a:r>
+          </a:p>
+        </p:txBody>
+      </p:sp>
+      <p:sp>
+        <p:nvSpPr>
+          <p:cNvPr id="17" name="Text 1"/>
+          <p:cNvSpPr/>
+          <p:nvPr/>
+        </p:nvSpPr>
+        <p:spPr>
+          <a:xfrm>
+            <a:off x="511783" y="1814059"/>
+            <a:ext cx="2574204" cy="1899584"/>
+          </a:xfrm>
+          <a:prstGeom prst="roundRect">
+            <a:avLst>
+              <a:gd name="adj" fmla="val 129949"/>
+            </a:avLst>
+          </a:prstGeom>
+          <a:solidFill>
+            <a:srgbClr val="FFFFFF"/>
+          </a:solidFill>
+          <a:ln w="9525">
+            <a:solidFill>
+              <a:srgbClr val="D8DCE6"/>
+            </a:solidFill>
+          </a:ln>
+        </p:spPr>
+        <p:txBody>
+          <a:bodyPr wrap="none" lIns="0" tIns="0" rIns="0" bIns="0" rtlCol="0" anchor="ctr">
+            <a:normAutofit/>
+          </a:bodyPr>
+          <a:lstStyle/>
+          <a:p>
+            <a:pPr marL="0" indent="0">
+              <a:buNone/>
+            </a:pPr>
+            <a:endParaRPr lang="en-US" dirty="0"/>
+          </a:p>
+        </p:txBody>
+      </p:sp>
+      <p:sp>
+        <p:nvSpPr>
+          <p:cNvPr id="21" name="Text 8"/>
+          <p:cNvSpPr/>
+          <p:nvPr/>
+        </p:nvSpPr>
+        <p:spPr>
+          <a:xfrm>
+            <a:off x="781070" y="2210262"/>
+            <a:ext cx="2035629" cy="1107177"/>
           </a:xfrm>
           <a:prstGeom prst="rect">
             <a:avLst/>
           </a:prstGeom>
+          <a:noFill/>
+          <a:ln/>
         </p:spPr>
-      </p:pic>
+        <p:txBody>
+          <a:bodyPr wrap="square" lIns="0" tIns="0" rIns="0" bIns="0" rtlCol="0" anchor="t"/>
+          <a:lstStyle/>
+          <a:p>
+            <a:pPr marL="0" indent="0" algn="ctr">
+              <a:lnSpc>
+                <a:spcPts val="1632"/>
+              </a:lnSpc>
+              <a:buNone/>
+            </a:pPr>
+            <a:r>
+              <a:rPr lang="en-US" sz="1275" dirty="0">
+                <a:solidFill>
+                  <a:srgbClr val="1E1E1E"/>
+                </a:solidFill>
+                <a:latin typeface="Arial" pitchFamily="34" charset="0"/>
+                <a:ea typeface="Arial" pitchFamily="34" charset="-122"/>
+                <a:cs typeface="Arial" pitchFamily="34" charset="-120"/>
+              </a:rPr>
+              <a:t>Web UI, карта, формы выбора AOI, запуск анализа, просмотр результатов.</a:t>
+            </a:r>
+            <a:endParaRPr lang="en-US" sz="1275" dirty="0"/>
+          </a:p>
+        </p:txBody>
+      </p:sp>
+      <p:sp>
+        <p:nvSpPr>
+          <p:cNvPr id="25" name="Text 1"/>
+          <p:cNvSpPr/>
+          <p:nvPr/>
+        </p:nvSpPr>
+        <p:spPr>
+          <a:xfrm>
+            <a:off x="3352695" y="1810215"/>
+            <a:ext cx="2471200" cy="1899584"/>
+          </a:xfrm>
+          <a:prstGeom prst="roundRect">
+            <a:avLst>
+              <a:gd name="adj" fmla="val 129949"/>
+            </a:avLst>
+          </a:prstGeom>
+          <a:solidFill>
+            <a:srgbClr val="FFFFFF"/>
+          </a:solidFill>
+          <a:ln w="9525">
+            <a:solidFill>
+              <a:srgbClr val="D8DCE6"/>
+            </a:solidFill>
+          </a:ln>
+        </p:spPr>
+        <p:txBody>
+          <a:bodyPr wrap="none" lIns="0" tIns="0" rIns="0" bIns="0" rtlCol="0" anchor="ctr">
+            <a:normAutofit/>
+          </a:bodyPr>
+          <a:lstStyle/>
+          <a:p>
+            <a:pPr marL="0" indent="0">
+              <a:buNone/>
+            </a:pPr>
+            <a:endParaRPr lang="en-US" dirty="0"/>
+          </a:p>
+        </p:txBody>
+      </p:sp>
+      <p:sp>
+        <p:nvSpPr>
+          <p:cNvPr id="22" name="Text 9"/>
+          <p:cNvSpPr/>
+          <p:nvPr/>
+        </p:nvSpPr>
+        <p:spPr>
+          <a:xfrm>
+            <a:off x="3444488" y="2210262"/>
+            <a:ext cx="2189383" cy="1024996"/>
+          </a:xfrm>
+          <a:prstGeom prst="rect">
+            <a:avLst/>
+          </a:prstGeom>
+          <a:noFill/>
+          <a:ln/>
+        </p:spPr>
+        <p:txBody>
+          <a:bodyPr wrap="square" lIns="0" tIns="0" rIns="0" bIns="0" rtlCol="0" anchor="t"/>
+          <a:lstStyle/>
+          <a:p>
+            <a:pPr marL="0" indent="0" algn="ctr">
+              <a:lnSpc>
+                <a:spcPts val="1632"/>
+              </a:lnSpc>
+              <a:buNone/>
+            </a:pPr>
+            <a:r>
+              <a:rPr lang="en-US" sz="1275" dirty="0">
+                <a:solidFill>
+                  <a:srgbClr val="1E1E1E"/>
+                </a:solidFill>
+                <a:latin typeface="Arial" pitchFamily="34" charset="0"/>
+                <a:ea typeface="Arial" pitchFamily="34" charset="-122"/>
+                <a:cs typeface="Arial" pitchFamily="34" charset="-120"/>
+              </a:rPr>
+              <a:t>REST‑эндпоинты для запросов классификации, получения сцен, статистики и файлов.</a:t>
+            </a:r>
+            <a:endParaRPr lang="en-US" sz="1275" dirty="0"/>
+          </a:p>
+        </p:txBody>
+      </p:sp>
+      <p:sp>
+        <p:nvSpPr>
+          <p:cNvPr id="28" name="Text 1"/>
+          <p:cNvSpPr/>
+          <p:nvPr/>
+        </p:nvSpPr>
+        <p:spPr>
+          <a:xfrm>
+            <a:off x="6093412" y="1761510"/>
+            <a:ext cx="2574204" cy="1899584"/>
+          </a:xfrm>
+          <a:prstGeom prst="roundRect">
+            <a:avLst>
+              <a:gd name="adj" fmla="val 129949"/>
+            </a:avLst>
+          </a:prstGeom>
+          <a:solidFill>
+            <a:srgbClr val="FFFFFF"/>
+          </a:solidFill>
+          <a:ln w="9525">
+            <a:solidFill>
+              <a:srgbClr val="D8DCE6"/>
+            </a:solidFill>
+          </a:ln>
+        </p:spPr>
+        <p:txBody>
+          <a:bodyPr wrap="none" lIns="0" tIns="0" rIns="0" bIns="0" rtlCol="0" anchor="ctr">
+            <a:normAutofit/>
+          </a:bodyPr>
+          <a:lstStyle/>
+          <a:p>
+            <a:pPr marL="0" indent="0">
+              <a:buNone/>
+            </a:pPr>
+            <a:endParaRPr lang="en-US" dirty="0"/>
+          </a:p>
+        </p:txBody>
+      </p:sp>
+      <p:sp>
+        <p:nvSpPr>
+          <p:cNvPr id="23" name="Text 10"/>
+          <p:cNvSpPr/>
+          <p:nvPr/>
+        </p:nvSpPr>
+        <p:spPr>
+          <a:xfrm>
+            <a:off x="6411085" y="2191166"/>
+            <a:ext cx="1938857" cy="1107177"/>
+          </a:xfrm>
+          <a:prstGeom prst="rect">
+            <a:avLst/>
+          </a:prstGeom>
+          <a:noFill/>
+          <a:ln/>
+        </p:spPr>
+        <p:txBody>
+          <a:bodyPr wrap="square" lIns="0" tIns="0" rIns="0" bIns="0" rtlCol="0" anchor="t"/>
+          <a:lstStyle/>
+          <a:p>
+            <a:pPr marL="0" indent="0" algn="ctr">
+              <a:lnSpc>
+                <a:spcPts val="1632"/>
+              </a:lnSpc>
+              <a:buNone/>
+            </a:pPr>
+            <a:r>
+              <a:rPr lang="en-US" sz="1275" dirty="0">
+                <a:solidFill>
+                  <a:srgbClr val="1E1E1E"/>
+                </a:solidFill>
+                <a:latin typeface="Arial" pitchFamily="34" charset="0"/>
+                <a:ea typeface="Arial" pitchFamily="34" charset="-122"/>
+                <a:cs typeface="Arial" pitchFamily="34" charset="-120"/>
+              </a:rPr>
+              <a:t>Подбор сцен, запуск моделей MaRS / RNN / LSTM, формирование GeoTIFF и статистики.</a:t>
+            </a:r>
+            <a:endParaRPr lang="en-US" sz="1275" dirty="0"/>
+          </a:p>
+        </p:txBody>
+      </p:sp>
+      <p:sp>
+        <p:nvSpPr>
+          <p:cNvPr id="29" name="Text 1"/>
+          <p:cNvSpPr/>
+          <p:nvPr/>
+        </p:nvSpPr>
+        <p:spPr>
+          <a:xfrm>
+            <a:off x="8931176" y="1772968"/>
+            <a:ext cx="2574204" cy="1899584"/>
+          </a:xfrm>
+          <a:prstGeom prst="roundRect">
+            <a:avLst>
+              <a:gd name="adj" fmla="val 129949"/>
+            </a:avLst>
+          </a:prstGeom>
+          <a:solidFill>
+            <a:srgbClr val="FFFFFF"/>
+          </a:solidFill>
+          <a:ln w="9525">
+            <a:solidFill>
+              <a:srgbClr val="D8DCE6"/>
+            </a:solidFill>
+          </a:ln>
+        </p:spPr>
+        <p:txBody>
+          <a:bodyPr wrap="none" lIns="0" tIns="0" rIns="0" bIns="0" rtlCol="0" anchor="ctr">
+            <a:normAutofit/>
+          </a:bodyPr>
+          <a:lstStyle/>
+          <a:p>
+            <a:pPr marL="0" indent="0">
+              <a:buNone/>
+            </a:pPr>
+            <a:endParaRPr lang="en-US" dirty="0"/>
+          </a:p>
+        </p:txBody>
+      </p:sp>
+      <p:sp>
+        <p:nvSpPr>
+          <p:cNvPr id="24" name="Text 11"/>
+          <p:cNvSpPr/>
+          <p:nvPr/>
+        </p:nvSpPr>
+        <p:spPr>
+          <a:xfrm>
+            <a:off x="9178981" y="2210262"/>
+            <a:ext cx="2078593" cy="1024996"/>
+          </a:xfrm>
+          <a:prstGeom prst="rect">
+            <a:avLst/>
+          </a:prstGeom>
+          <a:noFill/>
+          <a:ln/>
+        </p:spPr>
+        <p:txBody>
+          <a:bodyPr wrap="square" lIns="0" tIns="0" rIns="0" bIns="0" rtlCol="0" anchor="t"/>
+          <a:lstStyle/>
+          <a:p>
+            <a:pPr marL="0" indent="0" algn="ctr">
+              <a:lnSpc>
+                <a:spcPts val="1632"/>
+              </a:lnSpc>
+              <a:buNone/>
+            </a:pPr>
+            <a:r>
+              <a:rPr lang="en-US" sz="1275" dirty="0">
+                <a:solidFill>
+                  <a:srgbClr val="1E1E1E"/>
+                </a:solidFill>
+                <a:latin typeface="Arial" pitchFamily="34" charset="0"/>
+                <a:ea typeface="Arial" pitchFamily="34" charset="-122"/>
+                <a:cs typeface="Arial" pitchFamily="34" charset="-120"/>
+              </a:rPr>
+              <a:t>PostgreSQL/PostGIS: пользователи, запросы, сцены, результаты, метрики, классы покрытия.</a:t>
+            </a:r>
+            <a:endParaRPr lang="en-US" sz="1275" dirty="0"/>
+          </a:p>
+        </p:txBody>
+      </p:sp>
     </p:spTree>
     <p:extLst>
       <p:ext uri="{BB962C8B-B14F-4D97-AF65-F5344CB8AC3E}">
-        <p14:creationId xmlns:p14="http://schemas.microsoft.com/office/powerpoint/2010/main" val="1986234477"/>
+        <p14:creationId xmlns:p14="http://schemas.microsoft.com/office/powerpoint/2010/main" val="3700633465"/>
       </p:ext>
     </p:extLst>
   </p:cSld>
@@ -20562,152 +20848,362 @@
       </p:grpSpPr>
       <p:sp>
         <p:nvSpPr>
-          <p:cNvPr id="4" name="Заголовок 3"/>
+          <p:cNvPr id="7" name="Заголовок 6"/>
           <p:cNvSpPr>
             <a:spLocks noGrp="1"/>
           </p:cNvSpPr>
           <p:nvPr>
             <p:ph type="title"/>
+          </p:nvPr>
+        </p:nvSpPr>
+        <p:spPr/>
+        <p:txBody>
+          <a:bodyPr/>
+          <a:lstStyle/>
+          <a:p>
+            <a:r>
+              <a:rPr lang="ru-RU" dirty="0" smtClean="0"/>
+              <a:t>Архитектура базы данных</a:t>
+            </a:r>
+            <a:endParaRPr lang="ru-RU" dirty="0"/>
+          </a:p>
+        </p:txBody>
+      </p:sp>
+      <p:sp>
+        <p:nvSpPr>
+          <p:cNvPr id="9" name="Текст 8"/>
+          <p:cNvSpPr>
+            <a:spLocks noGrp="1"/>
+          </p:cNvSpPr>
+          <p:nvPr>
+            <p:ph type="body" sz="half" idx="2"/>
           </p:nvPr>
         </p:nvSpPr>
         <p:spPr>
           <a:xfrm>
-            <a:off x="988177" y="972588"/>
-            <a:ext cx="10890712" cy="539635"/>
+            <a:off x="962025" y="2552699"/>
+            <a:ext cx="4557626" cy="4114107"/>
           </a:xfrm>
         </p:spPr>
         <p:txBody>
-          <a:bodyPr/>
-          <a:lstStyle/>
-          <a:p>
-            <a:r>
-              <a:rPr lang="ru-RU" dirty="0"/>
-              <a:t>Демонстрация работы и интерфейса</a:t>
-            </a:r>
+          <a:bodyPr>
+            <a:normAutofit fontScale="85000" lnSpcReduction="10000"/>
+          </a:bodyPr>
+          <a:lstStyle/>
+          <a:p>
+            <a:r>
+              <a:rPr lang="ru-RU" dirty="0" smtClean="0">
+                <a:solidFill>
+                  <a:srgbClr val="1F1F1F"/>
+                </a:solidFill>
+                <a:latin typeface="+mj-lt"/>
+              </a:rPr>
+              <a:t>В проекте реализованы следующие </a:t>
+            </a:r>
+            <a:r>
+              <a:rPr lang="ru-RU" dirty="0" err="1" smtClean="0">
+                <a:solidFill>
+                  <a:srgbClr val="1F1F1F"/>
+                </a:solidFill>
+                <a:latin typeface="+mj-lt"/>
+              </a:rPr>
+              <a:t>сущьности</a:t>
+            </a:r>
+            <a:r>
+              <a:rPr lang="ru-RU" dirty="0" smtClean="0">
+                <a:solidFill>
+                  <a:srgbClr val="1F1F1F"/>
+                </a:solidFill>
+                <a:latin typeface="+mj-lt"/>
+              </a:rPr>
+              <a:t>:</a:t>
+            </a:r>
+            <a:endParaRPr lang="ru-RU" dirty="0">
+              <a:solidFill>
+                <a:srgbClr val="1F1F1F"/>
+              </a:solidFill>
+              <a:latin typeface="+mj-lt"/>
+            </a:endParaRPr>
+          </a:p>
+          <a:p>
+            <a:pPr marL="285750" indent="-285750">
+              <a:buFontTx/>
+              <a:buChar char="−"/>
+            </a:pPr>
+            <a:r>
+              <a:rPr lang="ru-RU" b="1" dirty="0" err="1">
+                <a:solidFill>
+                  <a:srgbClr val="1F1F1F"/>
+                </a:solidFill>
+                <a:latin typeface="+mj-lt"/>
+              </a:rPr>
+              <a:t>roles</a:t>
+            </a:r>
+            <a:r>
+              <a:rPr lang="ru-RU" dirty="0">
+                <a:solidFill>
+                  <a:srgbClr val="1F1F1F"/>
+                </a:solidFill>
+                <a:latin typeface="+mj-lt"/>
+              </a:rPr>
+              <a:t> – роли пользователей;</a:t>
+            </a:r>
+          </a:p>
+          <a:p>
+            <a:pPr marL="285750" indent="-285750">
+              <a:buFontTx/>
+              <a:buChar char="−"/>
+            </a:pPr>
+            <a:r>
+              <a:rPr lang="ru-RU" b="1" dirty="0" err="1">
+                <a:solidFill>
+                  <a:srgbClr val="1F1F1F"/>
+                </a:solidFill>
+                <a:latin typeface="+mj-lt"/>
+              </a:rPr>
+              <a:t>users</a:t>
+            </a:r>
+            <a:r>
+              <a:rPr lang="ru-RU" dirty="0">
+                <a:solidFill>
+                  <a:srgbClr val="1F1F1F"/>
+                </a:solidFill>
+                <a:latin typeface="+mj-lt"/>
+              </a:rPr>
+              <a:t> – пользователи системы;</a:t>
+            </a:r>
+          </a:p>
+          <a:p>
+            <a:pPr marL="285750" indent="-285750">
+              <a:buFontTx/>
+              <a:buChar char="−"/>
+            </a:pPr>
+            <a:r>
+              <a:rPr lang="ru-RU" b="1" dirty="0" err="1">
+                <a:solidFill>
+                  <a:srgbClr val="1F1F1F"/>
+                </a:solidFill>
+                <a:latin typeface="+mj-lt"/>
+              </a:rPr>
+              <a:t>analysis_requests</a:t>
+            </a:r>
+            <a:r>
+              <a:rPr lang="ru-RU" dirty="0">
+                <a:solidFill>
+                  <a:srgbClr val="1F1F1F"/>
+                </a:solidFill>
+                <a:latin typeface="+mj-lt"/>
+              </a:rPr>
+              <a:t> – запросы на анализ;</a:t>
+            </a:r>
+          </a:p>
+          <a:p>
+            <a:pPr marL="285750" indent="-285750">
+              <a:buFontTx/>
+              <a:buChar char="−"/>
+            </a:pPr>
+            <a:r>
+              <a:rPr lang="ru-RU" b="1" dirty="0" err="1">
+                <a:solidFill>
+                  <a:srgbClr val="1F1F1F"/>
+                </a:solidFill>
+                <a:latin typeface="+mj-lt"/>
+              </a:rPr>
+              <a:t>data_sources</a:t>
+            </a:r>
+            <a:r>
+              <a:rPr lang="ru-RU" dirty="0">
+                <a:solidFill>
+                  <a:srgbClr val="1F1F1F"/>
+                </a:solidFill>
+                <a:latin typeface="+mj-lt"/>
+              </a:rPr>
+              <a:t> – источники спутниковых данных;</a:t>
+            </a:r>
+          </a:p>
+          <a:p>
+            <a:pPr marL="285750" indent="-285750">
+              <a:buFontTx/>
+              <a:buChar char="−"/>
+            </a:pPr>
+            <a:r>
+              <a:rPr lang="ru-RU" b="1" dirty="0" err="1">
+                <a:solidFill>
+                  <a:srgbClr val="1F1F1F"/>
+                </a:solidFill>
+                <a:latin typeface="+mj-lt"/>
+              </a:rPr>
+              <a:t>satellite_scenes</a:t>
+            </a:r>
+            <a:r>
+              <a:rPr lang="ru-RU" dirty="0">
+                <a:solidFill>
+                  <a:srgbClr val="1F1F1F"/>
+                </a:solidFill>
+                <a:latin typeface="+mj-lt"/>
+              </a:rPr>
+              <a:t> – загруженные спутниковые сцены;</a:t>
+            </a:r>
+          </a:p>
+          <a:p>
+            <a:pPr marL="285750" indent="-285750">
+              <a:buFontTx/>
+              <a:buChar char="−"/>
+            </a:pPr>
+            <a:r>
+              <a:rPr lang="ru-RU" b="1" dirty="0" err="1">
+                <a:solidFill>
+                  <a:srgbClr val="1F1F1F"/>
+                </a:solidFill>
+                <a:latin typeface="+mj-lt"/>
+              </a:rPr>
+              <a:t>request_scenes</a:t>
+            </a:r>
+            <a:r>
+              <a:rPr lang="ru-RU" dirty="0">
+                <a:solidFill>
+                  <a:srgbClr val="1F1F1F"/>
+                </a:solidFill>
+                <a:latin typeface="+mj-lt"/>
+              </a:rPr>
+              <a:t> – связь между запросом анализа и сценами;</a:t>
+            </a:r>
+          </a:p>
+          <a:p>
+            <a:pPr marL="285750" indent="-285750">
+              <a:buFontTx/>
+              <a:buChar char="−"/>
+            </a:pPr>
+            <a:r>
+              <a:rPr lang="ru-RU" b="1" dirty="0" err="1">
+                <a:solidFill>
+                  <a:srgbClr val="1F1F1F"/>
+                </a:solidFill>
+                <a:latin typeface="+mj-lt"/>
+              </a:rPr>
+              <a:t>classification_results</a:t>
+            </a:r>
+            <a:r>
+              <a:rPr lang="ru-RU" dirty="0">
+                <a:solidFill>
+                  <a:srgbClr val="1F1F1F"/>
+                </a:solidFill>
+                <a:latin typeface="+mj-lt"/>
+              </a:rPr>
+              <a:t> – результаты классификации;</a:t>
+            </a:r>
+          </a:p>
+          <a:p>
+            <a:pPr marL="285750" indent="-285750">
+              <a:buFontTx/>
+              <a:buChar char="−"/>
+            </a:pPr>
+            <a:r>
+              <a:rPr lang="ru-RU" b="1" dirty="0" err="1">
+                <a:solidFill>
+                  <a:srgbClr val="1F1F1F"/>
+                </a:solidFill>
+                <a:latin typeface="+mj-lt"/>
+              </a:rPr>
+              <a:t>quality_metrics</a:t>
+            </a:r>
+            <a:r>
+              <a:rPr lang="ru-RU" dirty="0">
+                <a:solidFill>
+                  <a:srgbClr val="1F1F1F"/>
+                </a:solidFill>
+                <a:latin typeface="+mj-lt"/>
+              </a:rPr>
+              <a:t> – метрики качества результата;</a:t>
+            </a:r>
+          </a:p>
+          <a:p>
+            <a:pPr marL="285750" indent="-285750">
+              <a:buFontTx/>
+              <a:buChar char="−"/>
+            </a:pPr>
+            <a:r>
+              <a:rPr lang="ru-RU" b="1" dirty="0" err="1">
+                <a:solidFill>
+                  <a:srgbClr val="1F1F1F"/>
+                </a:solidFill>
+                <a:latin typeface="+mj-lt"/>
+              </a:rPr>
+              <a:t>land_cover_classes</a:t>
+            </a:r>
+            <a:r>
+              <a:rPr lang="ru-RU" dirty="0">
+                <a:solidFill>
+                  <a:srgbClr val="1F1F1F"/>
+                </a:solidFill>
+                <a:latin typeface="+mj-lt"/>
+              </a:rPr>
+              <a:t> – справочник классов земных покровов;</a:t>
+            </a:r>
+          </a:p>
+          <a:p>
+            <a:pPr marL="285750" indent="-285750">
+              <a:buFontTx/>
+              <a:buChar char="−"/>
+            </a:pPr>
+            <a:r>
+              <a:rPr lang="ru-RU" b="1" dirty="0" err="1">
+                <a:solidFill>
+                  <a:srgbClr val="1F1F1F"/>
+                </a:solidFill>
+                <a:latin typeface="+mj-lt"/>
+              </a:rPr>
+              <a:t>result_class_stats</a:t>
+            </a:r>
+            <a:r>
+              <a:rPr lang="ru-RU" dirty="0">
+                <a:solidFill>
+                  <a:srgbClr val="1F1F1F"/>
+                </a:solidFill>
+                <a:latin typeface="+mj-lt"/>
+              </a:rPr>
+              <a:t> – статистика по классам для конкретного результата.</a:t>
+            </a:r>
+          </a:p>
+          <a:p>
+            <a:endParaRPr lang="ru-RU" dirty="0"/>
           </a:p>
         </p:txBody>
       </p:sp>
       <p:pic>
         <p:nvPicPr>
-          <p:cNvPr id="8" name="0512">
-            <a:hlinkClick r:id="" action="ppaction://media"/>
-          </p:cNvPr>
+          <p:cNvPr id="13" name="Рисунок 12"/>
           <p:cNvPicPr>
-            <a:picLocks noGrp="1" noChangeAspect="1"/>
+            <a:picLocks noChangeAspect="1"/>
           </p:cNvPicPr>
-          <p:nvPr>
-            <p:ph idx="1"/>
-            <a:videoFile r:link="rId2"/>
-            <p:extLst>
-              <p:ext uri="{DAA4B4D4-6D71-4841-9C94-3DE7FCFB9230}">
-                <p14:media xmlns:p14="http://schemas.microsoft.com/office/powerpoint/2010/main" r:embed="rId1"/>
-              </p:ext>
-            </p:extLst>
-          </p:nvPr>
+          <p:nvPr/>
         </p:nvPicPr>
         <p:blipFill>
-          <a:blip r:embed="rId4"/>
+          <a:blip r:embed="rId2"/>
           <a:stretch>
             <a:fillRect/>
           </a:stretch>
         </p:blipFill>
         <p:spPr>
           <a:xfrm>
-            <a:off x="1991101" y="1770639"/>
-            <a:ext cx="8233554" cy="4631373"/>
+            <a:off x="6079546" y="0"/>
+            <a:ext cx="4959755" cy="6844159"/>
           </a:xfrm>
+          <a:prstGeom prst="rect">
+            <a:avLst/>
+          </a:prstGeom>
         </p:spPr>
       </p:pic>
     </p:spTree>
     <p:extLst>
       <p:ext uri="{BB962C8B-B14F-4D97-AF65-F5344CB8AC3E}">
-        <p14:creationId xmlns:p14="http://schemas.microsoft.com/office/powerpoint/2010/main" val="1924369485"/>
+        <p14:creationId xmlns:p14="http://schemas.microsoft.com/office/powerpoint/2010/main" val="2187815866"/>
       </p:ext>
     </p:extLst>
   </p:cSld>
   <p:clrMapOvr>
     <a:masterClrMapping/>
   </p:clrMapOvr>
-  <p:timing>
-    <p:tnLst>
-      <p:par>
-        <p:cTn id="1" dur="indefinite" restart="never" nodeType="tmRoot">
-          <p:childTnLst>
-            <p:seq concurrent="1" nextAc="seek">
-              <p:cTn id="2" restart="whenNotActive" fill="hold" evtFilter="cancelBubble" nodeType="interactiveSeq">
-                <p:stCondLst>
-                  <p:cond evt="onClick" delay="0">
-                    <p:tgtEl>
-                      <p:spTgt spid="8"/>
-                    </p:tgtEl>
-                  </p:cond>
-                </p:stCondLst>
-                <p:endSync evt="end" delay="0">
-                  <p:rtn val="all"/>
-                </p:endSync>
-                <p:childTnLst>
-                  <p:par>
-                    <p:cTn id="3" fill="hold">
-                      <p:stCondLst>
-                        <p:cond delay="0"/>
-                      </p:stCondLst>
-                      <p:childTnLst>
-                        <p:par>
-                          <p:cTn id="4" fill="hold">
-                            <p:stCondLst>
-                              <p:cond delay="0"/>
-                            </p:stCondLst>
-                            <p:childTnLst>
-                              <p:par>
-                                <p:cTn id="5" presetID="2" presetClass="mediacall" presetSubtype="0" fill="hold" nodeType="clickEffect">
-                                  <p:stCondLst>
-                                    <p:cond delay="0"/>
-                                  </p:stCondLst>
-                                  <p:childTnLst>
-                                    <p:cmd type="call" cmd="togglePause">
-                                      <p:cBhvr>
-                                        <p:cTn id="6" dur="1" fill="hold"/>
-                                        <p:tgtEl>
-                                          <p:spTgt spid="8"/>
-                                        </p:tgtEl>
-                                      </p:cBhvr>
-                                    </p:cmd>
-                                  </p:childTnLst>
-                                </p:cTn>
-                              </p:par>
-                            </p:childTnLst>
-                          </p:cTn>
-                        </p:par>
-                      </p:childTnLst>
-                    </p:cTn>
-                  </p:par>
-                </p:childTnLst>
-              </p:cTn>
-              <p:nextCondLst>
-                <p:cond evt="onClick" delay="0">
-                  <p:tgtEl>
-                    <p:spTgt spid="8"/>
-                  </p:tgtEl>
-                </p:cond>
-              </p:nextCondLst>
-            </p:seq>
-            <p:video>
-              <p:cMediaNode vol="80000">
-                <p:cTn id="7" fill="hold" display="0">
-                  <p:stCondLst>
-                    <p:cond delay="indefinite"/>
-                  </p:stCondLst>
-                </p:cTn>
-                <p:tgtEl>
-                  <p:spTgt spid="8"/>
-                </p:tgtEl>
-              </p:cMediaNode>
-            </p:video>
-          </p:childTnLst>
-        </p:cTn>
-      </p:par>
-    </p:tnLst>
-  </p:timing>
 </p:sld>
 </file>
 
